--- a/Calibração de Pesos em Surveys Amostrais.pptx
+++ b/Calibração de Pesos em Surveys Amostrais.pptx
@@ -150,7 +150,7 @@
 <file path=ppt/revisionInfo.xml><?xml version="1.0" encoding="utf-8"?>
 <p1510:revInfo xmlns:a="http://schemas.openxmlformats.org/drawingml/2006/main" xmlns:r="http://schemas.openxmlformats.org/officeDocument/2006/relationships" xmlns:p1510="http://schemas.microsoft.com/office/powerpoint/2015/10/main">
   <p1510:revLst>
-    <p1510:client id="{E78CDB16-9CAE-81D3-464B-E9776C2D8FDF}" v="1116" dt="2026-05-31T17:38:58.026"/>
+    <p1510:client id="{E78CDB16-9CAE-81D3-464B-E9776C2D8FDF}" v="2076" dt="2026-06-01T04:22:14.899"/>
   </p1510:revLst>
 </p1510:revInfo>
 </file>
@@ -11921,12 +11921,40 @@
         </p:nvGrpSpPr>
         <p:grpSpPr>
           <a:xfrm>
-            <a:off x="11643405" y="-1101486"/>
-            <a:ext cx="5223255" cy="4088726"/>
+            <a:off x="-2158859" y="-260411"/>
+            <a:ext cx="22131028" cy="3031991"/>
             <a:chOff x="0" y="0"/>
             <a:chExt cx="1375672" cy="1076866"/>
           </a:xfrm>
         </p:grpSpPr>
+        <p:sp>
+          <p:nvSpPr>
+            <p:cNvPr id="4" name="TextBox 4"/>
+            <p:cNvSpPr txBox="1"/>
+            <p:nvPr/>
+          </p:nvSpPr>
+          <p:spPr>
+            <a:xfrm>
+              <a:off x="0" y="-47625"/>
+              <a:ext cx="1375672" cy="1124491"/>
+            </a:xfrm>
+            <a:prstGeom prst="rect">
+              <a:avLst/>
+            </a:prstGeom>
+          </p:spPr>
+          <p:txBody>
+            <a:bodyPr lIns="50800" tIns="50800" rIns="50800" bIns="50800" rtlCol="0" anchor="ctr"/>
+            <a:lstStyle/>
+            <a:p>
+              <a:pPr algn="ctr">
+                <a:lnSpc>
+                  <a:spcPts val="3295"/>
+                </a:lnSpc>
+              </a:pPr>
+              <a:endParaRPr/>
+            </a:p>
+          </p:txBody>
+        </p:sp>
         <p:sp>
           <p:nvSpPr>
             <p:cNvPr id="3" name="Freeform 3"/>
@@ -11990,427 +12018,6 @@
             </a:solidFill>
           </p:spPr>
         </p:sp>
-        <p:sp>
-          <p:nvSpPr>
-            <p:cNvPr id="4" name="TextBox 4"/>
-            <p:cNvSpPr txBox="1"/>
-            <p:nvPr/>
-          </p:nvSpPr>
-          <p:spPr>
-            <a:xfrm>
-              <a:off x="0" y="-47625"/>
-              <a:ext cx="1375672" cy="1124491"/>
-            </a:xfrm>
-            <a:prstGeom prst="rect">
-              <a:avLst/>
-            </a:prstGeom>
-          </p:spPr>
-          <p:txBody>
-            <a:bodyPr lIns="50800" tIns="50800" rIns="50800" bIns="50800" rtlCol="0" anchor="ctr"/>
-            <a:lstStyle/>
-            <a:p>
-              <a:pPr algn="ctr">
-                <a:lnSpc>
-                  <a:spcPts val="3295"/>
-                </a:lnSpc>
-              </a:pPr>
-              <a:endParaRPr/>
-            </a:p>
-          </p:txBody>
-        </p:sp>
-      </p:grpSp>
-      <p:grpSp>
-        <p:nvGrpSpPr>
-          <p:cNvPr id="5" name="Group 5"/>
-          <p:cNvGrpSpPr/>
-          <p:nvPr/>
-        </p:nvGrpSpPr>
-        <p:grpSpPr>
-          <a:xfrm>
-            <a:off x="1182792" y="4884601"/>
-            <a:ext cx="15714543" cy="5946765"/>
-            <a:chOff x="0" y="0"/>
-            <a:chExt cx="4138810" cy="1566226"/>
-          </a:xfrm>
-        </p:grpSpPr>
-        <p:sp>
-          <p:nvSpPr>
-            <p:cNvPr id="6" name="Freeform 6"/>
-            <p:cNvSpPr/>
-            <p:nvPr/>
-          </p:nvSpPr>
-          <p:spPr>
-            <a:xfrm>
-              <a:off x="0" y="0"/>
-              <a:ext cx="4138810" cy="1566226"/>
-            </a:xfrm>
-            <a:custGeom>
-              <a:avLst/>
-              <a:gdLst/>
-              <a:ahLst/>
-              <a:cxnLst/>
-              <a:rect l="l" t="t" r="r" b="b"/>
-              <a:pathLst>
-                <a:path w="4138810" h="1566226">
-                  <a:moveTo>
-                    <a:pt x="6897" y="0"/>
-                  </a:moveTo>
-                  <a:lnTo>
-                    <a:pt x="4131913" y="0"/>
-                  </a:lnTo>
-                  <a:cubicBezTo>
-                    <a:pt x="4133742" y="0"/>
-                    <a:pt x="4135496" y="727"/>
-                    <a:pt x="4136790" y="2020"/>
-                  </a:cubicBezTo>
-                  <a:cubicBezTo>
-                    <a:pt x="4138083" y="3314"/>
-                    <a:pt x="4138810" y="5068"/>
-                    <a:pt x="4138810" y="6897"/>
-                  </a:cubicBezTo>
-                  <a:lnTo>
-                    <a:pt x="4138810" y="1559329"/>
-                  </a:lnTo>
-                  <a:cubicBezTo>
-                    <a:pt x="4138810" y="1563138"/>
-                    <a:pt x="4135722" y="1566226"/>
-                    <a:pt x="4131913" y="1566226"/>
-                  </a:cubicBezTo>
-                  <a:lnTo>
-                    <a:pt x="6897" y="1566226"/>
-                  </a:lnTo>
-                  <a:cubicBezTo>
-                    <a:pt x="3088" y="1566226"/>
-                    <a:pt x="0" y="1563138"/>
-                    <a:pt x="0" y="1559329"/>
-                  </a:cubicBezTo>
-                  <a:lnTo>
-                    <a:pt x="0" y="6897"/>
-                  </a:lnTo>
-                  <a:cubicBezTo>
-                    <a:pt x="0" y="3088"/>
-                    <a:pt x="3088" y="0"/>
-                    <a:pt x="6897" y="0"/>
-                  </a:cubicBezTo>
-                  <a:close/>
-                </a:path>
-              </a:pathLst>
-            </a:custGeom>
-            <a:solidFill>
-              <a:srgbClr val="C7E0EF"/>
-            </a:solidFill>
-          </p:spPr>
-        </p:sp>
-        <p:sp>
-          <p:nvSpPr>
-            <p:cNvPr id="7" name="TextBox 7"/>
-            <p:cNvSpPr txBox="1"/>
-            <p:nvPr/>
-          </p:nvSpPr>
-          <p:spPr>
-            <a:xfrm>
-              <a:off x="0" y="-47625"/>
-              <a:ext cx="4138810" cy="1613851"/>
-            </a:xfrm>
-            <a:prstGeom prst="rect">
-              <a:avLst/>
-            </a:prstGeom>
-          </p:spPr>
-          <p:txBody>
-            <a:bodyPr lIns="50800" tIns="50800" rIns="50800" bIns="50800" rtlCol="0" anchor="ctr"/>
-            <a:lstStyle/>
-            <a:p>
-              <a:pPr algn="ctr">
-                <a:lnSpc>
-                  <a:spcPts val="3295"/>
-                </a:lnSpc>
-              </a:pPr>
-              <a:endParaRPr/>
-            </a:p>
-          </p:txBody>
-        </p:sp>
-      </p:grpSp>
-      <p:grpSp>
-        <p:nvGrpSpPr>
-          <p:cNvPr id="8" name="Group 8"/>
-          <p:cNvGrpSpPr/>
-          <p:nvPr/>
-        </p:nvGrpSpPr>
-        <p:grpSpPr>
-          <a:xfrm>
-            <a:off x="2942077" y="4032259"/>
-            <a:ext cx="1704685" cy="1704685"/>
-            <a:chOff x="0" y="0"/>
-            <a:chExt cx="812800" cy="812800"/>
-          </a:xfrm>
-        </p:grpSpPr>
-        <p:sp>
-          <p:nvSpPr>
-            <p:cNvPr id="9" name="Freeform 9"/>
-            <p:cNvSpPr/>
-            <p:nvPr/>
-          </p:nvSpPr>
-          <p:spPr>
-            <a:xfrm>
-              <a:off x="0" y="0"/>
-              <a:ext cx="812800" cy="812800"/>
-            </a:xfrm>
-            <a:custGeom>
-              <a:avLst/>
-              <a:gdLst/>
-              <a:ahLst/>
-              <a:cxnLst/>
-              <a:rect l="l" t="t" r="r" b="b"/>
-              <a:pathLst>
-                <a:path w="812800" h="812800">
-                  <a:moveTo>
-                    <a:pt x="406400" y="0"/>
-                  </a:moveTo>
-                  <a:cubicBezTo>
-                    <a:pt x="181951" y="0"/>
-                    <a:pt x="0" y="181951"/>
-                    <a:pt x="0" y="406400"/>
-                  </a:cubicBezTo>
-                  <a:cubicBezTo>
-                    <a:pt x="0" y="630849"/>
-                    <a:pt x="181951" y="812800"/>
-                    <a:pt x="406400" y="812800"/>
-                  </a:cubicBezTo>
-                  <a:cubicBezTo>
-                    <a:pt x="630849" y="812800"/>
-                    <a:pt x="812800" y="630849"/>
-                    <a:pt x="812800" y="406400"/>
-                  </a:cubicBezTo>
-                  <a:cubicBezTo>
-                    <a:pt x="812800" y="181951"/>
-                    <a:pt x="630849" y="0"/>
-                    <a:pt x="406400" y="0"/>
-                  </a:cubicBezTo>
-                  <a:close/>
-                </a:path>
-              </a:pathLst>
-            </a:custGeom>
-            <a:solidFill>
-              <a:srgbClr val="113D57"/>
-            </a:solidFill>
-          </p:spPr>
-        </p:sp>
-        <p:sp>
-          <p:nvSpPr>
-            <p:cNvPr id="10" name="TextBox 10"/>
-            <p:cNvSpPr txBox="1"/>
-            <p:nvPr/>
-          </p:nvSpPr>
-          <p:spPr>
-            <a:xfrm>
-              <a:off x="76200" y="19050"/>
-              <a:ext cx="660400" cy="717550"/>
-            </a:xfrm>
-            <a:prstGeom prst="rect">
-              <a:avLst/>
-            </a:prstGeom>
-          </p:spPr>
-          <p:txBody>
-            <a:bodyPr lIns="50800" tIns="50800" rIns="50800" bIns="50800" rtlCol="0" anchor="ctr"/>
-            <a:lstStyle/>
-            <a:p>
-              <a:pPr algn="ctr">
-                <a:lnSpc>
-                  <a:spcPts val="3600"/>
-                </a:lnSpc>
-              </a:pPr>
-              <a:endParaRPr/>
-            </a:p>
-          </p:txBody>
-        </p:sp>
-      </p:grpSp>
-      <p:grpSp>
-        <p:nvGrpSpPr>
-          <p:cNvPr id="11" name="Group 11"/>
-          <p:cNvGrpSpPr/>
-          <p:nvPr/>
-        </p:nvGrpSpPr>
-        <p:grpSpPr>
-          <a:xfrm>
-            <a:off x="7846006" y="4032259"/>
-            <a:ext cx="1704685" cy="1704685"/>
-            <a:chOff x="0" y="0"/>
-            <a:chExt cx="812800" cy="812800"/>
-          </a:xfrm>
-        </p:grpSpPr>
-        <p:sp>
-          <p:nvSpPr>
-            <p:cNvPr id="12" name="Freeform 12"/>
-            <p:cNvSpPr/>
-            <p:nvPr/>
-          </p:nvSpPr>
-          <p:spPr>
-            <a:xfrm>
-              <a:off x="0" y="0"/>
-              <a:ext cx="812800" cy="812800"/>
-            </a:xfrm>
-            <a:custGeom>
-              <a:avLst/>
-              <a:gdLst/>
-              <a:ahLst/>
-              <a:cxnLst/>
-              <a:rect l="l" t="t" r="r" b="b"/>
-              <a:pathLst>
-                <a:path w="812800" h="812800">
-                  <a:moveTo>
-                    <a:pt x="406400" y="0"/>
-                  </a:moveTo>
-                  <a:cubicBezTo>
-                    <a:pt x="181951" y="0"/>
-                    <a:pt x="0" y="181951"/>
-                    <a:pt x="0" y="406400"/>
-                  </a:cubicBezTo>
-                  <a:cubicBezTo>
-                    <a:pt x="0" y="630849"/>
-                    <a:pt x="181951" y="812800"/>
-                    <a:pt x="406400" y="812800"/>
-                  </a:cubicBezTo>
-                  <a:cubicBezTo>
-                    <a:pt x="630849" y="812800"/>
-                    <a:pt x="812800" y="630849"/>
-                    <a:pt x="812800" y="406400"/>
-                  </a:cubicBezTo>
-                  <a:cubicBezTo>
-                    <a:pt x="812800" y="181951"/>
-                    <a:pt x="630849" y="0"/>
-                    <a:pt x="406400" y="0"/>
-                  </a:cubicBezTo>
-                  <a:close/>
-                </a:path>
-              </a:pathLst>
-            </a:custGeom>
-            <a:solidFill>
-              <a:srgbClr val="113D57"/>
-            </a:solidFill>
-          </p:spPr>
-        </p:sp>
-        <p:sp>
-          <p:nvSpPr>
-            <p:cNvPr id="13" name="TextBox 13"/>
-            <p:cNvSpPr txBox="1"/>
-            <p:nvPr/>
-          </p:nvSpPr>
-          <p:spPr>
-            <a:xfrm>
-              <a:off x="76200" y="19050"/>
-              <a:ext cx="660400" cy="717550"/>
-            </a:xfrm>
-            <a:prstGeom prst="rect">
-              <a:avLst/>
-            </a:prstGeom>
-          </p:spPr>
-          <p:txBody>
-            <a:bodyPr lIns="50800" tIns="50800" rIns="50800" bIns="50800" rtlCol="0" anchor="ctr"/>
-            <a:lstStyle/>
-            <a:p>
-              <a:pPr algn="ctr">
-                <a:lnSpc>
-                  <a:spcPts val="3600"/>
-                </a:lnSpc>
-              </a:pPr>
-              <a:endParaRPr/>
-            </a:p>
-          </p:txBody>
-        </p:sp>
-      </p:grpSp>
-      <p:grpSp>
-        <p:nvGrpSpPr>
-          <p:cNvPr id="14" name="Group 14"/>
-          <p:cNvGrpSpPr/>
-          <p:nvPr/>
-        </p:nvGrpSpPr>
-        <p:grpSpPr>
-          <a:xfrm>
-            <a:off x="12816581" y="4032259"/>
-            <a:ext cx="1704685" cy="1704685"/>
-            <a:chOff x="0" y="0"/>
-            <a:chExt cx="812800" cy="812800"/>
-          </a:xfrm>
-        </p:grpSpPr>
-        <p:sp>
-          <p:nvSpPr>
-            <p:cNvPr id="15" name="Freeform 15"/>
-            <p:cNvSpPr/>
-            <p:nvPr/>
-          </p:nvSpPr>
-          <p:spPr>
-            <a:xfrm>
-              <a:off x="0" y="0"/>
-              <a:ext cx="812800" cy="812800"/>
-            </a:xfrm>
-            <a:custGeom>
-              <a:avLst/>
-              <a:gdLst/>
-              <a:ahLst/>
-              <a:cxnLst/>
-              <a:rect l="l" t="t" r="r" b="b"/>
-              <a:pathLst>
-                <a:path w="812800" h="812800">
-                  <a:moveTo>
-                    <a:pt x="406400" y="0"/>
-                  </a:moveTo>
-                  <a:cubicBezTo>
-                    <a:pt x="181951" y="0"/>
-                    <a:pt x="0" y="181951"/>
-                    <a:pt x="0" y="406400"/>
-                  </a:cubicBezTo>
-                  <a:cubicBezTo>
-                    <a:pt x="0" y="630849"/>
-                    <a:pt x="181951" y="812800"/>
-                    <a:pt x="406400" y="812800"/>
-                  </a:cubicBezTo>
-                  <a:cubicBezTo>
-                    <a:pt x="630849" y="812800"/>
-                    <a:pt x="812800" y="630849"/>
-                    <a:pt x="812800" y="406400"/>
-                  </a:cubicBezTo>
-                  <a:cubicBezTo>
-                    <a:pt x="812800" y="181951"/>
-                    <a:pt x="630849" y="0"/>
-                    <a:pt x="406400" y="0"/>
-                  </a:cubicBezTo>
-                  <a:close/>
-                </a:path>
-              </a:pathLst>
-            </a:custGeom>
-            <a:solidFill>
-              <a:srgbClr val="113D57"/>
-            </a:solidFill>
-          </p:spPr>
-        </p:sp>
-        <p:sp>
-          <p:nvSpPr>
-            <p:cNvPr id="16" name="TextBox 16"/>
-            <p:cNvSpPr txBox="1"/>
-            <p:nvPr/>
-          </p:nvSpPr>
-          <p:spPr>
-            <a:xfrm>
-              <a:off x="76200" y="19050"/>
-              <a:ext cx="660400" cy="717550"/>
-            </a:xfrm>
-            <a:prstGeom prst="rect">
-              <a:avLst/>
-            </a:prstGeom>
-          </p:spPr>
-          <p:txBody>
-            <a:bodyPr lIns="50800" tIns="50800" rIns="50800" bIns="50800" rtlCol="0" anchor="ctr"/>
-            <a:lstStyle/>
-            <a:p>
-              <a:pPr algn="ctr">
-                <a:lnSpc>
-                  <a:spcPts val="3600"/>
-                </a:lnSpc>
-              </a:pPr>
-              <a:endParaRPr/>
-            </a:p>
-          </p:txBody>
-        </p:sp>
       </p:grpSp>
       <p:sp>
         <p:nvSpPr>
@@ -12420,15 +12027,15 @@
         </p:nvSpPr>
         <p:spPr>
           <a:xfrm>
-            <a:off x="12045934" y="1469757"/>
-            <a:ext cx="4411525" cy="5283200"/>
+            <a:off x="314012" y="262060"/>
+            <a:ext cx="11140129" cy="6217792"/>
           </a:xfrm>
           <a:prstGeom prst="rect">
             <a:avLst/>
           </a:prstGeom>
         </p:spPr>
         <p:txBody>
-          <a:bodyPr lIns="0" tIns="0" rIns="0" bIns="0" rtlCol="0" anchor="t">
+          <a:bodyPr wrap="square" lIns="0" tIns="0" rIns="0" bIns="0" rtlCol="0" anchor="t">
             <a:spAutoFit/>
           </a:bodyPr>
           <a:lstStyle/>
@@ -12439,7 +12046,7 @@
               </a:lnSpc>
             </a:pPr>
             <a:r>
-              <a:rPr lang="en-US" sz="5000" b="1">
+              <a:rPr lang="en-US" sz="5000" b="1" dirty="0">
                 <a:solidFill>
                   <a:srgbClr val="FFFFFF"/>
                 </a:solidFill>
@@ -12448,298 +12055,1002 @@
                 <a:cs typeface="Montserrat Bold"/>
                 <a:sym typeface="Montserrat Bold"/>
               </a:rPr>
-              <a:t>A construção de um pequeno conjunto de dados de exemplo.</a:t>
-            </a:r>
+              <a:t>4. A </a:t>
+            </a:r>
+            <a:r>
+              <a:rPr lang="en-US" sz="5000" b="1" dirty="0" err="1">
+                <a:solidFill>
+                  <a:srgbClr val="FFFFFF"/>
+                </a:solidFill>
+                <a:latin typeface="Montserrat Bold"/>
+                <a:ea typeface="Montserrat Bold"/>
+                <a:cs typeface="Montserrat Bold"/>
+                <a:sym typeface="Montserrat Bold"/>
+              </a:rPr>
+              <a:t>construção</a:t>
+            </a:r>
+            <a:r>
+              <a:rPr lang="en-US" sz="5000" b="1" dirty="0">
+                <a:solidFill>
+                  <a:srgbClr val="FFFFFF"/>
+                </a:solidFill>
+                <a:latin typeface="Montserrat Bold"/>
+                <a:ea typeface="Montserrat Bold"/>
+                <a:cs typeface="Montserrat Bold"/>
+                <a:sym typeface="Montserrat Bold"/>
+              </a:rPr>
+              <a:t> de um </a:t>
+            </a:r>
+            <a:r>
+              <a:rPr lang="en-US" sz="5000" b="1" dirty="0" err="1">
+                <a:solidFill>
+                  <a:srgbClr val="FFFFFF"/>
+                </a:solidFill>
+                <a:latin typeface="Montserrat Bold"/>
+                <a:ea typeface="Montserrat Bold"/>
+                <a:cs typeface="Montserrat Bold"/>
+                <a:sym typeface="Montserrat Bold"/>
+              </a:rPr>
+              <a:t>pequeno</a:t>
+            </a:r>
+            <a:r>
+              <a:rPr lang="en-US" sz="5000" b="1" dirty="0">
+                <a:solidFill>
+                  <a:srgbClr val="FFFFFF"/>
+                </a:solidFill>
+                <a:latin typeface="Montserrat Bold"/>
+                <a:ea typeface="Montserrat Bold"/>
+                <a:cs typeface="Montserrat Bold"/>
+                <a:sym typeface="Montserrat Bold"/>
+              </a:rPr>
+              <a:t> conjunto de dados de </a:t>
+            </a:r>
+            <a:r>
+              <a:rPr lang="en-US" sz="5000" b="1" dirty="0" err="1">
+                <a:solidFill>
+                  <a:srgbClr val="FFFFFF"/>
+                </a:solidFill>
+                <a:latin typeface="Montserrat Bold"/>
+                <a:ea typeface="Montserrat Bold"/>
+                <a:cs typeface="Montserrat Bold"/>
+                <a:sym typeface="Montserrat Bold"/>
+              </a:rPr>
+              <a:t>exemplo</a:t>
+            </a:r>
+            <a:r>
+              <a:rPr lang="en-US" sz="5000" b="1" dirty="0">
+                <a:solidFill>
+                  <a:srgbClr val="FFFFFF"/>
+                </a:solidFill>
+                <a:latin typeface="Montserrat Bold"/>
+                <a:ea typeface="Montserrat Bold"/>
+                <a:cs typeface="Montserrat Bold"/>
+                <a:sym typeface="Montserrat Bold"/>
+              </a:rPr>
+              <a:t>.</a:t>
+            </a:r>
+            <a:endParaRPr lang="pt-BR" dirty="0">
+              <a:sym typeface="Montserrat Bold"/>
+            </a:endParaRPr>
+          </a:p>
+          <a:p>
+            <a:pPr>
+              <a:lnSpc>
+                <a:spcPts val="7000"/>
+              </a:lnSpc>
+            </a:pPr>
+            <a:r>
+              <a:rPr lang="pt-BR" dirty="0">
+                <a:solidFill>
+                  <a:srgbClr val="FFFFFF"/>
+                </a:solidFill>
+                <a:latin typeface="Calibri"/>
+                <a:ea typeface="Montserrat Bold"/>
+                <a:cs typeface="Montserrat Bold"/>
+              </a:rPr>
+              <a:t>FONTE: </a:t>
+            </a:r>
+            <a:r>
+              <a:rPr lang="pt-BR" dirty="0">
+                <a:solidFill>
+                  <a:srgbClr val="FFFFFF"/>
+                </a:solidFill>
+                <a:ea typeface="+mn-lt"/>
+                <a:cs typeface="+mn-lt"/>
+              </a:rPr>
+              <a:t>github.com/</a:t>
+            </a:r>
+            <a:r>
+              <a:rPr lang="pt-BR" dirty="0" err="1">
+                <a:solidFill>
+                  <a:srgbClr val="FFFFFF"/>
+                </a:solidFill>
+                <a:ea typeface="+mn-lt"/>
+                <a:cs typeface="+mn-lt"/>
+              </a:rPr>
+              <a:t>VictorLSantana</a:t>
+            </a:r>
+            <a:r>
+              <a:rPr lang="pt-BR" dirty="0">
+                <a:solidFill>
+                  <a:srgbClr val="FFFFFF"/>
+                </a:solidFill>
+                <a:ea typeface="+mn-lt"/>
+                <a:cs typeface="+mn-lt"/>
+              </a:rPr>
+              <a:t>/trabalho-met-num_2026.1</a:t>
+            </a:r>
+            <a:endParaRPr lang="en-US" sz="5000" b="1" dirty="0">
+              <a:solidFill>
+                <a:srgbClr val="FFFFFF"/>
+              </a:solidFill>
+              <a:ea typeface="+mn-lt"/>
+              <a:cs typeface="+mn-lt"/>
+            </a:endParaRPr>
+          </a:p>
+          <a:p>
+            <a:pPr algn="ctr">
+              <a:lnSpc>
+                <a:spcPts val="7000"/>
+              </a:lnSpc>
+            </a:pPr>
+            <a:endParaRPr lang="en-US" sz="5000" b="1" dirty="0">
+              <a:solidFill>
+                <a:srgbClr val="FFFFFF"/>
+              </a:solidFill>
+              <a:latin typeface="Montserrat Bold"/>
+              <a:ea typeface="Montserrat Bold"/>
+              <a:cs typeface="Montserrat Bold"/>
+            </a:endParaRPr>
+          </a:p>
+          <a:p>
+            <a:pPr algn="ctr">
+              <a:lnSpc>
+                <a:spcPts val="7000"/>
+              </a:lnSpc>
+            </a:pPr>
+            <a:endParaRPr lang="en-US" sz="5000" b="1" dirty="0">
+              <a:solidFill>
+                <a:srgbClr val="FFFFFF"/>
+              </a:solidFill>
+              <a:latin typeface="Montserrat Bold"/>
+              <a:ea typeface="Montserrat Bold"/>
+              <a:cs typeface="Montserrat Bold"/>
+            </a:endParaRPr>
+          </a:p>
+          <a:p>
+            <a:pPr algn="ctr">
+              <a:lnSpc>
+                <a:spcPts val="7000"/>
+              </a:lnSpc>
+            </a:pPr>
+            <a:endParaRPr lang="en-US" sz="5000" b="1" dirty="0">
+              <a:solidFill>
+                <a:srgbClr val="FFFFFF"/>
+              </a:solidFill>
+              <a:latin typeface="Montserrat Bold"/>
+              <a:ea typeface="Montserrat Bold"/>
+              <a:cs typeface="Montserrat Bold"/>
+            </a:endParaRPr>
+          </a:p>
+          <a:p>
+            <a:pPr algn="ctr">
+              <a:lnSpc>
+                <a:spcPts val="7000"/>
+              </a:lnSpc>
+            </a:pPr>
+            <a:endParaRPr lang="en-US" sz="5000" b="1" dirty="0">
+              <a:solidFill>
+                <a:srgbClr val="FFFFFF"/>
+              </a:solidFill>
+              <a:latin typeface="Montserrat Bold"/>
+              <a:ea typeface="Montserrat Bold"/>
+              <a:cs typeface="Montserrat Bold"/>
+            </a:endParaRPr>
           </a:p>
         </p:txBody>
       </p:sp>
+      <p:pic>
+        <p:nvPicPr>
+          <p:cNvPr id="32" name="Imagem 31" descr="Tela de celular com publicação numa rede social&#10;&#10;O conteúdo gerado por IA pode estar incorreto.">
+            <a:extLst>
+              <a:ext uri="{FF2B5EF4-FFF2-40B4-BE49-F238E27FC236}">
+                <a16:creationId xmlns:a16="http://schemas.microsoft.com/office/drawing/2014/main" id="{C6B23627-6F45-15B8-8D0A-2C87DAEAB904}"/>
+              </a:ext>
+            </a:extLst>
+          </p:cNvPr>
+          <p:cNvPicPr>
+            <a:picLocks noChangeAspect="1"/>
+          </p:cNvPicPr>
+          <p:nvPr/>
+        </p:nvPicPr>
+        <p:blipFill>
+          <a:blip r:embed="rId2"/>
+          <a:srcRect l="27115" t="34608" r="32513" b="9601"/>
+          <a:stretch>
+            <a:fillRect/>
+          </a:stretch>
+        </p:blipFill>
+        <p:spPr>
+          <a:xfrm>
+            <a:off x="-287" y="4910537"/>
+            <a:ext cx="6139319" cy="5500597"/>
+          </a:xfrm>
+          <a:prstGeom prst="rect">
+            <a:avLst/>
+          </a:prstGeom>
+        </p:spPr>
+      </p:pic>
+      <p:pic>
+        <p:nvPicPr>
+          <p:cNvPr id="36" name="Imagem 35" descr="Texto&#10;&#10;O conteúdo gerado por IA pode estar incorreto.">
+            <a:extLst>
+              <a:ext uri="{FF2B5EF4-FFF2-40B4-BE49-F238E27FC236}">
+                <a16:creationId xmlns:a16="http://schemas.microsoft.com/office/drawing/2014/main" id="{063E24D7-1A82-9A4E-2D8B-24ED2507F9E0}"/>
+              </a:ext>
+            </a:extLst>
+          </p:cNvPr>
+          <p:cNvPicPr>
+            <a:picLocks noChangeAspect="1"/>
+          </p:cNvPicPr>
+          <p:nvPr/>
+        </p:nvPicPr>
+        <p:blipFill>
+          <a:blip r:embed="rId3"/>
+          <a:srcRect l="26866" t="31864" r="37313" b="6224"/>
+          <a:stretch>
+            <a:fillRect/>
+          </a:stretch>
+        </p:blipFill>
+        <p:spPr>
+          <a:xfrm>
+            <a:off x="6088991" y="4900599"/>
+            <a:ext cx="5997820" cy="5499455"/>
+          </a:xfrm>
+          <a:prstGeom prst="rect">
+            <a:avLst/>
+          </a:prstGeom>
+        </p:spPr>
+      </p:pic>
       <p:sp>
         <p:nvSpPr>
-          <p:cNvPr id="18" name="TextBox 18"/>
+          <p:cNvPr id="38" name="TextBox 10">
+            <a:extLst>
+              <a:ext uri="{FF2B5EF4-FFF2-40B4-BE49-F238E27FC236}">
+                <a16:creationId xmlns:a16="http://schemas.microsoft.com/office/drawing/2014/main" id="{E908A0B5-383F-0674-058D-95233743E571}"/>
+              </a:ext>
+            </a:extLst>
+          </p:cNvPr>
           <p:cNvSpPr txBox="1"/>
           <p:nvPr/>
         </p:nvSpPr>
         <p:spPr>
           <a:xfrm>
-            <a:off x="3178111" y="4409939"/>
-            <a:ext cx="1172220" cy="854075"/>
+            <a:off x="167188" y="2783186"/>
+            <a:ext cx="17973914" cy="2156296"/>
           </a:xfrm>
           <a:prstGeom prst="rect">
             <a:avLst/>
           </a:prstGeom>
         </p:spPr>
         <p:txBody>
-          <a:bodyPr lIns="0" tIns="0" rIns="0" bIns="0" rtlCol="0" anchor="t">
+          <a:bodyPr wrap="square" lIns="0" tIns="0" rIns="0" bIns="0" rtlCol="0" anchor="t">
             <a:spAutoFit/>
           </a:bodyPr>
           <a:lstStyle/>
           <a:p>
-            <a:pPr algn="ctr">
+            <a:pPr algn="just">
               <a:lnSpc>
-                <a:spcPts val="7000"/>
+                <a:spcPts val="4299"/>
               </a:lnSpc>
             </a:pPr>
             <a:r>
-              <a:rPr lang="en-US" sz="5000" b="1">
-                <a:solidFill>
-                  <a:srgbClr val="FFFFFF"/>
-                </a:solidFill>
-                <a:latin typeface="Montserrat Bold"/>
-                <a:ea typeface="Montserrat Bold"/>
-                <a:cs typeface="Montserrat Bold"/>
-                <a:sym typeface="Montserrat Bold"/>
-              </a:rPr>
-              <a:t>H1</a:t>
-            </a:r>
+              <a:rPr lang="en-US" sz="2650" b="1" spc="53" dirty="0">
+                <a:solidFill>
+                  <a:srgbClr val="113D57"/>
+                </a:solidFill>
+                <a:latin typeface="Montserrat Medium"/>
+                <a:ea typeface="+mn-lt"/>
+                <a:cs typeface="+mn-lt"/>
+              </a:rPr>
+              <a:t>Foi </a:t>
+            </a:r>
+            <a:r>
+              <a:rPr lang="en-US" sz="2650" b="1" spc="53" dirty="0" err="1">
+                <a:solidFill>
+                  <a:srgbClr val="113D57"/>
+                </a:solidFill>
+                <a:latin typeface="Montserrat Medium"/>
+                <a:ea typeface="+mn-lt"/>
+                <a:cs typeface="+mn-lt"/>
+              </a:rPr>
+              <a:t>gerada</a:t>
+            </a:r>
+            <a:r>
+              <a:rPr lang="en-US" sz="2650" b="1" spc="53" dirty="0">
+                <a:solidFill>
+                  <a:srgbClr val="113D57"/>
+                </a:solidFill>
+                <a:latin typeface="Montserrat Medium"/>
+                <a:ea typeface="+mn-lt"/>
+                <a:cs typeface="+mn-lt"/>
+              </a:rPr>
+              <a:t> </a:t>
+            </a:r>
+            <a:r>
+              <a:rPr lang="en-US" sz="2650" b="1" spc="53" dirty="0" err="1">
+                <a:solidFill>
+                  <a:srgbClr val="113D57"/>
+                </a:solidFill>
+                <a:latin typeface="Montserrat Medium"/>
+                <a:ea typeface="+mn-lt"/>
+                <a:cs typeface="+mn-lt"/>
+              </a:rPr>
+              <a:t>uma</a:t>
+            </a:r>
+            <a:r>
+              <a:rPr lang="en-US" sz="2650" b="1" spc="53" dirty="0">
+                <a:solidFill>
+                  <a:srgbClr val="113D57"/>
+                </a:solidFill>
+                <a:latin typeface="Montserrat Medium"/>
+                <a:ea typeface="+mn-lt"/>
+                <a:cs typeface="+mn-lt"/>
+              </a:rPr>
+              <a:t> </a:t>
+            </a:r>
+            <a:r>
+              <a:rPr lang="en-US" sz="2650" b="1" spc="53" dirty="0" err="1">
+                <a:solidFill>
+                  <a:srgbClr val="113D57"/>
+                </a:solidFill>
+                <a:latin typeface="Montserrat Medium"/>
+                <a:ea typeface="+mn-lt"/>
+                <a:cs typeface="+mn-lt"/>
+              </a:rPr>
+              <a:t>amostra</a:t>
+            </a:r>
+            <a:r>
+              <a:rPr lang="en-US" sz="2650" b="1" spc="53" dirty="0">
+                <a:solidFill>
+                  <a:srgbClr val="113D57"/>
+                </a:solidFill>
+                <a:latin typeface="Montserrat Medium"/>
+                <a:ea typeface="+mn-lt"/>
+                <a:cs typeface="+mn-lt"/>
+              </a:rPr>
+              <a:t> </a:t>
+            </a:r>
+            <a:r>
+              <a:rPr lang="en-US" sz="2650" b="1" spc="53" dirty="0" err="1">
+                <a:solidFill>
+                  <a:srgbClr val="113D57"/>
+                </a:solidFill>
+                <a:latin typeface="Montserrat Medium"/>
+                <a:ea typeface="+mn-lt"/>
+                <a:cs typeface="+mn-lt"/>
+              </a:rPr>
+              <a:t>fictícia</a:t>
+            </a:r>
+            <a:r>
+              <a:rPr lang="en-US" sz="2650" b="1" spc="53" dirty="0">
+                <a:solidFill>
+                  <a:srgbClr val="113D57"/>
+                </a:solidFill>
+                <a:latin typeface="Montserrat Medium"/>
+                <a:ea typeface="+mn-lt"/>
+                <a:cs typeface="+mn-lt"/>
+              </a:rPr>
+              <a:t> com 50 </a:t>
+            </a:r>
+            <a:r>
+              <a:rPr lang="en-US" sz="2650" b="1" spc="53" dirty="0" err="1">
+                <a:solidFill>
+                  <a:srgbClr val="113D57"/>
+                </a:solidFill>
+                <a:latin typeface="Montserrat Medium"/>
+                <a:ea typeface="+mn-lt"/>
+                <a:cs typeface="+mn-lt"/>
+              </a:rPr>
+              <a:t>entrevistados</a:t>
+            </a:r>
+            <a:r>
+              <a:rPr lang="en-US" sz="2650" b="1" spc="53" dirty="0">
+                <a:solidFill>
+                  <a:srgbClr val="113D57"/>
+                </a:solidFill>
+                <a:latin typeface="Montserrat Medium"/>
+                <a:ea typeface="+mn-lt"/>
+                <a:cs typeface="+mn-lt"/>
+              </a:rPr>
+              <a:t> </a:t>
+            </a:r>
+            <a:r>
+              <a:rPr lang="en-US" sz="2650" b="1" spc="53" dirty="0" err="1">
+                <a:solidFill>
+                  <a:srgbClr val="113D57"/>
+                </a:solidFill>
+                <a:latin typeface="Montserrat Medium"/>
+                <a:ea typeface="+mn-lt"/>
+                <a:cs typeface="+mn-lt"/>
+              </a:rPr>
+              <a:t>utilizando</a:t>
+            </a:r>
+            <a:r>
+              <a:rPr lang="en-US" sz="2650" b="1" spc="53" dirty="0">
+                <a:solidFill>
+                  <a:srgbClr val="113D57"/>
+                </a:solidFill>
+                <a:latin typeface="Montserrat Medium"/>
+                <a:ea typeface="+mn-lt"/>
+                <a:cs typeface="+mn-lt"/>
+              </a:rPr>
+              <a:t> a </a:t>
+            </a:r>
+            <a:r>
+              <a:rPr lang="en-US" sz="2650" b="1" spc="53" dirty="0" err="1">
+                <a:solidFill>
+                  <a:srgbClr val="113D57"/>
+                </a:solidFill>
+                <a:latin typeface="Montserrat Medium"/>
+                <a:ea typeface="+mn-lt"/>
+                <a:cs typeface="+mn-lt"/>
+              </a:rPr>
+              <a:t>função</a:t>
+            </a:r>
+            <a:r>
+              <a:rPr lang="en-US" sz="2650" b="1" spc="53" dirty="0">
+                <a:solidFill>
+                  <a:srgbClr val="113D57"/>
+                </a:solidFill>
+                <a:latin typeface="Montserrat Medium"/>
+                <a:ea typeface="+mn-lt"/>
+                <a:cs typeface="+mn-lt"/>
+              </a:rPr>
+              <a:t> </a:t>
+            </a:r>
+            <a:r>
+              <a:rPr lang="en-US" sz="2650" b="1" spc="53" dirty="0">
+                <a:solidFill>
+                  <a:srgbClr val="113D57"/>
+                </a:solidFill>
+                <a:latin typeface="Montserrat Medium"/>
+              </a:rPr>
+              <a:t>sample()</a:t>
+            </a:r>
+            <a:r>
+              <a:rPr lang="en-US" sz="2650" b="1" spc="53" dirty="0">
+                <a:solidFill>
+                  <a:srgbClr val="113D57"/>
+                </a:solidFill>
+                <a:latin typeface="Montserrat Medium"/>
+                <a:ea typeface="+mn-lt"/>
+                <a:cs typeface="+mn-lt"/>
+              </a:rPr>
+              <a:t> do R. A </a:t>
+            </a:r>
+            <a:r>
+              <a:rPr lang="en-US" sz="2650" b="1" spc="53" dirty="0" err="1">
+                <a:solidFill>
+                  <a:srgbClr val="113D57"/>
+                </a:solidFill>
+                <a:latin typeface="Montserrat Medium"/>
+                <a:ea typeface="+mn-lt"/>
+                <a:cs typeface="+mn-lt"/>
+              </a:rPr>
+              <a:t>amostra</a:t>
+            </a:r>
+            <a:r>
+              <a:rPr lang="en-US" sz="2650" b="1" spc="53" dirty="0">
+                <a:solidFill>
+                  <a:srgbClr val="113D57"/>
+                </a:solidFill>
+                <a:latin typeface="Montserrat Medium"/>
+                <a:ea typeface="+mn-lt"/>
+                <a:cs typeface="+mn-lt"/>
+              </a:rPr>
+              <a:t> </a:t>
+            </a:r>
+            <a:r>
+              <a:rPr lang="en-US" sz="2650" b="1" spc="53" dirty="0" err="1">
+                <a:solidFill>
+                  <a:srgbClr val="113D57"/>
+                </a:solidFill>
+                <a:latin typeface="Montserrat Medium"/>
+                <a:ea typeface="+mn-lt"/>
+                <a:cs typeface="+mn-lt"/>
+              </a:rPr>
+              <a:t>foi</a:t>
+            </a:r>
+            <a:r>
+              <a:rPr lang="en-US" sz="2650" b="1" spc="53" dirty="0">
+                <a:solidFill>
+                  <a:srgbClr val="113D57"/>
+                </a:solidFill>
+                <a:latin typeface="Montserrat Medium"/>
+                <a:ea typeface="+mn-lt"/>
+                <a:cs typeface="+mn-lt"/>
+              </a:rPr>
+              <a:t> </a:t>
+            </a:r>
+            <a:r>
+              <a:rPr lang="en-US" sz="2650" b="1" spc="53" dirty="0" err="1">
+                <a:solidFill>
+                  <a:srgbClr val="113D57"/>
+                </a:solidFill>
+                <a:latin typeface="Montserrat Medium"/>
+                <a:ea typeface="+mn-lt"/>
+                <a:cs typeface="+mn-lt"/>
+              </a:rPr>
+              <a:t>construída</a:t>
+            </a:r>
+            <a:r>
+              <a:rPr lang="en-US" sz="2650" b="1" spc="53" dirty="0">
+                <a:solidFill>
+                  <a:srgbClr val="113D57"/>
+                </a:solidFill>
+                <a:latin typeface="Montserrat Medium"/>
+                <a:ea typeface="+mn-lt"/>
+                <a:cs typeface="+mn-lt"/>
+              </a:rPr>
+              <a:t> com </a:t>
+            </a:r>
+            <a:r>
+              <a:rPr lang="en-US" sz="2650" b="1" spc="53" dirty="0" err="1">
+                <a:solidFill>
+                  <a:srgbClr val="113D57"/>
+                </a:solidFill>
+                <a:latin typeface="Montserrat Medium"/>
+                <a:ea typeface="+mn-lt"/>
+                <a:cs typeface="+mn-lt"/>
+              </a:rPr>
+              <a:t>distribuições</a:t>
+            </a:r>
+            <a:r>
+              <a:rPr lang="en-US" sz="2650" b="1" spc="53" dirty="0">
+                <a:solidFill>
+                  <a:srgbClr val="113D57"/>
+                </a:solidFill>
+                <a:latin typeface="Montserrat Medium"/>
+                <a:ea typeface="+mn-lt"/>
+                <a:cs typeface="+mn-lt"/>
+              </a:rPr>
+              <a:t> </a:t>
+            </a:r>
+            <a:r>
+              <a:rPr lang="en-US" sz="2650" b="1" spc="53" dirty="0" err="1">
+                <a:solidFill>
+                  <a:srgbClr val="113D57"/>
+                </a:solidFill>
+                <a:latin typeface="Montserrat Medium"/>
+                <a:ea typeface="+mn-lt"/>
+                <a:cs typeface="+mn-lt"/>
+              </a:rPr>
+              <a:t>diferentes</a:t>
+            </a:r>
+            <a:r>
+              <a:rPr lang="en-US" sz="2650" b="1" spc="53" dirty="0">
+                <a:solidFill>
+                  <a:srgbClr val="113D57"/>
+                </a:solidFill>
+                <a:latin typeface="Montserrat Medium"/>
+                <a:ea typeface="+mn-lt"/>
+                <a:cs typeface="+mn-lt"/>
+              </a:rPr>
+              <a:t> das </a:t>
+            </a:r>
+            <a:r>
+              <a:rPr lang="en-US" sz="2650" b="1" spc="53" dirty="0" err="1">
+                <a:solidFill>
+                  <a:srgbClr val="113D57"/>
+                </a:solidFill>
+                <a:latin typeface="Montserrat Medium"/>
+                <a:ea typeface="+mn-lt"/>
+                <a:cs typeface="+mn-lt"/>
+              </a:rPr>
+              <a:t>proporções</a:t>
+            </a:r>
+            <a:r>
+              <a:rPr lang="en-US" sz="2650" b="1" spc="53" dirty="0">
+                <a:solidFill>
+                  <a:srgbClr val="113D57"/>
+                </a:solidFill>
+                <a:latin typeface="Montserrat Medium"/>
+                <a:ea typeface="+mn-lt"/>
+                <a:cs typeface="+mn-lt"/>
+              </a:rPr>
+              <a:t> </a:t>
+            </a:r>
+            <a:r>
+              <a:rPr lang="en-US" sz="2650" b="1" spc="53" dirty="0" err="1">
+                <a:solidFill>
+                  <a:srgbClr val="113D57"/>
+                </a:solidFill>
+                <a:latin typeface="Montserrat Medium"/>
+                <a:ea typeface="+mn-lt"/>
+                <a:cs typeface="+mn-lt"/>
+              </a:rPr>
+              <a:t>populacionais</a:t>
+            </a:r>
+            <a:r>
+              <a:rPr lang="en-US" sz="2650" b="1" spc="53" dirty="0">
+                <a:solidFill>
+                  <a:srgbClr val="113D57"/>
+                </a:solidFill>
+                <a:latin typeface="Montserrat Medium"/>
+                <a:ea typeface="+mn-lt"/>
+                <a:cs typeface="+mn-lt"/>
+              </a:rPr>
+              <a:t> </a:t>
+            </a:r>
+            <a:r>
+              <a:rPr lang="en-US" sz="2650" b="1" spc="53" dirty="0" err="1">
+                <a:solidFill>
+                  <a:srgbClr val="113D57"/>
+                </a:solidFill>
+                <a:latin typeface="Montserrat Medium"/>
+                <a:ea typeface="+mn-lt"/>
+                <a:cs typeface="+mn-lt"/>
+              </a:rPr>
+              <a:t>conhecidas</a:t>
+            </a:r>
+            <a:r>
+              <a:rPr lang="en-US" sz="2650" b="1" spc="53" dirty="0">
+                <a:solidFill>
+                  <a:srgbClr val="113D57"/>
+                </a:solidFill>
+                <a:latin typeface="Montserrat Medium"/>
+                <a:ea typeface="+mn-lt"/>
+                <a:cs typeface="+mn-lt"/>
+              </a:rPr>
+              <a:t>, </a:t>
+            </a:r>
+            <a:r>
+              <a:rPr lang="en-US" sz="2650" b="1" spc="53" dirty="0" err="1">
+                <a:solidFill>
+                  <a:srgbClr val="113D57"/>
+                </a:solidFill>
+                <a:latin typeface="Montserrat Medium"/>
+                <a:ea typeface="+mn-lt"/>
+                <a:cs typeface="+mn-lt"/>
+              </a:rPr>
+              <a:t>simulando</a:t>
+            </a:r>
+            <a:r>
+              <a:rPr lang="en-US" sz="2650" b="1" spc="53" dirty="0">
+                <a:solidFill>
+                  <a:srgbClr val="113D57"/>
+                </a:solidFill>
+                <a:latin typeface="Montserrat Medium"/>
+                <a:ea typeface="+mn-lt"/>
+                <a:cs typeface="+mn-lt"/>
+              </a:rPr>
+              <a:t> </a:t>
+            </a:r>
+            <a:r>
+              <a:rPr lang="en-US" sz="2650" b="1" spc="53" dirty="0" err="1">
+                <a:solidFill>
+                  <a:srgbClr val="113D57"/>
+                </a:solidFill>
+                <a:latin typeface="Montserrat Medium"/>
+                <a:ea typeface="+mn-lt"/>
+                <a:cs typeface="+mn-lt"/>
+              </a:rPr>
+              <a:t>uma</a:t>
+            </a:r>
+            <a:r>
+              <a:rPr lang="en-US" sz="2650" b="1" spc="53" dirty="0">
+                <a:solidFill>
+                  <a:srgbClr val="113D57"/>
+                </a:solidFill>
+                <a:latin typeface="Montserrat Medium"/>
+                <a:ea typeface="+mn-lt"/>
+                <a:cs typeface="+mn-lt"/>
+              </a:rPr>
+              <a:t> </a:t>
+            </a:r>
+            <a:r>
+              <a:rPr lang="en-US" sz="2650" b="1" spc="53" dirty="0" err="1">
+                <a:solidFill>
+                  <a:srgbClr val="113D57"/>
+                </a:solidFill>
+                <a:latin typeface="Montserrat Medium"/>
+                <a:ea typeface="+mn-lt"/>
+                <a:cs typeface="+mn-lt"/>
+              </a:rPr>
+              <a:t>situação</a:t>
+            </a:r>
+            <a:r>
+              <a:rPr lang="en-US" sz="2650" b="1" spc="53" dirty="0">
+                <a:solidFill>
+                  <a:srgbClr val="113D57"/>
+                </a:solidFill>
+                <a:latin typeface="Montserrat Medium"/>
+                <a:ea typeface="+mn-lt"/>
+                <a:cs typeface="+mn-lt"/>
+              </a:rPr>
+              <a:t> </a:t>
+            </a:r>
+            <a:r>
+              <a:rPr lang="en-US" sz="2650" b="1" spc="53" dirty="0" err="1">
+                <a:solidFill>
+                  <a:srgbClr val="113D57"/>
+                </a:solidFill>
+                <a:latin typeface="Montserrat Medium"/>
+                <a:ea typeface="+mn-lt"/>
+                <a:cs typeface="+mn-lt"/>
+              </a:rPr>
+              <a:t>em</a:t>
+            </a:r>
+            <a:r>
+              <a:rPr lang="en-US" sz="2650" b="1" spc="53" dirty="0">
+                <a:solidFill>
+                  <a:srgbClr val="113D57"/>
+                </a:solidFill>
+                <a:latin typeface="Montserrat Medium"/>
+                <a:ea typeface="+mn-lt"/>
+                <a:cs typeface="+mn-lt"/>
+              </a:rPr>
+              <a:t> </a:t>
+            </a:r>
+            <a:r>
+              <a:rPr lang="en-US" sz="2650" b="1" spc="53" dirty="0" err="1">
+                <a:solidFill>
+                  <a:srgbClr val="113D57"/>
+                </a:solidFill>
+                <a:latin typeface="Montserrat Medium"/>
+                <a:ea typeface="+mn-lt"/>
+                <a:cs typeface="+mn-lt"/>
+              </a:rPr>
+              <a:t>que</a:t>
+            </a:r>
+            <a:r>
+              <a:rPr lang="en-US" sz="2650" b="1" spc="53" dirty="0">
+                <a:solidFill>
+                  <a:srgbClr val="113D57"/>
+                </a:solidFill>
+                <a:latin typeface="Montserrat Medium"/>
+                <a:ea typeface="+mn-lt"/>
+                <a:cs typeface="+mn-lt"/>
+              </a:rPr>
+              <a:t> a coleta </a:t>
+            </a:r>
+            <a:r>
+              <a:rPr lang="en-US" sz="2650" b="1" spc="53" dirty="0" err="1">
+                <a:solidFill>
+                  <a:srgbClr val="113D57"/>
+                </a:solidFill>
+                <a:latin typeface="Montserrat Medium"/>
+                <a:ea typeface="+mn-lt"/>
+                <a:cs typeface="+mn-lt"/>
+              </a:rPr>
+              <a:t>apresenta</a:t>
+            </a:r>
+            <a:r>
+              <a:rPr lang="en-US" sz="2650" b="1" spc="53" dirty="0">
+                <a:solidFill>
+                  <a:srgbClr val="113D57"/>
+                </a:solidFill>
+                <a:latin typeface="Montserrat Medium"/>
+                <a:ea typeface="+mn-lt"/>
+                <a:cs typeface="+mn-lt"/>
+              </a:rPr>
+              <a:t> </a:t>
+            </a:r>
+            <a:r>
+              <a:rPr lang="en-US" sz="2650" b="1" spc="53" dirty="0" err="1">
+                <a:solidFill>
+                  <a:srgbClr val="113D57"/>
+                </a:solidFill>
+                <a:latin typeface="Montserrat Medium"/>
+                <a:ea typeface="+mn-lt"/>
+                <a:cs typeface="+mn-lt"/>
+              </a:rPr>
+              <a:t>desequilíbrios</a:t>
+            </a:r>
+            <a:r>
+              <a:rPr lang="en-US" sz="2650" b="1" spc="53" dirty="0">
+                <a:solidFill>
+                  <a:srgbClr val="113D57"/>
+                </a:solidFill>
+                <a:latin typeface="Montserrat Medium"/>
+                <a:ea typeface="+mn-lt"/>
+                <a:cs typeface="+mn-lt"/>
+              </a:rPr>
+              <a:t> </a:t>
+            </a:r>
+            <a:r>
+              <a:rPr lang="en-US" sz="2650" b="1" spc="53" dirty="0" err="1">
+                <a:solidFill>
+                  <a:srgbClr val="113D57"/>
+                </a:solidFill>
+                <a:latin typeface="Montserrat Medium"/>
+                <a:ea typeface="+mn-lt"/>
+                <a:cs typeface="+mn-lt"/>
+              </a:rPr>
+              <a:t>amostrais</a:t>
+            </a:r>
+            <a:r>
+              <a:rPr lang="en-US" sz="2650" b="1" spc="53" dirty="0">
+                <a:solidFill>
+                  <a:srgbClr val="113D57"/>
+                </a:solidFill>
+                <a:latin typeface="Montserrat Medium"/>
+                <a:ea typeface="+mn-lt"/>
+                <a:cs typeface="+mn-lt"/>
+              </a:rPr>
+              <a:t> </a:t>
+            </a:r>
+            <a:r>
+              <a:rPr lang="en-US" sz="2650" b="1" spc="53" dirty="0" err="1">
+                <a:solidFill>
+                  <a:srgbClr val="113D57"/>
+                </a:solidFill>
+                <a:latin typeface="Montserrat Medium"/>
+                <a:ea typeface="+mn-lt"/>
+                <a:cs typeface="+mn-lt"/>
+              </a:rPr>
+              <a:t>que</a:t>
+            </a:r>
+            <a:r>
+              <a:rPr lang="en-US" sz="2650" b="1" spc="53" dirty="0">
+                <a:solidFill>
+                  <a:srgbClr val="113D57"/>
+                </a:solidFill>
+                <a:latin typeface="Montserrat Medium"/>
+                <a:ea typeface="+mn-lt"/>
+                <a:cs typeface="+mn-lt"/>
+              </a:rPr>
+              <a:t> </a:t>
+            </a:r>
+            <a:r>
+              <a:rPr lang="en-US" sz="2650" b="1" spc="53" dirty="0" err="1">
+                <a:solidFill>
+                  <a:srgbClr val="113D57"/>
+                </a:solidFill>
+                <a:latin typeface="Montserrat Medium"/>
+                <a:ea typeface="+mn-lt"/>
+                <a:cs typeface="+mn-lt"/>
+              </a:rPr>
+              <a:t>precisam</a:t>
+            </a:r>
+            <a:r>
+              <a:rPr lang="en-US" sz="2650" b="1" spc="53" dirty="0">
+                <a:solidFill>
+                  <a:srgbClr val="113D57"/>
+                </a:solidFill>
+                <a:latin typeface="Montserrat Medium"/>
+                <a:ea typeface="+mn-lt"/>
+                <a:cs typeface="+mn-lt"/>
+              </a:rPr>
+              <a:t> ser </a:t>
+            </a:r>
+            <a:r>
+              <a:rPr lang="en-US" sz="2650" b="1" spc="53" dirty="0" err="1">
+                <a:solidFill>
+                  <a:srgbClr val="113D57"/>
+                </a:solidFill>
+                <a:latin typeface="Montserrat Medium"/>
+                <a:ea typeface="+mn-lt"/>
+                <a:cs typeface="+mn-lt"/>
+              </a:rPr>
+              <a:t>corrigidos</a:t>
+            </a:r>
+            <a:r>
+              <a:rPr lang="en-US" sz="2650" b="1" spc="53" dirty="0">
+                <a:solidFill>
+                  <a:srgbClr val="113D57"/>
+                </a:solidFill>
+                <a:latin typeface="Montserrat Medium"/>
+                <a:ea typeface="+mn-lt"/>
+                <a:cs typeface="+mn-lt"/>
+              </a:rPr>
+              <a:t> </a:t>
+            </a:r>
+            <a:r>
+              <a:rPr lang="en-US" sz="2650" b="1" spc="53" dirty="0" err="1">
+                <a:solidFill>
+                  <a:srgbClr val="113D57"/>
+                </a:solidFill>
+                <a:latin typeface="Montserrat Medium"/>
+                <a:ea typeface="+mn-lt"/>
+                <a:cs typeface="+mn-lt"/>
+              </a:rPr>
+              <a:t>por</a:t>
+            </a:r>
+            <a:r>
+              <a:rPr lang="en-US" sz="2650" b="1" spc="53" dirty="0">
+                <a:solidFill>
+                  <a:srgbClr val="113D57"/>
+                </a:solidFill>
+                <a:latin typeface="Montserrat Medium"/>
+                <a:ea typeface="+mn-lt"/>
+                <a:cs typeface="+mn-lt"/>
+              </a:rPr>
+              <a:t> </a:t>
+            </a:r>
+            <a:r>
+              <a:rPr lang="en-US" sz="2650" b="1" spc="53" dirty="0" err="1">
+                <a:solidFill>
+                  <a:srgbClr val="113D57"/>
+                </a:solidFill>
+                <a:latin typeface="Montserrat Medium"/>
+                <a:ea typeface="+mn-lt"/>
+                <a:cs typeface="+mn-lt"/>
+              </a:rPr>
+              <a:t>meio</a:t>
+            </a:r>
+            <a:r>
+              <a:rPr lang="en-US" sz="2650" b="1" spc="53" dirty="0">
+                <a:solidFill>
+                  <a:srgbClr val="113D57"/>
+                </a:solidFill>
+                <a:latin typeface="Montserrat Medium"/>
+                <a:ea typeface="+mn-lt"/>
+                <a:cs typeface="+mn-lt"/>
+              </a:rPr>
+              <a:t> da </a:t>
+            </a:r>
+            <a:r>
+              <a:rPr lang="en-US" sz="2650" b="1" spc="53" dirty="0" err="1">
+                <a:solidFill>
+                  <a:srgbClr val="113D57"/>
+                </a:solidFill>
+                <a:latin typeface="Montserrat Medium"/>
+                <a:ea typeface="+mn-lt"/>
+                <a:cs typeface="+mn-lt"/>
+              </a:rPr>
+              <a:t>calibração</a:t>
+            </a:r>
+            <a:r>
+              <a:rPr lang="en-US" sz="2650" b="1" spc="53" dirty="0">
+                <a:solidFill>
+                  <a:srgbClr val="113D57"/>
+                </a:solidFill>
+                <a:latin typeface="Montserrat Medium"/>
+                <a:ea typeface="+mn-lt"/>
+                <a:cs typeface="+mn-lt"/>
+              </a:rPr>
+              <a:t> de pesos.</a:t>
+            </a:r>
+            <a:endParaRPr lang="pt-BR" dirty="0">
+              <a:ea typeface="Calibri"/>
+              <a:cs typeface="Calibri"/>
+            </a:endParaRPr>
           </a:p>
         </p:txBody>
       </p:sp>
-      <p:sp>
-        <p:nvSpPr>
-          <p:cNvPr id="19" name="TextBox 19"/>
-          <p:cNvSpPr txBox="1"/>
+      <p:pic>
+        <p:nvPicPr>
+          <p:cNvPr id="6" name="Imagem 5" descr="Tela de computador com texto preto sobre fundo branco&#10;&#10;O conteúdo gerado por IA pode estar incorreto.">
+            <a:extLst>
+              <a:ext uri="{FF2B5EF4-FFF2-40B4-BE49-F238E27FC236}">
+                <a16:creationId xmlns:a16="http://schemas.microsoft.com/office/drawing/2014/main" id="{89FD21F9-0ACA-259A-507B-0AA9964B7534}"/>
+              </a:ext>
+            </a:extLst>
+          </p:cNvPr>
+          <p:cNvPicPr>
+            <a:picLocks noChangeAspect="1"/>
+          </p:cNvPicPr>
           <p:nvPr/>
-        </p:nvSpPr>
+        </p:nvPicPr>
+        <p:blipFill>
+          <a:blip r:embed="rId4"/>
+          <a:srcRect l="-475" t="8235" r="32150" b="13824"/>
+          <a:stretch>
+            <a:fillRect/>
+          </a:stretch>
+        </p:blipFill>
         <p:spPr>
           <a:xfrm>
-            <a:off x="8145561" y="4409939"/>
-            <a:ext cx="1172220" cy="854075"/>
+            <a:off x="11871681" y="4850202"/>
+            <a:ext cx="6409721" cy="5507468"/>
           </a:xfrm>
           <a:prstGeom prst="rect">
             <a:avLst/>
           </a:prstGeom>
         </p:spPr>
-        <p:txBody>
-          <a:bodyPr lIns="0" tIns="0" rIns="0" bIns="0" rtlCol="0" anchor="t">
-            <a:spAutoFit/>
-          </a:bodyPr>
-          <a:lstStyle/>
-          <a:p>
-            <a:pPr algn="ctr">
-              <a:lnSpc>
-                <a:spcPts val="7000"/>
-              </a:lnSpc>
-            </a:pPr>
-            <a:r>
-              <a:rPr lang="en-US" sz="5000" b="1">
-                <a:solidFill>
-                  <a:srgbClr val="FFFFFF"/>
-                </a:solidFill>
-                <a:latin typeface="Montserrat Bold"/>
-                <a:ea typeface="Montserrat Bold"/>
-                <a:cs typeface="Montserrat Bold"/>
-                <a:sym typeface="Montserrat Bold"/>
-              </a:rPr>
-              <a:t>H2</a:t>
-            </a:r>
-          </a:p>
-        </p:txBody>
-      </p:sp>
-      <p:sp>
-        <p:nvSpPr>
-          <p:cNvPr id="20" name="TextBox 20"/>
-          <p:cNvSpPr txBox="1"/>
-          <p:nvPr/>
-        </p:nvSpPr>
-        <p:spPr>
-          <a:xfrm>
-            <a:off x="13082813" y="4409939"/>
-            <a:ext cx="1172220" cy="854075"/>
-          </a:xfrm>
-          <a:prstGeom prst="rect">
-            <a:avLst/>
-          </a:prstGeom>
-        </p:spPr>
-        <p:txBody>
-          <a:bodyPr lIns="0" tIns="0" rIns="0" bIns="0" rtlCol="0" anchor="t">
-            <a:spAutoFit/>
-          </a:bodyPr>
-          <a:lstStyle/>
-          <a:p>
-            <a:pPr algn="ctr">
-              <a:lnSpc>
-                <a:spcPts val="7000"/>
-              </a:lnSpc>
-            </a:pPr>
-            <a:r>
-              <a:rPr lang="en-US" sz="5000" b="1">
-                <a:solidFill>
-                  <a:srgbClr val="FFFFFF"/>
-                </a:solidFill>
-                <a:latin typeface="Montserrat Bold"/>
-                <a:ea typeface="Montserrat Bold"/>
-                <a:cs typeface="Montserrat Bold"/>
-                <a:sym typeface="Montserrat Bold"/>
-              </a:rPr>
-              <a:t>H3</a:t>
-            </a:r>
-          </a:p>
-        </p:txBody>
-      </p:sp>
-      <p:sp>
-        <p:nvSpPr>
-          <p:cNvPr id="21" name="TextBox 21"/>
-          <p:cNvSpPr txBox="1"/>
-          <p:nvPr/>
-        </p:nvSpPr>
-        <p:spPr>
-          <a:xfrm>
-            <a:off x="1182792" y="1746922"/>
-            <a:ext cx="5345931" cy="1049046"/>
-          </a:xfrm>
-          <a:prstGeom prst="rect">
-            <a:avLst/>
-          </a:prstGeom>
-        </p:spPr>
-        <p:txBody>
-          <a:bodyPr lIns="0" tIns="0" rIns="0" bIns="0" rtlCol="0" anchor="t">
-            <a:spAutoFit/>
-          </a:bodyPr>
-          <a:lstStyle/>
-          <a:p>
-            <a:pPr algn="l">
-              <a:lnSpc>
-                <a:spcPts val="4299"/>
-              </a:lnSpc>
-            </a:pPr>
-            <a:r>
-              <a:rPr lang="en-US" sz="2654" b="1" spc="53">
-                <a:solidFill>
-                  <a:srgbClr val="113D57"/>
-                </a:solidFill>
-                <a:latin typeface="Montserrat Medium"/>
-                <a:ea typeface="Montserrat Medium"/>
-                <a:cs typeface="Montserrat Medium"/>
-                <a:sym typeface="Montserrat Medium"/>
-              </a:rPr>
-              <a:t>Liste as hipóteses que sua pesquisa pretende testar.</a:t>
-            </a:r>
-          </a:p>
-        </p:txBody>
-      </p:sp>
-      <p:sp>
-        <p:nvSpPr>
-          <p:cNvPr id="22" name="TextBox 22"/>
-          <p:cNvSpPr txBox="1"/>
-          <p:nvPr/>
-        </p:nvSpPr>
-        <p:spPr>
-          <a:xfrm>
-            <a:off x="2120158" y="6299567"/>
-            <a:ext cx="3348522" cy="2790081"/>
-          </a:xfrm>
-          <a:prstGeom prst="rect">
-            <a:avLst/>
-          </a:prstGeom>
-        </p:spPr>
-        <p:txBody>
-          <a:bodyPr lIns="0" tIns="0" rIns="0" bIns="0" rtlCol="0" anchor="t">
-            <a:spAutoFit/>
-          </a:bodyPr>
-          <a:lstStyle/>
-          <a:p>
-            <a:pPr algn="ctr">
-              <a:lnSpc>
-                <a:spcPts val="3715"/>
-              </a:lnSpc>
-            </a:pPr>
-            <a:r>
-              <a:rPr lang="en-US" sz="2654" b="1" spc="53">
-                <a:solidFill>
-                  <a:srgbClr val="113D57"/>
-                </a:solidFill>
-                <a:latin typeface="Montserrat Medium"/>
-                <a:ea typeface="Montserrat Medium"/>
-                <a:cs typeface="Montserrat Medium"/>
-                <a:sym typeface="Montserrat Medium"/>
-              </a:rPr>
-              <a:t>Especifique as previsões ou suposições que serão verificadas ao longo do estudo.</a:t>
-            </a:r>
-          </a:p>
-        </p:txBody>
-      </p:sp>
-      <p:sp>
-        <p:nvSpPr>
-          <p:cNvPr id="23" name="TextBox 23"/>
-          <p:cNvSpPr txBox="1"/>
-          <p:nvPr/>
-        </p:nvSpPr>
-        <p:spPr>
-          <a:xfrm>
-            <a:off x="7057410" y="6299567"/>
-            <a:ext cx="3348522" cy="2790081"/>
-          </a:xfrm>
-          <a:prstGeom prst="rect">
-            <a:avLst/>
-          </a:prstGeom>
-        </p:spPr>
-        <p:txBody>
-          <a:bodyPr lIns="0" tIns="0" rIns="0" bIns="0" rtlCol="0" anchor="t">
-            <a:spAutoFit/>
-          </a:bodyPr>
-          <a:lstStyle/>
-          <a:p>
-            <a:pPr algn="ctr">
-              <a:lnSpc>
-                <a:spcPts val="3715"/>
-              </a:lnSpc>
-            </a:pPr>
-            <a:r>
-              <a:rPr lang="en-US" sz="2654" b="1" spc="53">
-                <a:solidFill>
-                  <a:srgbClr val="113D57"/>
-                </a:solidFill>
-                <a:latin typeface="Montserrat Medium"/>
-                <a:ea typeface="Montserrat Medium"/>
-                <a:cs typeface="Montserrat Medium"/>
-                <a:sym typeface="Montserrat Medium"/>
-              </a:rPr>
-              <a:t>Especifique as previsões ou suposições que serão verificadas ao longo do estudo.</a:t>
-            </a:r>
-          </a:p>
-        </p:txBody>
-      </p:sp>
-      <p:sp>
-        <p:nvSpPr>
-          <p:cNvPr id="24" name="TextBox 24"/>
-          <p:cNvSpPr txBox="1"/>
-          <p:nvPr/>
-        </p:nvSpPr>
-        <p:spPr>
-          <a:xfrm>
-            <a:off x="11871871" y="6299567"/>
-            <a:ext cx="3348522" cy="2790081"/>
-          </a:xfrm>
-          <a:prstGeom prst="rect">
-            <a:avLst/>
-          </a:prstGeom>
-        </p:spPr>
-        <p:txBody>
-          <a:bodyPr lIns="0" tIns="0" rIns="0" bIns="0" rtlCol="0" anchor="t">
-            <a:spAutoFit/>
-          </a:bodyPr>
-          <a:lstStyle/>
-          <a:p>
-            <a:pPr algn="ctr">
-              <a:lnSpc>
-                <a:spcPts val="3715"/>
-              </a:lnSpc>
-            </a:pPr>
-            <a:r>
-              <a:rPr lang="en-US" sz="2654" b="1" spc="53">
-                <a:solidFill>
-                  <a:srgbClr val="113D57"/>
-                </a:solidFill>
-                <a:latin typeface="Montserrat Medium"/>
-                <a:ea typeface="Montserrat Medium"/>
-                <a:cs typeface="Montserrat Medium"/>
-                <a:sym typeface="Montserrat Medium"/>
-              </a:rPr>
-              <a:t>Especifique as previsões ou suposições que serão verificadas ao longo do estudo.</a:t>
-            </a:r>
-          </a:p>
-        </p:txBody>
-      </p:sp>
+      </p:pic>
     </p:spTree>
   </p:cSld>
   <p:clrMapOvr>
@@ -12767,231 +13078,14 @@
       </p:grpSpPr>
       <p:grpSp>
         <p:nvGrpSpPr>
-          <p:cNvPr id="2" name="Group 2"/>
-          <p:cNvGrpSpPr/>
-          <p:nvPr/>
-        </p:nvGrpSpPr>
-        <p:grpSpPr>
-          <a:xfrm>
-            <a:off x="1028700" y="2430353"/>
-            <a:ext cx="1043148" cy="1043148"/>
-            <a:chOff x="0" y="0"/>
-            <a:chExt cx="274739" cy="274739"/>
-          </a:xfrm>
-        </p:grpSpPr>
-        <p:sp>
-          <p:nvSpPr>
-            <p:cNvPr id="3" name="Freeform 3"/>
-            <p:cNvSpPr/>
-            <p:nvPr/>
-          </p:nvSpPr>
-          <p:spPr>
-            <a:xfrm>
-              <a:off x="0" y="0"/>
-              <a:ext cx="274739" cy="274739"/>
-            </a:xfrm>
-            <a:custGeom>
-              <a:avLst/>
-              <a:gdLst/>
-              <a:ahLst/>
-              <a:cxnLst/>
-              <a:rect l="l" t="t" r="r" b="b"/>
-              <a:pathLst>
-                <a:path w="274739" h="274739">
-                  <a:moveTo>
-                    <a:pt x="103904" y="0"/>
-                  </a:moveTo>
-                  <a:lnTo>
-                    <a:pt x="170835" y="0"/>
-                  </a:lnTo>
-                  <a:cubicBezTo>
-                    <a:pt x="198392" y="0"/>
-                    <a:pt x="224820" y="10947"/>
-                    <a:pt x="244306" y="30433"/>
-                  </a:cubicBezTo>
-                  <a:cubicBezTo>
-                    <a:pt x="263792" y="49918"/>
-                    <a:pt x="274739" y="76347"/>
-                    <a:pt x="274739" y="103904"/>
-                  </a:cubicBezTo>
-                  <a:lnTo>
-                    <a:pt x="274739" y="170835"/>
-                  </a:lnTo>
-                  <a:cubicBezTo>
-                    <a:pt x="274739" y="228219"/>
-                    <a:pt x="228219" y="274739"/>
-                    <a:pt x="170835" y="274739"/>
-                  </a:cubicBezTo>
-                  <a:lnTo>
-                    <a:pt x="103904" y="274739"/>
-                  </a:lnTo>
-                  <a:cubicBezTo>
-                    <a:pt x="46519" y="274739"/>
-                    <a:pt x="0" y="228219"/>
-                    <a:pt x="0" y="170835"/>
-                  </a:cubicBezTo>
-                  <a:lnTo>
-                    <a:pt x="0" y="103904"/>
-                  </a:lnTo>
-                  <a:cubicBezTo>
-                    <a:pt x="0" y="46519"/>
-                    <a:pt x="46519" y="0"/>
-                    <a:pt x="103904" y="0"/>
-                  </a:cubicBezTo>
-                  <a:close/>
-                </a:path>
-              </a:pathLst>
-            </a:custGeom>
-            <a:solidFill>
-              <a:srgbClr val="113D57"/>
-            </a:solidFill>
-          </p:spPr>
-        </p:sp>
-        <p:sp>
-          <p:nvSpPr>
-            <p:cNvPr id="4" name="TextBox 4"/>
-            <p:cNvSpPr txBox="1"/>
-            <p:nvPr/>
-          </p:nvSpPr>
-          <p:spPr>
-            <a:xfrm>
-              <a:off x="0" y="-47625"/>
-              <a:ext cx="274739" cy="322364"/>
-            </a:xfrm>
-            <a:prstGeom prst="rect">
-              <a:avLst/>
-            </a:prstGeom>
-          </p:spPr>
-          <p:txBody>
-            <a:bodyPr lIns="50800" tIns="50800" rIns="50800" bIns="50800" rtlCol="0" anchor="ctr"/>
-            <a:lstStyle/>
-            <a:p>
-              <a:pPr algn="ctr">
-                <a:lnSpc>
-                  <a:spcPts val="3295"/>
-                </a:lnSpc>
-              </a:pPr>
-              <a:endParaRPr/>
-            </a:p>
-          </p:txBody>
-        </p:sp>
-      </p:grpSp>
-      <p:grpSp>
-        <p:nvGrpSpPr>
-          <p:cNvPr id="5" name="Group 5"/>
-          <p:cNvGrpSpPr/>
-          <p:nvPr/>
-        </p:nvGrpSpPr>
-        <p:grpSpPr>
-          <a:xfrm>
-            <a:off x="6612755" y="7617531"/>
-            <a:ext cx="1283734" cy="1283734"/>
-            <a:chOff x="0" y="0"/>
-            <a:chExt cx="338103" cy="338103"/>
-          </a:xfrm>
-        </p:grpSpPr>
-        <p:sp>
-          <p:nvSpPr>
-            <p:cNvPr id="6" name="Freeform 6"/>
-            <p:cNvSpPr/>
-            <p:nvPr/>
-          </p:nvSpPr>
-          <p:spPr>
-            <a:xfrm>
-              <a:off x="0" y="0"/>
-              <a:ext cx="338103" cy="338103"/>
-            </a:xfrm>
-            <a:custGeom>
-              <a:avLst/>
-              <a:gdLst/>
-              <a:ahLst/>
-              <a:cxnLst/>
-              <a:rect l="l" t="t" r="r" b="b"/>
-              <a:pathLst>
-                <a:path w="338103" h="338103">
-                  <a:moveTo>
-                    <a:pt x="84431" y="0"/>
-                  </a:moveTo>
-                  <a:lnTo>
-                    <a:pt x="253672" y="0"/>
-                  </a:lnTo>
-                  <a:cubicBezTo>
-                    <a:pt x="300302" y="0"/>
-                    <a:pt x="338103" y="37801"/>
-                    <a:pt x="338103" y="84431"/>
-                  </a:cubicBezTo>
-                  <a:lnTo>
-                    <a:pt x="338103" y="253672"/>
-                  </a:lnTo>
-                  <a:cubicBezTo>
-                    <a:pt x="338103" y="300302"/>
-                    <a:pt x="300302" y="338103"/>
-                    <a:pt x="253672" y="338103"/>
-                  </a:cubicBezTo>
-                  <a:lnTo>
-                    <a:pt x="84431" y="338103"/>
-                  </a:lnTo>
-                  <a:cubicBezTo>
-                    <a:pt x="37801" y="338103"/>
-                    <a:pt x="0" y="300302"/>
-                    <a:pt x="0" y="253672"/>
-                  </a:cubicBezTo>
-                  <a:lnTo>
-                    <a:pt x="0" y="84431"/>
-                  </a:lnTo>
-                  <a:cubicBezTo>
-                    <a:pt x="0" y="37801"/>
-                    <a:pt x="37801" y="0"/>
-                    <a:pt x="84431" y="0"/>
-                  </a:cubicBezTo>
-                  <a:close/>
-                </a:path>
-              </a:pathLst>
-            </a:custGeom>
-            <a:solidFill>
-              <a:srgbClr val="4396C6"/>
-            </a:solidFill>
-          </p:spPr>
-        </p:sp>
-        <p:sp>
-          <p:nvSpPr>
-            <p:cNvPr id="7" name="TextBox 7"/>
-            <p:cNvSpPr txBox="1"/>
-            <p:nvPr/>
-          </p:nvSpPr>
-          <p:spPr>
-            <a:xfrm>
-              <a:off x="0" y="-47625"/>
-              <a:ext cx="338103" cy="385728"/>
-            </a:xfrm>
-            <a:prstGeom prst="rect">
-              <a:avLst/>
-            </a:prstGeom>
-          </p:spPr>
-          <p:txBody>
-            <a:bodyPr lIns="50800" tIns="50800" rIns="50800" bIns="50800" rtlCol="0" anchor="ctr"/>
-            <a:lstStyle/>
-            <a:p>
-              <a:pPr algn="ctr">
-                <a:lnSpc>
-                  <a:spcPts val="3295"/>
-                </a:lnSpc>
-              </a:pPr>
-              <a:endParaRPr/>
-            </a:p>
-          </p:txBody>
-        </p:sp>
-      </p:grpSp>
-      <p:grpSp>
-        <p:nvGrpSpPr>
           <p:cNvPr id="8" name="Group 8"/>
           <p:cNvGrpSpPr/>
           <p:nvPr/>
         </p:nvGrpSpPr>
         <p:grpSpPr>
           <a:xfrm>
-            <a:off x="9975829" y="1509288"/>
-            <a:ext cx="15714543" cy="7391977"/>
+            <a:off x="9738603" y="-539486"/>
+            <a:ext cx="15714543" cy="5364770"/>
             <a:chOff x="0" y="0"/>
             <a:chExt cx="4138810" cy="1946858"/>
           </a:xfrm>
@@ -13095,130 +13189,14 @@
       </p:grpSp>
       <p:grpSp>
         <p:nvGrpSpPr>
-          <p:cNvPr id="11" name="Group 11"/>
-          <p:cNvGrpSpPr/>
-          <p:nvPr/>
-        </p:nvGrpSpPr>
-        <p:grpSpPr>
-          <a:xfrm>
-            <a:off x="9144000" y="5533508"/>
-            <a:ext cx="5964093" cy="726127"/>
-            <a:chOff x="0" y="0"/>
-            <a:chExt cx="1570790" cy="191243"/>
-          </a:xfrm>
-        </p:grpSpPr>
-        <p:sp>
-          <p:nvSpPr>
-            <p:cNvPr id="12" name="Freeform 12"/>
-            <p:cNvSpPr/>
-            <p:nvPr/>
-          </p:nvSpPr>
-          <p:spPr>
-            <a:xfrm>
-              <a:off x="0" y="0"/>
-              <a:ext cx="1570790" cy="191243"/>
-            </a:xfrm>
-            <a:custGeom>
-              <a:avLst/>
-              <a:gdLst/>
-              <a:ahLst/>
-              <a:cxnLst/>
-              <a:rect l="l" t="t" r="r" b="b"/>
-              <a:pathLst>
-                <a:path w="1570790" h="191243">
-                  <a:moveTo>
-                    <a:pt x="18173" y="0"/>
-                  </a:moveTo>
-                  <a:lnTo>
-                    <a:pt x="1552617" y="0"/>
-                  </a:lnTo>
-                  <a:cubicBezTo>
-                    <a:pt x="1557436" y="0"/>
-                    <a:pt x="1562059" y="1915"/>
-                    <a:pt x="1565467" y="5323"/>
-                  </a:cubicBezTo>
-                  <a:cubicBezTo>
-                    <a:pt x="1568875" y="8731"/>
-                    <a:pt x="1570790" y="13353"/>
-                    <a:pt x="1570790" y="18173"/>
-                  </a:cubicBezTo>
-                  <a:lnTo>
-                    <a:pt x="1570790" y="173070"/>
-                  </a:lnTo>
-                  <a:cubicBezTo>
-                    <a:pt x="1570790" y="177890"/>
-                    <a:pt x="1568875" y="182512"/>
-                    <a:pt x="1565467" y="185920"/>
-                  </a:cubicBezTo>
-                  <a:cubicBezTo>
-                    <a:pt x="1562059" y="189329"/>
-                    <a:pt x="1557436" y="191243"/>
-                    <a:pt x="1552617" y="191243"/>
-                  </a:cubicBezTo>
-                  <a:lnTo>
-                    <a:pt x="18173" y="191243"/>
-                  </a:lnTo>
-                  <a:cubicBezTo>
-                    <a:pt x="8136" y="191243"/>
-                    <a:pt x="0" y="183107"/>
-                    <a:pt x="0" y="173070"/>
-                  </a:cubicBezTo>
-                  <a:lnTo>
-                    <a:pt x="0" y="18173"/>
-                  </a:lnTo>
-                  <a:cubicBezTo>
-                    <a:pt x="0" y="8136"/>
-                    <a:pt x="8136" y="0"/>
-                    <a:pt x="18173" y="0"/>
-                  </a:cubicBezTo>
-                  <a:close/>
-                </a:path>
-              </a:pathLst>
-            </a:custGeom>
-            <a:solidFill>
-              <a:srgbClr val="113D57"/>
-            </a:solidFill>
-          </p:spPr>
-        </p:sp>
-        <p:sp>
-          <p:nvSpPr>
-            <p:cNvPr id="13" name="TextBox 13"/>
-            <p:cNvSpPr txBox="1"/>
-            <p:nvPr/>
-          </p:nvSpPr>
-          <p:spPr>
-            <a:xfrm>
-              <a:off x="0" y="-47625"/>
-              <a:ext cx="1570790" cy="238868"/>
-            </a:xfrm>
-            <a:prstGeom prst="rect">
-              <a:avLst/>
-            </a:prstGeom>
-          </p:spPr>
-          <p:txBody>
-            <a:bodyPr lIns="50800" tIns="50800" rIns="50800" bIns="50800" rtlCol="0" anchor="ctr"/>
-            <a:lstStyle/>
-            <a:p>
-              <a:pPr algn="ctr">
-                <a:lnSpc>
-                  <a:spcPts val="3295"/>
-                </a:lnSpc>
-              </a:pPr>
-              <a:endParaRPr/>
-            </a:p>
-          </p:txBody>
-        </p:sp>
-      </p:grpSp>
-      <p:grpSp>
-        <p:nvGrpSpPr>
           <p:cNvPr id="14" name="Group 14"/>
           <p:cNvGrpSpPr/>
           <p:nvPr/>
         </p:nvGrpSpPr>
         <p:grpSpPr>
           <a:xfrm>
-            <a:off x="9144000" y="2747374"/>
-            <a:ext cx="5964093" cy="726127"/>
+            <a:off x="1056735" y="720167"/>
+            <a:ext cx="8077565" cy="639863"/>
             <a:chOff x="0" y="0"/>
             <a:chExt cx="1570790" cy="191243"/>
           </a:xfrm>
@@ -13446,30 +13424,394 @@
           </p:txBody>
         </p:sp>
       </p:grpSp>
+      <p:sp>
+        <p:nvSpPr>
+          <p:cNvPr id="27" name="TextBox 27"/>
+          <p:cNvSpPr txBox="1"/>
+          <p:nvPr/>
+        </p:nvSpPr>
+        <p:spPr>
+          <a:xfrm>
+            <a:off x="3088473" y="4248025"/>
+            <a:ext cx="401281" cy="582107"/>
+          </a:xfrm>
+          <a:prstGeom prst="rect">
+            <a:avLst/>
+          </a:prstGeom>
+        </p:spPr>
+        <p:txBody>
+          <a:bodyPr lIns="50800" tIns="50800" rIns="50800" bIns="50800" rtlCol="0" anchor="ctr"/>
+          <a:lstStyle/>
+          <a:p>
+            <a:pPr algn="ctr">
+              <a:lnSpc>
+                <a:spcPts val="3295"/>
+              </a:lnSpc>
+            </a:pPr>
+            <a:endParaRPr/>
+          </a:p>
+        </p:txBody>
+      </p:sp>
+      <p:sp>
+        <p:nvSpPr>
+          <p:cNvPr id="31" name="TextBox 31"/>
+          <p:cNvSpPr txBox="1"/>
+          <p:nvPr/>
+        </p:nvSpPr>
+        <p:spPr>
+          <a:xfrm>
+            <a:off x="9900319" y="328436"/>
+            <a:ext cx="8134714" cy="4287969"/>
+          </a:xfrm>
+          <a:prstGeom prst="rect">
+            <a:avLst/>
+          </a:prstGeom>
+        </p:spPr>
+        <p:txBody>
+          <a:bodyPr wrap="square" lIns="0" tIns="0" rIns="0" bIns="0" rtlCol="0" anchor="t">
+            <a:spAutoFit/>
+          </a:bodyPr>
+          <a:lstStyle/>
+          <a:p>
+            <a:pPr>
+              <a:lnSpc>
+                <a:spcPts val="8510"/>
+              </a:lnSpc>
+            </a:pPr>
+            <a:r>
+              <a:rPr lang="en-US" sz="6000" b="1" spc="-394" dirty="0">
+                <a:solidFill>
+                  <a:srgbClr val="113D57"/>
+                </a:solidFill>
+                <a:latin typeface="Montserrat Ultra-Bold"/>
+                <a:ea typeface="Montserrat Ultra-Bold"/>
+                <a:cs typeface="Montserrat Ultra-Bold"/>
+                <a:sym typeface="Montserrat Ultra-Bold"/>
+              </a:rPr>
+              <a:t>5.  A </a:t>
+            </a:r>
+            <a:r>
+              <a:rPr lang="en-US" sz="6000" b="1" spc="-394" dirty="0" err="1">
+                <a:solidFill>
+                  <a:srgbClr val="113D57"/>
+                </a:solidFill>
+                <a:latin typeface="Montserrat Ultra-Bold"/>
+                <a:ea typeface="Montserrat Ultra-Bold"/>
+                <a:cs typeface="Montserrat Ultra-Bold"/>
+                <a:sym typeface="Montserrat Ultra-Bold"/>
+              </a:rPr>
+              <a:t>implementação</a:t>
+            </a:r>
+            <a:r>
+              <a:rPr lang="en-US" sz="6000" b="1" spc="-394" dirty="0">
+                <a:solidFill>
+                  <a:srgbClr val="113D57"/>
+                </a:solidFill>
+                <a:latin typeface="Montserrat Ultra-Bold"/>
+                <a:ea typeface="Montserrat Ultra-Bold"/>
+                <a:cs typeface="Montserrat Ultra-Bold"/>
+                <a:sym typeface="Montserrat Ultra-Bold"/>
+              </a:rPr>
+              <a:t> e </a:t>
+            </a:r>
+            <a:r>
+              <a:rPr lang="en-US" sz="6000" b="1" spc="-394" dirty="0" err="1">
+                <a:solidFill>
+                  <a:srgbClr val="113D57"/>
+                </a:solidFill>
+                <a:latin typeface="Montserrat Ultra-Bold"/>
+                <a:ea typeface="Montserrat Ultra-Bold"/>
+                <a:cs typeface="Montserrat Ultra-Bold"/>
+                <a:sym typeface="Montserrat Ultra-Bold"/>
+              </a:rPr>
+              <a:t>resolução</a:t>
+            </a:r>
+            <a:r>
+              <a:rPr lang="en-US" sz="6000" b="1" spc="-394" dirty="0">
+                <a:solidFill>
+                  <a:srgbClr val="113D57"/>
+                </a:solidFill>
+                <a:latin typeface="Montserrat Ultra-Bold"/>
+                <a:ea typeface="Montserrat Ultra-Bold"/>
+                <a:cs typeface="Montserrat Ultra-Bold"/>
+                <a:sym typeface="Montserrat Ultra-Bold"/>
+              </a:rPr>
+              <a:t> do </a:t>
+            </a:r>
+            <a:r>
+              <a:rPr lang="en-US" sz="6000" b="1" spc="-394" dirty="0" err="1">
+                <a:solidFill>
+                  <a:srgbClr val="113D57"/>
+                </a:solidFill>
+                <a:latin typeface="Montserrat Ultra-Bold"/>
+                <a:ea typeface="Montserrat Ultra-Bold"/>
+                <a:cs typeface="Montserrat Ultra-Bold"/>
+                <a:sym typeface="Montserrat Ultra-Bold"/>
+              </a:rPr>
+              <a:t>modelo</a:t>
+            </a:r>
+            <a:r>
+              <a:rPr lang="en-US" sz="6000" b="1" spc="-394" dirty="0">
+                <a:solidFill>
+                  <a:srgbClr val="113D57"/>
+                </a:solidFill>
+                <a:latin typeface="Montserrat Ultra-Bold"/>
+                <a:ea typeface="Montserrat Ultra-Bold"/>
+                <a:cs typeface="Montserrat Ultra-Bold"/>
+                <a:sym typeface="Montserrat Ultra-Bold"/>
+              </a:rPr>
+              <a:t> no R, </a:t>
+            </a:r>
+            <a:r>
+              <a:rPr lang="en-US" sz="6000" b="1" spc="-394" dirty="0" err="1">
+                <a:solidFill>
+                  <a:srgbClr val="113D57"/>
+                </a:solidFill>
+                <a:latin typeface="Montserrat Ultra-Bold"/>
+                <a:ea typeface="Montserrat Ultra-Bold"/>
+                <a:cs typeface="Montserrat Ultra-Bold"/>
+                <a:sym typeface="Montserrat Ultra-Bold"/>
+              </a:rPr>
+              <a:t>utilizando</a:t>
+            </a:r>
+            <a:r>
+              <a:rPr lang="en-US" sz="6000" b="1" spc="-394" dirty="0">
+                <a:solidFill>
+                  <a:srgbClr val="113D57"/>
+                </a:solidFill>
+                <a:latin typeface="Montserrat Ultra-Bold"/>
+                <a:ea typeface="Montserrat Ultra-Bold"/>
+                <a:cs typeface="Montserrat Ultra-Bold"/>
+                <a:sym typeface="Montserrat Ultra-Bold"/>
+              </a:rPr>
+              <a:t> o </a:t>
+            </a:r>
+            <a:r>
+              <a:rPr lang="en-US" sz="6000" b="1" spc="-394" dirty="0" err="1">
+                <a:solidFill>
+                  <a:srgbClr val="113D57"/>
+                </a:solidFill>
+                <a:latin typeface="Montserrat Ultra-Bold"/>
+                <a:ea typeface="Montserrat Ultra-Bold"/>
+                <a:cs typeface="Montserrat Ultra-Bold"/>
+                <a:sym typeface="Montserrat Ultra-Bold"/>
+              </a:rPr>
+              <a:t>pacote</a:t>
+            </a:r>
+            <a:r>
+              <a:rPr lang="en-US" sz="6000" b="1" spc="-394" dirty="0">
+                <a:solidFill>
+                  <a:srgbClr val="113D57"/>
+                </a:solidFill>
+                <a:latin typeface="Montserrat Ultra-Bold"/>
+                <a:ea typeface="Montserrat Ultra-Bold"/>
+                <a:cs typeface="Montserrat Ultra-Bold"/>
+                <a:sym typeface="Montserrat Ultra-Bold"/>
+              </a:rPr>
+              <a:t> </a:t>
+            </a:r>
+            <a:r>
+              <a:rPr lang="en-US" sz="6000" b="1" spc="-394" dirty="0" err="1">
+                <a:solidFill>
+                  <a:srgbClr val="113D57"/>
+                </a:solidFill>
+                <a:latin typeface="Montserrat Ultra-Bold"/>
+                <a:ea typeface="Montserrat Ultra-Bold"/>
+                <a:cs typeface="Montserrat Ultra-Bold"/>
+                <a:sym typeface="Montserrat Ultra-Bold"/>
+              </a:rPr>
+              <a:t>Rglpk</a:t>
+            </a:r>
+            <a:r>
+              <a:rPr lang="en-US" sz="6000" b="1" spc="-394" dirty="0">
+                <a:solidFill>
+                  <a:srgbClr val="113D57"/>
+                </a:solidFill>
+                <a:latin typeface="Montserrat Ultra-Bold"/>
+                <a:ea typeface="Montserrat Ultra-Bold"/>
+                <a:cs typeface="Montserrat Ultra-Bold"/>
+                <a:sym typeface="Montserrat Ultra-Bold"/>
+              </a:rPr>
+              <a:t>.</a:t>
+            </a:r>
+            <a:endParaRPr lang="pt-BR" sz="6000">
+              <a:ea typeface="Calibri"/>
+              <a:cs typeface="Calibri"/>
+            </a:endParaRPr>
+          </a:p>
+        </p:txBody>
+      </p:sp>
+      <p:sp>
+        <p:nvSpPr>
+          <p:cNvPr id="32" name="TextBox 32"/>
+          <p:cNvSpPr txBox="1"/>
+          <p:nvPr/>
+        </p:nvSpPr>
+        <p:spPr>
+          <a:xfrm>
+            <a:off x="3095530" y="779328"/>
+            <a:ext cx="4659561" cy="506121"/>
+          </a:xfrm>
+          <a:prstGeom prst="rect">
+            <a:avLst/>
+          </a:prstGeom>
+        </p:spPr>
+        <p:txBody>
+          <a:bodyPr lIns="0" tIns="0" rIns="0" bIns="0" rtlCol="0" anchor="t">
+            <a:spAutoFit/>
+          </a:bodyPr>
+          <a:lstStyle/>
+          <a:p>
+            <a:pPr>
+              <a:lnSpc>
+                <a:spcPts val="4299"/>
+              </a:lnSpc>
+              <a:spcBef>
+                <a:spcPct val="0"/>
+              </a:spcBef>
+            </a:pPr>
+            <a:r>
+              <a:rPr lang="en-US" sz="2650" b="1" spc="53" dirty="0" err="1">
+                <a:solidFill>
+                  <a:srgbClr val="FFFFFF"/>
+                </a:solidFill>
+                <a:latin typeface="Montserrat Bold"/>
+                <a:ea typeface="+mn-lt"/>
+                <a:cs typeface="+mn-lt"/>
+                <a:sym typeface="Montserrat Bold"/>
+              </a:rPr>
+              <a:t>Formulação</a:t>
+            </a:r>
+            <a:r>
+              <a:rPr lang="en-US" sz="2650" b="1" spc="53" dirty="0">
+                <a:solidFill>
+                  <a:srgbClr val="FFFFFF"/>
+                </a:solidFill>
+                <a:latin typeface="Montserrat Bold"/>
+                <a:ea typeface="+mn-lt"/>
+                <a:cs typeface="+mn-lt"/>
+                <a:sym typeface="Montserrat Bold"/>
+              </a:rPr>
+              <a:t> </a:t>
+            </a:r>
+            <a:r>
+              <a:rPr lang="en-US" sz="2650" b="1" spc="53" dirty="0" err="1">
+                <a:solidFill>
+                  <a:srgbClr val="FFFFFF"/>
+                </a:solidFill>
+                <a:latin typeface="Montserrat Bold"/>
+                <a:ea typeface="+mn-lt"/>
+                <a:cs typeface="+mn-lt"/>
+                <a:sym typeface="Montserrat Bold"/>
+              </a:rPr>
+              <a:t>Conceitual</a:t>
+            </a:r>
+            <a:endParaRPr lang="pt-BR" dirty="0" err="1"/>
+          </a:p>
+        </p:txBody>
+      </p:sp>
+      <p:sp>
+        <p:nvSpPr>
+          <p:cNvPr id="34" name="TextBox 34"/>
+          <p:cNvSpPr txBox="1"/>
+          <p:nvPr/>
+        </p:nvSpPr>
+        <p:spPr>
+          <a:xfrm>
+            <a:off x="4087567" y="1564726"/>
+            <a:ext cx="6849277" cy="445571"/>
+          </a:xfrm>
+          <a:prstGeom prst="rect">
+            <a:avLst/>
+          </a:prstGeom>
+        </p:spPr>
+        <p:txBody>
+          <a:bodyPr lIns="0" tIns="0" rIns="0" bIns="0" rtlCol="0" anchor="t">
+            <a:spAutoFit/>
+          </a:bodyPr>
+          <a:lstStyle/>
+          <a:p>
+            <a:pPr>
+              <a:lnSpc>
+                <a:spcPts val="3715"/>
+              </a:lnSpc>
+            </a:pPr>
+            <a:r>
+              <a:rPr lang="en-US" sz="2650" b="1" spc="53" dirty="0">
+                <a:solidFill>
+                  <a:srgbClr val="113D57"/>
+                </a:solidFill>
+                <a:latin typeface="Montserrat Medium"/>
+                <a:ea typeface="+mn-lt"/>
+                <a:cs typeface="+mn-lt"/>
+                <a:sym typeface="Montserrat Medium"/>
+              </a:rPr>
+              <a:t>min Σ |</a:t>
+            </a:r>
+            <a:r>
+              <a:rPr lang="en-US" sz="2650" b="1" spc="53" dirty="0" err="1">
+                <a:solidFill>
+                  <a:srgbClr val="113D57"/>
+                </a:solidFill>
+                <a:latin typeface="Montserrat Medium"/>
+                <a:ea typeface="+mn-lt"/>
+                <a:cs typeface="+mn-lt"/>
+                <a:sym typeface="Montserrat Medium"/>
+              </a:rPr>
+              <a:t>wi</a:t>
+            </a:r>
+            <a:r>
+              <a:rPr lang="en-US" sz="2650" b="1" spc="53" dirty="0">
+                <a:solidFill>
+                  <a:srgbClr val="113D57"/>
+                </a:solidFill>
+                <a:latin typeface="Montserrat Medium"/>
+                <a:ea typeface="+mn-lt"/>
+                <a:cs typeface="+mn-lt"/>
+                <a:sym typeface="Montserrat Medium"/>
+              </a:rPr>
+              <a:t> - 1|</a:t>
+            </a:r>
+            <a:endParaRPr lang="pt-BR" dirty="0"/>
+          </a:p>
+        </p:txBody>
+      </p:sp>
       <p:grpSp>
         <p:nvGrpSpPr>
-          <p:cNvPr id="20" name="Group 20"/>
+          <p:cNvPr id="36" name="Group 14">
+            <a:extLst>
+              <a:ext uri="{FF2B5EF4-FFF2-40B4-BE49-F238E27FC236}">
+                <a16:creationId xmlns:a16="http://schemas.microsoft.com/office/drawing/2014/main" id="{92AEBF73-8352-2ACF-EEF0-E0D753EAEAB3}"/>
+              </a:ext>
+            </a:extLst>
+          </p:cNvPr>
           <p:cNvGrpSpPr/>
           <p:nvPr/>
         </p:nvGrpSpPr>
         <p:grpSpPr>
           <a:xfrm>
-            <a:off x="4313413" y="1836243"/>
-            <a:ext cx="3697265" cy="3697265"/>
-            <a:chOff x="0" y="0"/>
-            <a:chExt cx="812800" cy="812800"/>
+            <a:off x="1078301" y="1892546"/>
+            <a:ext cx="8055999" cy="890842"/>
+            <a:chOff x="0" y="-47625"/>
+            <a:chExt cx="1570790" cy="238868"/>
           </a:xfrm>
         </p:grpSpPr>
         <p:sp>
           <p:nvSpPr>
-            <p:cNvPr id="21" name="Freeform 21"/>
+            <p:cNvPr id="37" name="Freeform 15">
+              <a:extLst>
+                <a:ext uri="{FF2B5EF4-FFF2-40B4-BE49-F238E27FC236}">
+                  <a16:creationId xmlns:a16="http://schemas.microsoft.com/office/drawing/2014/main" id="{2ACAC9C5-A34A-3FF4-C876-7D38888638E7}"/>
+                </a:ext>
+              </a:extLst>
+            </p:cNvPr>
             <p:cNvSpPr/>
             <p:nvPr/>
           </p:nvSpPr>
           <p:spPr>
             <a:xfrm>
               <a:off x="0" y="0"/>
-              <a:ext cx="812800" cy="812800"/>
+              <a:ext cx="1570790" cy="191243"/>
             </a:xfrm>
             <a:custGeom>
               <a:avLst/>
@@ -13478,357 +13820,77 @@
               <a:cxnLst/>
               <a:rect l="l" t="t" r="r" b="b"/>
               <a:pathLst>
-                <a:path w="812800" h="812800">
+                <a:path w="1570790" h="191243">
                   <a:moveTo>
-                    <a:pt x="406400" y="0"/>
+                    <a:pt x="18173" y="0"/>
                   </a:moveTo>
+                  <a:lnTo>
+                    <a:pt x="1552617" y="0"/>
+                  </a:lnTo>
                   <a:cubicBezTo>
-                    <a:pt x="181951" y="0"/>
-                    <a:pt x="0" y="181951"/>
-                    <a:pt x="0" y="406400"/>
+                    <a:pt x="1557436" y="0"/>
+                    <a:pt x="1562059" y="1915"/>
+                    <a:pt x="1565467" y="5323"/>
                   </a:cubicBezTo>
                   <a:cubicBezTo>
-                    <a:pt x="0" y="630849"/>
-                    <a:pt x="181951" y="812800"/>
-                    <a:pt x="406400" y="812800"/>
+                    <a:pt x="1568875" y="8731"/>
+                    <a:pt x="1570790" y="13353"/>
+                    <a:pt x="1570790" y="18173"/>
+                  </a:cubicBezTo>
+                  <a:lnTo>
+                    <a:pt x="1570790" y="173070"/>
+                  </a:lnTo>
+                  <a:cubicBezTo>
+                    <a:pt x="1570790" y="177890"/>
+                    <a:pt x="1568875" y="182512"/>
+                    <a:pt x="1565467" y="185920"/>
                   </a:cubicBezTo>
                   <a:cubicBezTo>
-                    <a:pt x="630849" y="812800"/>
-                    <a:pt x="812800" y="630849"/>
-                    <a:pt x="812800" y="406400"/>
+                    <a:pt x="1562059" y="189329"/>
+                    <a:pt x="1557436" y="191243"/>
+                    <a:pt x="1552617" y="191243"/>
                   </a:cubicBezTo>
-                  <a:cubicBezTo>
-                    <a:pt x="812800" y="181951"/>
-                    <a:pt x="630849" y="0"/>
-                    <a:pt x="406400" y="0"/>
-                  </a:cubicBezTo>
-                  <a:close/>
-                </a:path>
-              </a:pathLst>
-            </a:custGeom>
-            <a:blipFill>
-              <a:blip r:embed="rId2"/>
-              <a:stretch>
-                <a:fillRect l="-25046" r="-25046"/>
-              </a:stretch>
-            </a:blipFill>
-          </p:spPr>
-        </p:sp>
-      </p:grpSp>
-      <p:grpSp>
-        <p:nvGrpSpPr>
-          <p:cNvPr id="22" name="Group 22"/>
-          <p:cNvGrpSpPr/>
-          <p:nvPr/>
-        </p:nvGrpSpPr>
-        <p:grpSpPr>
-          <a:xfrm>
-            <a:off x="3938289" y="3309752"/>
-            <a:ext cx="750248" cy="750248"/>
-            <a:chOff x="0" y="0"/>
-            <a:chExt cx="197596" cy="197596"/>
-          </a:xfrm>
-        </p:grpSpPr>
-        <p:sp>
-          <p:nvSpPr>
-            <p:cNvPr id="23" name="Freeform 23"/>
-            <p:cNvSpPr/>
-            <p:nvPr/>
-          </p:nvSpPr>
-          <p:spPr>
-            <a:xfrm>
-              <a:off x="0" y="0"/>
-              <a:ext cx="197596" cy="197596"/>
-            </a:xfrm>
-            <a:custGeom>
-              <a:avLst/>
-              <a:gdLst/>
-              <a:ahLst/>
-              <a:cxnLst/>
-              <a:rect l="l" t="t" r="r" b="b"/>
-              <a:pathLst>
-                <a:path w="197596" h="197596">
-                  <a:moveTo>
-                    <a:pt x="98798" y="0"/>
-                  </a:moveTo>
                   <a:lnTo>
-                    <a:pt x="98798" y="0"/>
+                    <a:pt x="18173" y="191243"/>
                   </a:lnTo>
                   <a:cubicBezTo>
-                    <a:pt x="153363" y="0"/>
-                    <a:pt x="197596" y="44233"/>
-                    <a:pt x="197596" y="98798"/>
+                    <a:pt x="8136" y="191243"/>
+                    <a:pt x="0" y="183107"/>
+                    <a:pt x="0" y="173070"/>
                   </a:cubicBezTo>
                   <a:lnTo>
-                    <a:pt x="197596" y="98798"/>
+                    <a:pt x="0" y="18173"/>
                   </a:lnTo>
                   <a:cubicBezTo>
-                    <a:pt x="197596" y="153363"/>
-                    <a:pt x="153363" y="197596"/>
-                    <a:pt x="98798" y="197596"/>
-                  </a:cubicBezTo>
-                  <a:lnTo>
-                    <a:pt x="98798" y="197596"/>
-                  </a:lnTo>
-                  <a:cubicBezTo>
-                    <a:pt x="44233" y="197596"/>
-                    <a:pt x="0" y="153363"/>
-                    <a:pt x="0" y="98798"/>
-                  </a:cubicBezTo>
-                  <a:lnTo>
-                    <a:pt x="0" y="98798"/>
-                  </a:lnTo>
-                  <a:cubicBezTo>
-                    <a:pt x="0" y="44233"/>
-                    <a:pt x="44233" y="0"/>
-                    <a:pt x="98798" y="0"/>
+                    <a:pt x="0" y="8136"/>
+                    <a:pt x="8136" y="0"/>
+                    <a:pt x="18173" y="0"/>
                   </a:cubicBezTo>
                   <a:close/>
                 </a:path>
               </a:pathLst>
             </a:custGeom>
             <a:solidFill>
-              <a:srgbClr val="6A8AB4"/>
+              <a:srgbClr val="113D57"/>
             </a:solidFill>
           </p:spPr>
         </p:sp>
         <p:sp>
           <p:nvSpPr>
-            <p:cNvPr id="24" name="TextBox 24"/>
+            <p:cNvPr id="38" name="TextBox 16">
+              <a:extLst>
+                <a:ext uri="{FF2B5EF4-FFF2-40B4-BE49-F238E27FC236}">
+                  <a16:creationId xmlns:a16="http://schemas.microsoft.com/office/drawing/2014/main" id="{3C3F08D2-CA6C-B33A-E8E7-9BBDD53981EF}"/>
+                </a:ext>
+              </a:extLst>
+            </p:cNvPr>
             <p:cNvSpPr txBox="1"/>
             <p:nvPr/>
           </p:nvSpPr>
           <p:spPr>
             <a:xfrm>
               <a:off x="0" y="-47625"/>
-              <a:ext cx="197596" cy="245221"/>
-            </a:xfrm>
-            <a:prstGeom prst="rect">
-              <a:avLst/>
-            </a:prstGeom>
-          </p:spPr>
-          <p:txBody>
-            <a:bodyPr lIns="50800" tIns="50800" rIns="50800" bIns="50800" rtlCol="0" anchor="ctr"/>
-            <a:lstStyle/>
-            <a:p>
-              <a:pPr algn="ctr">
-                <a:lnSpc>
-                  <a:spcPts val="3295"/>
-                </a:lnSpc>
-              </a:pPr>
-              <a:endParaRPr/>
-            </a:p>
-          </p:txBody>
-        </p:sp>
-      </p:grpSp>
-      <p:grpSp>
-        <p:nvGrpSpPr>
-          <p:cNvPr id="25" name="Group 25"/>
-          <p:cNvGrpSpPr/>
-          <p:nvPr/>
-        </p:nvGrpSpPr>
-        <p:grpSpPr>
-          <a:xfrm>
-            <a:off x="3088473" y="4730776"/>
-            <a:ext cx="401281" cy="401281"/>
-            <a:chOff x="0" y="0"/>
-            <a:chExt cx="105687" cy="105687"/>
-          </a:xfrm>
-        </p:grpSpPr>
-        <p:sp>
-          <p:nvSpPr>
-            <p:cNvPr id="26" name="Freeform 26"/>
-            <p:cNvSpPr/>
-            <p:nvPr/>
-          </p:nvSpPr>
-          <p:spPr>
-            <a:xfrm>
-              <a:off x="0" y="0"/>
-              <a:ext cx="105687" cy="105687"/>
-            </a:xfrm>
-            <a:custGeom>
-              <a:avLst/>
-              <a:gdLst/>
-              <a:ahLst/>
-              <a:cxnLst/>
-              <a:rect l="l" t="t" r="r" b="b"/>
-              <a:pathLst>
-                <a:path w="105687" h="105687">
-                  <a:moveTo>
-                    <a:pt x="52844" y="0"/>
-                  </a:moveTo>
-                  <a:lnTo>
-                    <a:pt x="52844" y="0"/>
-                  </a:lnTo>
-                  <a:cubicBezTo>
-                    <a:pt x="82028" y="0"/>
-                    <a:pt x="105687" y="23659"/>
-                    <a:pt x="105687" y="52844"/>
-                  </a:cubicBezTo>
-                  <a:lnTo>
-                    <a:pt x="105687" y="52844"/>
-                  </a:lnTo>
-                  <a:cubicBezTo>
-                    <a:pt x="105687" y="82028"/>
-                    <a:pt x="82028" y="105687"/>
-                    <a:pt x="52844" y="105687"/>
-                  </a:cubicBezTo>
-                  <a:lnTo>
-                    <a:pt x="52844" y="105687"/>
-                  </a:lnTo>
-                  <a:cubicBezTo>
-                    <a:pt x="23659" y="105687"/>
-                    <a:pt x="0" y="82028"/>
-                    <a:pt x="0" y="52844"/>
-                  </a:cubicBezTo>
-                  <a:lnTo>
-                    <a:pt x="0" y="52844"/>
-                  </a:lnTo>
-                  <a:cubicBezTo>
-                    <a:pt x="0" y="23659"/>
-                    <a:pt x="23659" y="0"/>
-                    <a:pt x="52844" y="0"/>
-                  </a:cubicBezTo>
-                  <a:close/>
-                </a:path>
-              </a:pathLst>
-            </a:custGeom>
-            <a:solidFill>
-              <a:srgbClr val="3383B2"/>
-            </a:solidFill>
-          </p:spPr>
-        </p:sp>
-        <p:sp>
-          <p:nvSpPr>
-            <p:cNvPr id="27" name="TextBox 27"/>
-            <p:cNvSpPr txBox="1"/>
-            <p:nvPr/>
-          </p:nvSpPr>
-          <p:spPr>
-            <a:xfrm>
-              <a:off x="0" y="-47625"/>
-              <a:ext cx="105687" cy="153312"/>
-            </a:xfrm>
-            <a:prstGeom prst="rect">
-              <a:avLst/>
-            </a:prstGeom>
-          </p:spPr>
-          <p:txBody>
-            <a:bodyPr lIns="50800" tIns="50800" rIns="50800" bIns="50800" rtlCol="0" anchor="ctr"/>
-            <a:lstStyle/>
-            <a:p>
-              <a:pPr algn="ctr">
-                <a:lnSpc>
-                  <a:spcPts val="3295"/>
-                </a:lnSpc>
-              </a:pPr>
-              <a:endParaRPr/>
-            </a:p>
-          </p:txBody>
-        </p:sp>
-      </p:grpSp>
-      <p:grpSp>
-        <p:nvGrpSpPr>
-          <p:cNvPr id="28" name="Group 28"/>
-          <p:cNvGrpSpPr/>
-          <p:nvPr/>
-        </p:nvGrpSpPr>
-        <p:grpSpPr>
-          <a:xfrm>
-            <a:off x="1550274" y="6817243"/>
-            <a:ext cx="786883" cy="786883"/>
-            <a:chOff x="0" y="0"/>
-            <a:chExt cx="207245" cy="207245"/>
-          </a:xfrm>
-        </p:grpSpPr>
-        <p:sp>
-          <p:nvSpPr>
-            <p:cNvPr id="29" name="Freeform 29"/>
-            <p:cNvSpPr/>
-            <p:nvPr/>
-          </p:nvSpPr>
-          <p:spPr>
-            <a:xfrm>
-              <a:off x="0" y="0"/>
-              <a:ext cx="207245" cy="207245"/>
-            </a:xfrm>
-            <a:custGeom>
-              <a:avLst/>
-              <a:gdLst/>
-              <a:ahLst/>
-              <a:cxnLst/>
-              <a:rect l="l" t="t" r="r" b="b"/>
-              <a:pathLst>
-                <a:path w="207245" h="207245">
-                  <a:moveTo>
-                    <a:pt x="103622" y="0"/>
-                  </a:moveTo>
-                  <a:lnTo>
-                    <a:pt x="103622" y="0"/>
-                  </a:lnTo>
-                  <a:cubicBezTo>
-                    <a:pt x="160851" y="0"/>
-                    <a:pt x="207245" y="46393"/>
-                    <a:pt x="207245" y="103622"/>
-                  </a:cubicBezTo>
-                  <a:lnTo>
-                    <a:pt x="207245" y="103622"/>
-                  </a:lnTo>
-                  <a:cubicBezTo>
-                    <a:pt x="207245" y="131105"/>
-                    <a:pt x="196328" y="157462"/>
-                    <a:pt x="176895" y="176895"/>
-                  </a:cubicBezTo>
-                  <a:cubicBezTo>
-                    <a:pt x="157462" y="196328"/>
-                    <a:pt x="131105" y="207245"/>
-                    <a:pt x="103622" y="207245"/>
-                  </a:cubicBezTo>
-                  <a:lnTo>
-                    <a:pt x="103622" y="207245"/>
-                  </a:lnTo>
-                  <a:cubicBezTo>
-                    <a:pt x="76140" y="207245"/>
-                    <a:pt x="49783" y="196328"/>
-                    <a:pt x="30350" y="176895"/>
-                  </a:cubicBezTo>
-                  <a:cubicBezTo>
-                    <a:pt x="10917" y="157462"/>
-                    <a:pt x="0" y="131105"/>
-                    <a:pt x="0" y="103622"/>
-                  </a:cubicBezTo>
-                  <a:lnTo>
-                    <a:pt x="0" y="103622"/>
-                  </a:lnTo>
-                  <a:cubicBezTo>
-                    <a:pt x="0" y="76140"/>
-                    <a:pt x="10917" y="49783"/>
-                    <a:pt x="30350" y="30350"/>
-                  </a:cubicBezTo>
-                  <a:cubicBezTo>
-                    <a:pt x="49783" y="10917"/>
-                    <a:pt x="76140" y="0"/>
-                    <a:pt x="103622" y="0"/>
-                  </a:cubicBezTo>
-                  <a:close/>
-                </a:path>
-              </a:pathLst>
-            </a:custGeom>
-            <a:solidFill>
-              <a:srgbClr val="C7E0EF"/>
-            </a:solidFill>
-          </p:spPr>
-        </p:sp>
-        <p:sp>
-          <p:nvSpPr>
-            <p:cNvPr id="30" name="TextBox 30"/>
-            <p:cNvSpPr txBox="1"/>
-            <p:nvPr/>
-          </p:nvSpPr>
-          <p:spPr>
-            <a:xfrm>
-              <a:off x="0" y="-47625"/>
-              <a:ext cx="207245" cy="254870"/>
+              <a:ext cx="1570790" cy="238868"/>
             </a:xfrm>
             <a:prstGeom prst="rect">
               <a:avLst/>
@@ -13850,14 +13912,119 @@
       </p:grpSp>
       <p:sp>
         <p:nvSpPr>
-          <p:cNvPr id="31" name="TextBox 31"/>
+          <p:cNvPr id="39" name="TextBox 32">
+            <a:extLst>
+              <a:ext uri="{FF2B5EF4-FFF2-40B4-BE49-F238E27FC236}">
+                <a16:creationId xmlns:a16="http://schemas.microsoft.com/office/drawing/2014/main" id="{40DEE03D-A211-463D-CE2F-82681786CCCE}"/>
+              </a:ext>
+            </a:extLst>
+          </p:cNvPr>
           <p:cNvSpPr txBox="1"/>
           <p:nvPr/>
         </p:nvSpPr>
         <p:spPr>
           <a:xfrm>
-            <a:off x="2071848" y="6345360"/>
-            <a:ext cx="5676186" cy="9721293"/>
+            <a:off x="2297586" y="2267384"/>
+            <a:ext cx="6837730" cy="501997"/>
+          </a:xfrm>
+          <a:prstGeom prst="rect">
+            <a:avLst/>
+          </a:prstGeom>
+        </p:spPr>
+        <p:txBody>
+          <a:bodyPr wrap="square" lIns="0" tIns="0" rIns="0" bIns="0" rtlCol="0" anchor="t">
+            <a:spAutoFit/>
+          </a:bodyPr>
+          <a:lstStyle/>
+          <a:p>
+            <a:pPr>
+              <a:lnSpc>
+                <a:spcPts val="4299"/>
+              </a:lnSpc>
+              <a:spcBef>
+                <a:spcPct val="0"/>
+              </a:spcBef>
+            </a:pPr>
+            <a:r>
+              <a:rPr lang="en-US" sz="2650" b="1" spc="53" dirty="0" err="1">
+                <a:solidFill>
+                  <a:srgbClr val="FFFFFF"/>
+                </a:solidFill>
+                <a:latin typeface="Montserrat Bold"/>
+                <a:ea typeface="+mn-lt"/>
+                <a:cs typeface="+mn-lt"/>
+                <a:sym typeface="Montserrat Bold"/>
+              </a:rPr>
+              <a:t>Introdução</a:t>
+            </a:r>
+            <a:r>
+              <a:rPr lang="en-US" sz="2650" b="1" spc="53" dirty="0">
+                <a:solidFill>
+                  <a:srgbClr val="FFFFFF"/>
+                </a:solidFill>
+                <a:latin typeface="Montserrat Bold"/>
+                <a:ea typeface="+mn-lt"/>
+                <a:cs typeface="+mn-lt"/>
+                <a:sym typeface="Montserrat Bold"/>
+              </a:rPr>
+              <a:t> das </a:t>
+            </a:r>
+            <a:r>
+              <a:rPr lang="en-US" sz="2650" b="1" spc="53" dirty="0" err="1">
+                <a:solidFill>
+                  <a:srgbClr val="FFFFFF"/>
+                </a:solidFill>
+                <a:latin typeface="Montserrat Bold"/>
+                <a:ea typeface="+mn-lt"/>
+                <a:cs typeface="+mn-lt"/>
+                <a:sym typeface="Montserrat Bold"/>
+              </a:rPr>
+              <a:t>Variáveis</a:t>
+            </a:r>
+            <a:r>
+              <a:rPr lang="en-US" sz="2650" b="1" spc="53" dirty="0">
+                <a:solidFill>
+                  <a:srgbClr val="FFFFFF"/>
+                </a:solidFill>
+                <a:latin typeface="Montserrat Bold"/>
+                <a:ea typeface="+mn-lt"/>
+                <a:cs typeface="+mn-lt"/>
+                <a:sym typeface="Montserrat Bold"/>
+              </a:rPr>
+              <a:t> </a:t>
+            </a:r>
+            <a:r>
+              <a:rPr lang="en-US" sz="2650" b="1" spc="53" dirty="0" err="1">
+                <a:solidFill>
+                  <a:srgbClr val="FFFFFF"/>
+                </a:solidFill>
+                <a:latin typeface="Montserrat Bold"/>
+                <a:ea typeface="+mn-lt"/>
+                <a:cs typeface="+mn-lt"/>
+                <a:sym typeface="Montserrat Bold"/>
+              </a:rPr>
+              <a:t>Auxiliares</a:t>
+            </a:r>
+            <a:endParaRPr lang="pt-BR" dirty="0" err="1"/>
+          </a:p>
+        </p:txBody>
+      </p:sp>
+      <p:sp>
+        <p:nvSpPr>
+          <p:cNvPr id="40" name="TextBox 34">
+            <a:extLst>
+              <a:ext uri="{FF2B5EF4-FFF2-40B4-BE49-F238E27FC236}">
+                <a16:creationId xmlns:a16="http://schemas.microsoft.com/office/drawing/2014/main" id="{73BB602E-53B7-9D19-C5A8-6999553C066B}"/>
+              </a:ext>
+            </a:extLst>
+          </p:cNvPr>
+          <p:cNvSpPr txBox="1"/>
+          <p:nvPr/>
+        </p:nvSpPr>
+        <p:spPr>
+          <a:xfrm>
+            <a:off x="4842378" y="2944952"/>
+            <a:ext cx="6849277" cy="445571"/>
           </a:xfrm>
           <a:prstGeom prst="rect">
             <a:avLst/>
@@ -13869,36 +14036,247 @@
           </a:bodyPr>
           <a:lstStyle/>
           <a:p>
-            <a:pPr algn="r">
+            <a:pPr>
               <a:lnSpc>
-                <a:spcPts val="8510"/>
+                <a:spcPts val="3715"/>
               </a:lnSpc>
             </a:pPr>
             <a:r>
-              <a:rPr lang="en-US" sz="7880" b="1" spc="-394">
-                <a:solidFill>
-                  <a:srgbClr val="113D57"/>
-                </a:solidFill>
-                <a:latin typeface="Montserrat Ultra-Bold"/>
-                <a:ea typeface="Montserrat Ultra-Bold"/>
-                <a:cs typeface="Montserrat Ultra-Bold"/>
-                <a:sym typeface="Montserrat Ultra-Bold"/>
-              </a:rPr>
-              <a:t>A implementação e resolução do modelo no R, utilizando o pacote Rglpk.</a:t>
-            </a:r>
+              <a:rPr lang="en-US" sz="2700" b="1" spc="53">
+                <a:solidFill>
+                  <a:srgbClr val="113D57"/>
+                </a:solidFill>
+                <a:latin typeface="Montserrat Medium"/>
+                <a:ea typeface="+mn-lt"/>
+                <a:cs typeface="+mn-lt"/>
+                <a:sym typeface="Montserrat Medium"/>
+              </a:rPr>
+              <a:t>di</a:t>
+            </a:r>
+            <a:endParaRPr lang="pt-BR"/>
+          </a:p>
+        </p:txBody>
+      </p:sp>
+      <p:grpSp>
+        <p:nvGrpSpPr>
+          <p:cNvPr id="46" name="Group 14">
+            <a:extLst>
+              <a:ext uri="{FF2B5EF4-FFF2-40B4-BE49-F238E27FC236}">
+                <a16:creationId xmlns:a16="http://schemas.microsoft.com/office/drawing/2014/main" id="{FBA84D89-979E-DCB5-F67E-C066BBCABCAF}"/>
+              </a:ext>
+            </a:extLst>
+          </p:cNvPr>
+          <p:cNvGrpSpPr/>
+          <p:nvPr/>
+        </p:nvGrpSpPr>
+        <p:grpSpPr>
+          <a:xfrm>
+            <a:off x="1121433" y="3337469"/>
+            <a:ext cx="8077565" cy="890842"/>
+            <a:chOff x="0" y="-47625"/>
+            <a:chExt cx="1570790" cy="238868"/>
+          </a:xfrm>
+        </p:grpSpPr>
+        <p:sp>
+          <p:nvSpPr>
+            <p:cNvPr id="47" name="Freeform 15">
+              <a:extLst>
+                <a:ext uri="{FF2B5EF4-FFF2-40B4-BE49-F238E27FC236}">
+                  <a16:creationId xmlns:a16="http://schemas.microsoft.com/office/drawing/2014/main" id="{6C626204-6211-D5FC-8C5C-E35044037E4A}"/>
+                </a:ext>
+              </a:extLst>
+            </p:cNvPr>
+            <p:cNvSpPr/>
+            <p:nvPr/>
+          </p:nvSpPr>
+          <p:spPr>
+            <a:xfrm>
+              <a:off x="0" y="0"/>
+              <a:ext cx="1570790" cy="191243"/>
+            </a:xfrm>
+            <a:custGeom>
+              <a:avLst/>
+              <a:gdLst/>
+              <a:ahLst/>
+              <a:cxnLst/>
+              <a:rect l="l" t="t" r="r" b="b"/>
+              <a:pathLst>
+                <a:path w="1570790" h="191243">
+                  <a:moveTo>
+                    <a:pt x="18173" y="0"/>
+                  </a:moveTo>
+                  <a:lnTo>
+                    <a:pt x="1552617" y="0"/>
+                  </a:lnTo>
+                  <a:cubicBezTo>
+                    <a:pt x="1557436" y="0"/>
+                    <a:pt x="1562059" y="1915"/>
+                    <a:pt x="1565467" y="5323"/>
+                  </a:cubicBezTo>
+                  <a:cubicBezTo>
+                    <a:pt x="1568875" y="8731"/>
+                    <a:pt x="1570790" y="13353"/>
+                    <a:pt x="1570790" y="18173"/>
+                  </a:cubicBezTo>
+                  <a:lnTo>
+                    <a:pt x="1570790" y="173070"/>
+                  </a:lnTo>
+                  <a:cubicBezTo>
+                    <a:pt x="1570790" y="177890"/>
+                    <a:pt x="1568875" y="182512"/>
+                    <a:pt x="1565467" y="185920"/>
+                  </a:cubicBezTo>
+                  <a:cubicBezTo>
+                    <a:pt x="1562059" y="189329"/>
+                    <a:pt x="1557436" y="191243"/>
+                    <a:pt x="1552617" y="191243"/>
+                  </a:cubicBezTo>
+                  <a:lnTo>
+                    <a:pt x="18173" y="191243"/>
+                  </a:lnTo>
+                  <a:cubicBezTo>
+                    <a:pt x="8136" y="191243"/>
+                    <a:pt x="0" y="183107"/>
+                    <a:pt x="0" y="173070"/>
+                  </a:cubicBezTo>
+                  <a:lnTo>
+                    <a:pt x="0" y="18173"/>
+                  </a:lnTo>
+                  <a:cubicBezTo>
+                    <a:pt x="0" y="8136"/>
+                    <a:pt x="8136" y="0"/>
+                    <a:pt x="18173" y="0"/>
+                  </a:cubicBezTo>
+                  <a:close/>
+                </a:path>
+              </a:pathLst>
+            </a:custGeom>
+            <a:solidFill>
+              <a:srgbClr val="113D57"/>
+            </a:solidFill>
+          </p:spPr>
+        </p:sp>
+        <p:sp>
+          <p:nvSpPr>
+            <p:cNvPr id="48" name="TextBox 16">
+              <a:extLst>
+                <a:ext uri="{FF2B5EF4-FFF2-40B4-BE49-F238E27FC236}">
+                  <a16:creationId xmlns:a16="http://schemas.microsoft.com/office/drawing/2014/main" id="{B5E74021-8099-4FE7-91CB-2890ECFD3AD0}"/>
+                </a:ext>
+              </a:extLst>
+            </p:cNvPr>
+            <p:cNvSpPr txBox="1"/>
+            <p:nvPr/>
+          </p:nvSpPr>
+          <p:spPr>
+            <a:xfrm>
+              <a:off x="0" y="-47625"/>
+              <a:ext cx="1570790" cy="238868"/>
+            </a:xfrm>
+            <a:prstGeom prst="rect">
+              <a:avLst/>
+            </a:prstGeom>
+          </p:spPr>
+          <p:txBody>
+            <a:bodyPr lIns="50800" tIns="50800" rIns="50800" bIns="50800" rtlCol="0" anchor="ctr"/>
+            <a:lstStyle/>
+            <a:p>
+              <a:pPr algn="ctr">
+                <a:lnSpc>
+                  <a:spcPts val="3295"/>
+                </a:lnSpc>
+              </a:pPr>
+              <a:endParaRPr/>
+            </a:p>
+          </p:txBody>
+        </p:sp>
+      </p:grpSp>
+      <p:sp>
+        <p:nvSpPr>
+          <p:cNvPr id="49" name="TextBox 32">
+            <a:extLst>
+              <a:ext uri="{FF2B5EF4-FFF2-40B4-BE49-F238E27FC236}">
+                <a16:creationId xmlns:a16="http://schemas.microsoft.com/office/drawing/2014/main" id="{E2CC68A9-A093-FE00-C173-A26421120D36}"/>
+              </a:ext>
+            </a:extLst>
+          </p:cNvPr>
+          <p:cNvSpPr txBox="1"/>
+          <p:nvPr/>
+        </p:nvSpPr>
+        <p:spPr>
+          <a:xfrm>
+            <a:off x="3526848" y="3626043"/>
+            <a:ext cx="6837730" cy="501997"/>
+          </a:xfrm>
+          <a:prstGeom prst="rect">
+            <a:avLst/>
+          </a:prstGeom>
+        </p:spPr>
+        <p:txBody>
+          <a:bodyPr wrap="square" lIns="0" tIns="0" rIns="0" bIns="0" rtlCol="0" anchor="t">
+            <a:spAutoFit/>
+          </a:bodyPr>
+          <a:lstStyle/>
+          <a:p>
+            <a:pPr>
+              <a:lnSpc>
+                <a:spcPts val="4299"/>
+              </a:lnSpc>
+              <a:spcBef>
+                <a:spcPct val="0"/>
+              </a:spcBef>
+            </a:pPr>
+            <a:r>
+              <a:rPr lang="en-US" sz="2650" b="1" spc="53" dirty="0" err="1">
+                <a:solidFill>
+                  <a:srgbClr val="FFFFFF"/>
+                </a:solidFill>
+                <a:latin typeface="Montserrat Bold"/>
+                <a:ea typeface="+mn-lt"/>
+                <a:cs typeface="+mn-lt"/>
+                <a:sym typeface="Montserrat Bold"/>
+              </a:rPr>
+              <a:t>Formulação</a:t>
+            </a:r>
+            <a:r>
+              <a:rPr lang="en-US" sz="2650" b="1" spc="53" dirty="0">
+                <a:solidFill>
+                  <a:srgbClr val="FFFFFF"/>
+                </a:solidFill>
+                <a:latin typeface="Montserrat Bold"/>
+                <a:ea typeface="+mn-lt"/>
+                <a:cs typeface="+mn-lt"/>
+                <a:sym typeface="Montserrat Bold"/>
+              </a:rPr>
+              <a:t> Linear</a:t>
+            </a:r>
+            <a:endParaRPr lang="pt-BR" sz="2650" b="1" spc="53" dirty="0">
+              <a:solidFill>
+                <a:srgbClr val="FFFFFF"/>
+              </a:solidFill>
+              <a:latin typeface="Montserrat Bold"/>
+              <a:ea typeface="+mn-lt"/>
+              <a:cs typeface="+mn-lt"/>
+            </a:endParaRPr>
           </a:p>
         </p:txBody>
       </p:sp>
       <p:sp>
         <p:nvSpPr>
-          <p:cNvPr id="32" name="TextBox 32"/>
+          <p:cNvPr id="50" name="TextBox 34">
+            <a:extLst>
+              <a:ext uri="{FF2B5EF4-FFF2-40B4-BE49-F238E27FC236}">
+                <a16:creationId xmlns:a16="http://schemas.microsoft.com/office/drawing/2014/main" id="{82B544D7-0ECB-E687-D3AD-5DE907273844}"/>
+              </a:ext>
+            </a:extLst>
+          </p:cNvPr>
           <p:cNvSpPr txBox="1"/>
           <p:nvPr/>
         </p:nvSpPr>
         <p:spPr>
           <a:xfrm>
-            <a:off x="10773039" y="2828102"/>
-            <a:ext cx="4659561" cy="506121"/>
+            <a:off x="4346358" y="4389875"/>
+            <a:ext cx="6849277" cy="445571"/>
           </a:xfrm>
           <a:prstGeom prst="rect">
             <a:avLst/>
@@ -13910,7 +14288,219 @@
           </a:bodyPr>
           <a:lstStyle/>
           <a:p>
-            <a:pPr marL="0" lvl="0" indent="0" algn="l">
+            <a:pPr>
+              <a:lnSpc>
+                <a:spcPts val="3715"/>
+              </a:lnSpc>
+            </a:pPr>
+            <a:r>
+              <a:rPr lang="en-US" sz="2700" b="1" spc="53" dirty="0">
+                <a:solidFill>
+                  <a:srgbClr val="113D57"/>
+                </a:solidFill>
+                <a:latin typeface="Montserrat Medium"/>
+                <a:ea typeface="+mn-lt"/>
+                <a:cs typeface="+mn-lt"/>
+                <a:sym typeface="Montserrat Medium"/>
+              </a:rPr>
+              <a:t>min</a:t>
+            </a:r>
+            <a:r>
+              <a:rPr lang="en-US" sz="2700" spc="53" dirty="0">
+                <a:solidFill>
+                  <a:srgbClr val="113D57"/>
+                </a:solidFill>
+                <a:ea typeface="+mn-lt"/>
+                <a:cs typeface="+mn-lt"/>
+                <a:sym typeface="Montserrat Medium"/>
+              </a:rPr>
+              <a:t> </a:t>
+            </a:r>
+            <a:r>
+              <a:rPr lang="en-US" sz="2700" b="1" spc="53">
+                <a:solidFill>
+                  <a:srgbClr val="113D57"/>
+                </a:solidFill>
+                <a:latin typeface="Montserrat Medium"/>
+                <a:ea typeface="+mn-lt"/>
+                <a:cs typeface="+mn-lt"/>
+                <a:sym typeface="Montserrat Medium"/>
+              </a:rPr>
+              <a:t>Σ di</a:t>
+            </a:r>
+            <a:endParaRPr lang="pt-BR" sz="2700" b="1" spc="53" dirty="0">
+              <a:solidFill>
+                <a:srgbClr val="113D57"/>
+              </a:solidFill>
+              <a:latin typeface="Montserrat Medium"/>
+              <a:ea typeface="+mn-lt"/>
+              <a:cs typeface="+mn-lt"/>
+            </a:endParaRPr>
+          </a:p>
+        </p:txBody>
+      </p:sp>
+      <p:grpSp>
+        <p:nvGrpSpPr>
+          <p:cNvPr id="51" name="Group 14">
+            <a:extLst>
+              <a:ext uri="{FF2B5EF4-FFF2-40B4-BE49-F238E27FC236}">
+                <a16:creationId xmlns:a16="http://schemas.microsoft.com/office/drawing/2014/main" id="{1C391420-9C3F-ED43-6E35-CE99B043CF08}"/>
+              </a:ext>
+            </a:extLst>
+          </p:cNvPr>
+          <p:cNvGrpSpPr/>
+          <p:nvPr/>
+        </p:nvGrpSpPr>
+        <p:grpSpPr>
+          <a:xfrm>
+            <a:off x="1056735" y="4739261"/>
+            <a:ext cx="8077565" cy="890842"/>
+            <a:chOff x="0" y="-47625"/>
+            <a:chExt cx="1570790" cy="238868"/>
+          </a:xfrm>
+        </p:grpSpPr>
+        <p:sp>
+          <p:nvSpPr>
+            <p:cNvPr id="52" name="Freeform 15">
+              <a:extLst>
+                <a:ext uri="{FF2B5EF4-FFF2-40B4-BE49-F238E27FC236}">
+                  <a16:creationId xmlns:a16="http://schemas.microsoft.com/office/drawing/2014/main" id="{221D3EC8-21B6-745C-DFDF-2DAF71ED23AB}"/>
+                </a:ext>
+              </a:extLst>
+            </p:cNvPr>
+            <p:cNvSpPr/>
+            <p:nvPr/>
+          </p:nvSpPr>
+          <p:spPr>
+            <a:xfrm>
+              <a:off x="0" y="0"/>
+              <a:ext cx="1570790" cy="191243"/>
+            </a:xfrm>
+            <a:custGeom>
+              <a:avLst/>
+              <a:gdLst/>
+              <a:ahLst/>
+              <a:cxnLst/>
+              <a:rect l="l" t="t" r="r" b="b"/>
+              <a:pathLst>
+                <a:path w="1570790" h="191243">
+                  <a:moveTo>
+                    <a:pt x="18173" y="0"/>
+                  </a:moveTo>
+                  <a:lnTo>
+                    <a:pt x="1552617" y="0"/>
+                  </a:lnTo>
+                  <a:cubicBezTo>
+                    <a:pt x="1557436" y="0"/>
+                    <a:pt x="1562059" y="1915"/>
+                    <a:pt x="1565467" y="5323"/>
+                  </a:cubicBezTo>
+                  <a:cubicBezTo>
+                    <a:pt x="1568875" y="8731"/>
+                    <a:pt x="1570790" y="13353"/>
+                    <a:pt x="1570790" y="18173"/>
+                  </a:cubicBezTo>
+                  <a:lnTo>
+                    <a:pt x="1570790" y="173070"/>
+                  </a:lnTo>
+                  <a:cubicBezTo>
+                    <a:pt x="1570790" y="177890"/>
+                    <a:pt x="1568875" y="182512"/>
+                    <a:pt x="1565467" y="185920"/>
+                  </a:cubicBezTo>
+                  <a:cubicBezTo>
+                    <a:pt x="1562059" y="189329"/>
+                    <a:pt x="1557436" y="191243"/>
+                    <a:pt x="1552617" y="191243"/>
+                  </a:cubicBezTo>
+                  <a:lnTo>
+                    <a:pt x="18173" y="191243"/>
+                  </a:lnTo>
+                  <a:cubicBezTo>
+                    <a:pt x="8136" y="191243"/>
+                    <a:pt x="0" y="183107"/>
+                    <a:pt x="0" y="173070"/>
+                  </a:cubicBezTo>
+                  <a:lnTo>
+                    <a:pt x="0" y="18173"/>
+                  </a:lnTo>
+                  <a:cubicBezTo>
+                    <a:pt x="0" y="8136"/>
+                    <a:pt x="8136" y="0"/>
+                    <a:pt x="18173" y="0"/>
+                  </a:cubicBezTo>
+                  <a:close/>
+                </a:path>
+              </a:pathLst>
+            </a:custGeom>
+            <a:solidFill>
+              <a:srgbClr val="113D57"/>
+            </a:solidFill>
+          </p:spPr>
+        </p:sp>
+        <p:sp>
+          <p:nvSpPr>
+            <p:cNvPr id="53" name="TextBox 16">
+              <a:extLst>
+                <a:ext uri="{FF2B5EF4-FFF2-40B4-BE49-F238E27FC236}">
+                  <a16:creationId xmlns:a16="http://schemas.microsoft.com/office/drawing/2014/main" id="{6E5579BB-87F6-C060-7ED1-0B24C90A708A}"/>
+                </a:ext>
+              </a:extLst>
+            </p:cNvPr>
+            <p:cNvSpPr txBox="1"/>
+            <p:nvPr/>
+          </p:nvSpPr>
+          <p:spPr>
+            <a:xfrm>
+              <a:off x="0" y="-47625"/>
+              <a:ext cx="1570790" cy="238868"/>
+            </a:xfrm>
+            <a:prstGeom prst="rect">
+              <a:avLst/>
+            </a:prstGeom>
+          </p:spPr>
+          <p:txBody>
+            <a:bodyPr lIns="50800" tIns="50800" rIns="50800" bIns="50800" rtlCol="0" anchor="ctr"/>
+            <a:lstStyle/>
+            <a:p>
+              <a:pPr algn="ctr">
+                <a:lnSpc>
+                  <a:spcPts val="3295"/>
+                </a:lnSpc>
+              </a:pPr>
+              <a:endParaRPr/>
+            </a:p>
+          </p:txBody>
+        </p:sp>
+      </p:grpSp>
+      <p:sp>
+        <p:nvSpPr>
+          <p:cNvPr id="54" name="TextBox 32">
+            <a:extLst>
+              <a:ext uri="{FF2B5EF4-FFF2-40B4-BE49-F238E27FC236}">
+                <a16:creationId xmlns:a16="http://schemas.microsoft.com/office/drawing/2014/main" id="{8D7D6F5B-5551-2DBB-69CB-D34CD48899D0}"/>
+              </a:ext>
+            </a:extLst>
+          </p:cNvPr>
+          <p:cNvSpPr txBox="1"/>
+          <p:nvPr/>
+        </p:nvSpPr>
+        <p:spPr>
+          <a:xfrm>
+            <a:off x="4324793" y="5006271"/>
+            <a:ext cx="6837730" cy="501997"/>
+          </a:xfrm>
+          <a:prstGeom prst="rect">
+            <a:avLst/>
+          </a:prstGeom>
+        </p:spPr>
+        <p:txBody>
+          <a:bodyPr wrap="square" lIns="0" tIns="0" rIns="0" bIns="0" rtlCol="0" anchor="t">
+            <a:spAutoFit/>
+          </a:bodyPr>
+          <a:lstStyle/>
+          <a:p>
+            <a:pPr>
               <a:lnSpc>
                 <a:spcPts val="4299"/>
               </a:lnSpc>
@@ -13919,30 +14509,37 @@
               </a:spcBef>
             </a:pPr>
             <a:r>
-              <a:rPr lang="en-US" sz="2654" b="1" u="none" strike="noStrike" spc="53">
+              <a:rPr lang="en-US" sz="2650" b="1" spc="53">
                 <a:solidFill>
                   <a:srgbClr val="FFFFFF"/>
                 </a:solidFill>
                 <a:latin typeface="Montserrat Bold"/>
-                <a:ea typeface="Montserrat Bold"/>
-                <a:cs typeface="Montserrat Bold"/>
+                <a:ea typeface="+mn-lt"/>
+                <a:cs typeface="+mn-lt"/>
                 <a:sym typeface="Montserrat Bold"/>
               </a:rPr>
-              <a:t>Objetivo principal</a:t>
-            </a:r>
+              <a:t>Sujeito a</a:t>
+            </a:r>
+            <a:endParaRPr lang="pt-BR"/>
           </a:p>
         </p:txBody>
       </p:sp>
       <p:sp>
         <p:nvSpPr>
-          <p:cNvPr id="33" name="TextBox 33"/>
+          <p:cNvPr id="55" name="TextBox 34">
+            <a:extLst>
+              <a:ext uri="{FF2B5EF4-FFF2-40B4-BE49-F238E27FC236}">
+                <a16:creationId xmlns:a16="http://schemas.microsoft.com/office/drawing/2014/main" id="{005C139F-CE99-37C9-9C44-4A8F04A72770}"/>
+              </a:ext>
+            </a:extLst>
+          </p:cNvPr>
           <p:cNvSpPr txBox="1"/>
           <p:nvPr/>
         </p:nvSpPr>
         <p:spPr>
           <a:xfrm>
-            <a:off x="10773039" y="5591124"/>
-            <a:ext cx="4659561" cy="506121"/>
+            <a:off x="4411056" y="5683838"/>
+            <a:ext cx="6849277" cy="1394934"/>
           </a:xfrm>
           <a:prstGeom prst="rect">
             <a:avLst/>
@@ -13954,108 +14551,842 @@
           </a:bodyPr>
           <a:lstStyle/>
           <a:p>
-            <a:pPr marL="0" lvl="0" indent="0" algn="l">
+            <a:pPr>
               <a:lnSpc>
-                <a:spcPts val="4299"/>
+                <a:spcPts val="3715"/>
               </a:lnSpc>
-              <a:spcBef>
-                <a:spcPct val="0"/>
-              </a:spcBef>
             </a:pPr>
             <a:r>
-              <a:rPr lang="en-US" sz="2654" b="1" u="none" strike="noStrike" spc="53">
-                <a:solidFill>
-                  <a:srgbClr val="FFFFFF"/>
-                </a:solidFill>
-                <a:latin typeface="Montserrat Bold"/>
-                <a:ea typeface="Montserrat Bold"/>
-                <a:cs typeface="Montserrat Bold"/>
-                <a:sym typeface="Montserrat Bold"/>
-              </a:rPr>
-              <a:t>Objetivos específicos</a:t>
-            </a:r>
+              <a:rPr lang="en-US" sz="2700" b="1" spc="53" dirty="0" err="1">
+                <a:solidFill>
+                  <a:srgbClr val="113D57"/>
+                </a:solidFill>
+                <a:latin typeface="Montserrat Medium"/>
+                <a:ea typeface="+mn-lt"/>
+                <a:cs typeface="+mn-lt"/>
+                <a:sym typeface="Montserrat Medium"/>
+              </a:rPr>
+              <a:t>wi</a:t>
+            </a:r>
+            <a:r>
+              <a:rPr lang="en-US" sz="2700" b="1" spc="53" dirty="0">
+                <a:solidFill>
+                  <a:srgbClr val="113D57"/>
+                </a:solidFill>
+                <a:latin typeface="Montserrat Medium"/>
+                <a:ea typeface="+mn-lt"/>
+                <a:cs typeface="+mn-lt"/>
+                <a:sym typeface="Montserrat Medium"/>
+              </a:rPr>
+              <a:t> - 1 ≤ di</a:t>
+            </a:r>
+            <a:br>
+              <a:rPr lang="en-US" sz="2700" b="1" spc="53" dirty="0">
+                <a:solidFill>
+                  <a:srgbClr val="113D57"/>
+                </a:solidFill>
+                <a:latin typeface="Montserrat Medium"/>
+                <a:ea typeface="+mn-lt"/>
+                <a:cs typeface="+mn-lt"/>
+              </a:rPr>
+            </a:br>
+            <a:r>
+              <a:rPr lang="en-US" sz="2700" b="1" spc="53" dirty="0">
+                <a:solidFill>
+                  <a:srgbClr val="113D57"/>
+                </a:solidFill>
+                <a:latin typeface="Montserrat Medium"/>
+                <a:ea typeface="+mn-lt"/>
+                <a:cs typeface="+mn-lt"/>
+                <a:sym typeface="Montserrat Medium"/>
+              </a:rPr>
+              <a:t>1 - </a:t>
+            </a:r>
+            <a:r>
+              <a:rPr lang="en-US" sz="2700" b="1" spc="53" dirty="0" err="1">
+                <a:solidFill>
+                  <a:srgbClr val="113D57"/>
+                </a:solidFill>
+                <a:latin typeface="Montserrat Medium"/>
+                <a:ea typeface="+mn-lt"/>
+                <a:cs typeface="+mn-lt"/>
+                <a:sym typeface="Montserrat Medium"/>
+              </a:rPr>
+              <a:t>wi</a:t>
+            </a:r>
+            <a:r>
+              <a:rPr lang="en-US" sz="2700" b="1" spc="53" dirty="0">
+                <a:solidFill>
+                  <a:srgbClr val="113D57"/>
+                </a:solidFill>
+                <a:latin typeface="Montserrat Medium"/>
+                <a:ea typeface="+mn-lt"/>
+                <a:cs typeface="+mn-lt"/>
+                <a:sym typeface="Montserrat Medium"/>
+              </a:rPr>
+              <a:t> ≤ di</a:t>
+            </a:r>
+            <a:br>
+              <a:rPr lang="en-US" sz="2700" b="1" spc="53" dirty="0">
+                <a:solidFill>
+                  <a:srgbClr val="113D57"/>
+                </a:solidFill>
+                <a:latin typeface="Montserrat Medium"/>
+                <a:ea typeface="+mn-lt"/>
+                <a:cs typeface="+mn-lt"/>
+              </a:rPr>
+            </a:br>
+            <a:r>
+              <a:rPr lang="en-US" sz="2700" b="1" spc="53" dirty="0" err="1">
+                <a:solidFill>
+                  <a:srgbClr val="113D57"/>
+                </a:solidFill>
+                <a:latin typeface="Montserrat Medium"/>
+                <a:ea typeface="+mn-lt"/>
+                <a:cs typeface="+mn-lt"/>
+                <a:sym typeface="Montserrat Medium"/>
+              </a:rPr>
+              <a:t>di</a:t>
+            </a:r>
+            <a:r>
+              <a:rPr lang="en-US" sz="2700" b="1" spc="53" dirty="0">
+                <a:solidFill>
+                  <a:srgbClr val="113D57"/>
+                </a:solidFill>
+                <a:latin typeface="Montserrat Medium"/>
+                <a:ea typeface="+mn-lt"/>
+                <a:cs typeface="+mn-lt"/>
+                <a:sym typeface="Montserrat Medium"/>
+              </a:rPr>
+              <a:t> ≥ 0</a:t>
+            </a:r>
+            <a:endParaRPr lang="pt-BR" dirty="0"/>
           </a:p>
         </p:txBody>
       </p:sp>
       <p:sp>
         <p:nvSpPr>
-          <p:cNvPr id="34" name="TextBox 34"/>
+          <p:cNvPr id="56" name="TextBox 34">
+            <a:extLst>
+              <a:ext uri="{FF2B5EF4-FFF2-40B4-BE49-F238E27FC236}">
+                <a16:creationId xmlns:a16="http://schemas.microsoft.com/office/drawing/2014/main" id="{27A33AAA-0BD2-9E68-A20D-22520B49B56F}"/>
+              </a:ext>
+            </a:extLst>
+          </p:cNvPr>
           <p:cNvSpPr txBox="1"/>
           <p:nvPr/>
         </p:nvSpPr>
         <p:spPr>
           <a:xfrm>
-            <a:off x="10773039" y="3807594"/>
-            <a:ext cx="6849277" cy="923181"/>
+            <a:off x="1046754" y="7365990"/>
+            <a:ext cx="16985315" cy="2339358"/>
           </a:xfrm>
           <a:prstGeom prst="rect">
             <a:avLst/>
           </a:prstGeom>
         </p:spPr>
         <p:txBody>
-          <a:bodyPr lIns="0" tIns="0" rIns="0" bIns="0" rtlCol="0" anchor="t">
+          <a:bodyPr wrap="square" lIns="0" tIns="0" rIns="0" bIns="0" rtlCol="0" anchor="t">
             <a:spAutoFit/>
           </a:bodyPr>
           <a:lstStyle/>
           <a:p>
-            <a:pPr algn="l">
+            <a:pPr algn="just">
               <a:lnSpc>
                 <a:spcPts val="3715"/>
               </a:lnSpc>
             </a:pPr>
             <a:r>
-              <a:rPr lang="en-US" sz="2654" b="1" spc="53">
-                <a:solidFill>
-                  <a:srgbClr val="113D57"/>
-                </a:solidFill>
-                <a:latin typeface="Montserrat Medium"/>
-                <a:ea typeface="Montserrat Medium"/>
-                <a:cs typeface="Montserrat Medium"/>
-                <a:sym typeface="Montserrat Medium"/>
-              </a:rPr>
-              <a:t>Declare claramente o objetivo principal da sua pesquisa.</a:t>
-            </a:r>
-          </a:p>
-        </p:txBody>
-      </p:sp>
-      <p:sp>
-        <p:nvSpPr>
-          <p:cNvPr id="35" name="TextBox 35"/>
-          <p:cNvSpPr txBox="1"/>
-          <p:nvPr/>
-        </p:nvSpPr>
-        <p:spPr>
-          <a:xfrm>
-            <a:off x="10773039" y="6965887"/>
-            <a:ext cx="6849277" cy="923181"/>
-          </a:xfrm>
-          <a:prstGeom prst="rect">
-            <a:avLst/>
-          </a:prstGeom>
-        </p:spPr>
-        <p:txBody>
-          <a:bodyPr lIns="0" tIns="0" rIns="0" bIns="0" rtlCol="0" anchor="t">
-            <a:spAutoFit/>
-          </a:bodyPr>
-          <a:lstStyle/>
-          <a:p>
-            <a:pPr algn="l">
-              <a:lnSpc>
-                <a:spcPts val="3715"/>
-              </a:lnSpc>
-            </a:pPr>
-            <a:r>
-              <a:rPr lang="en-US" sz="2654" b="1" spc="53">
-                <a:solidFill>
-                  <a:srgbClr val="113D57"/>
-                </a:solidFill>
-                <a:latin typeface="Montserrat Medium"/>
-                <a:ea typeface="Montserrat Medium"/>
-                <a:cs typeface="Montserrat Medium"/>
-                <a:sym typeface="Montserrat Medium"/>
-              </a:rPr>
-              <a:t>Defina o que sua pesquisa pretende alcançar além do objetivo principal.</a:t>
-            </a:r>
+              <a:rPr lang="en-US" sz="2700" b="1" spc="53" dirty="0">
+                <a:solidFill>
+                  <a:srgbClr val="113D57"/>
+                </a:solidFill>
+                <a:latin typeface="Montserrat Medium"/>
+                <a:ea typeface="+mn-lt"/>
+                <a:cs typeface="+mn-lt"/>
+                <a:sym typeface="Montserrat Medium"/>
+              </a:rPr>
+              <a:t>O </a:t>
+            </a:r>
+            <a:r>
+              <a:rPr lang="en-US" sz="2700" b="1" spc="53" dirty="0" err="1">
+                <a:solidFill>
+                  <a:srgbClr val="113D57"/>
+                </a:solidFill>
+                <a:latin typeface="Montserrat Medium"/>
+                <a:ea typeface="+mn-lt"/>
+                <a:cs typeface="+mn-lt"/>
+                <a:sym typeface="Montserrat Medium"/>
+              </a:rPr>
+              <a:t>modelo</a:t>
+            </a:r>
+            <a:r>
+              <a:rPr lang="en-US" sz="2700" b="1" spc="53" dirty="0">
+                <a:solidFill>
+                  <a:srgbClr val="113D57"/>
+                </a:solidFill>
+                <a:latin typeface="Montserrat Medium"/>
+                <a:ea typeface="+mn-lt"/>
+                <a:cs typeface="+mn-lt"/>
+                <a:sym typeface="Montserrat Medium"/>
+              </a:rPr>
+              <a:t> de </a:t>
+            </a:r>
+            <a:r>
+              <a:rPr lang="en-US" sz="2700" b="1" spc="53" dirty="0" err="1">
+                <a:solidFill>
+                  <a:srgbClr val="113D57"/>
+                </a:solidFill>
+                <a:latin typeface="Montserrat Medium"/>
+                <a:ea typeface="+mn-lt"/>
+                <a:cs typeface="+mn-lt"/>
+                <a:sym typeface="Montserrat Medium"/>
+              </a:rPr>
+              <a:t>calibração</a:t>
+            </a:r>
+            <a:r>
+              <a:rPr lang="en-US" sz="2700" b="1" spc="53" dirty="0">
+                <a:solidFill>
+                  <a:srgbClr val="113D57"/>
+                </a:solidFill>
+                <a:latin typeface="Montserrat Medium"/>
+                <a:ea typeface="+mn-lt"/>
+                <a:cs typeface="+mn-lt"/>
+                <a:sym typeface="Montserrat Medium"/>
+              </a:rPr>
+              <a:t> de pesos </a:t>
+            </a:r>
+            <a:r>
+              <a:rPr lang="en-US" sz="2700" b="1" spc="53" dirty="0" err="1">
+                <a:solidFill>
+                  <a:srgbClr val="113D57"/>
+                </a:solidFill>
+                <a:latin typeface="Montserrat Medium"/>
+                <a:ea typeface="+mn-lt"/>
+                <a:cs typeface="+mn-lt"/>
+                <a:sym typeface="Montserrat Medium"/>
+              </a:rPr>
+              <a:t>foi</a:t>
+            </a:r>
+            <a:r>
+              <a:rPr lang="en-US" sz="2700" b="1" spc="53" dirty="0">
+                <a:solidFill>
+                  <a:srgbClr val="113D57"/>
+                </a:solidFill>
+                <a:latin typeface="Montserrat Medium"/>
+                <a:ea typeface="+mn-lt"/>
+                <a:cs typeface="+mn-lt"/>
+                <a:sym typeface="Montserrat Medium"/>
+              </a:rPr>
+              <a:t> </a:t>
+            </a:r>
+            <a:r>
+              <a:rPr lang="en-US" sz="2700" b="1" spc="53" dirty="0" err="1">
+                <a:solidFill>
+                  <a:srgbClr val="113D57"/>
+                </a:solidFill>
+                <a:latin typeface="Montserrat Medium"/>
+                <a:ea typeface="+mn-lt"/>
+                <a:cs typeface="+mn-lt"/>
+                <a:sym typeface="Montserrat Medium"/>
+              </a:rPr>
+              <a:t>implementado</a:t>
+            </a:r>
+            <a:r>
+              <a:rPr lang="en-US" sz="2700" b="1" spc="53" dirty="0">
+                <a:solidFill>
+                  <a:srgbClr val="113D57"/>
+                </a:solidFill>
+                <a:latin typeface="Montserrat Medium"/>
+                <a:ea typeface="+mn-lt"/>
+                <a:cs typeface="+mn-lt"/>
+                <a:sym typeface="Montserrat Medium"/>
+              </a:rPr>
+              <a:t> no R </a:t>
+            </a:r>
+            <a:r>
+              <a:rPr lang="en-US" sz="2700" b="1" spc="53" dirty="0" err="1">
+                <a:solidFill>
+                  <a:srgbClr val="113D57"/>
+                </a:solidFill>
+                <a:latin typeface="Montserrat Medium"/>
+                <a:ea typeface="+mn-lt"/>
+                <a:cs typeface="+mn-lt"/>
+                <a:sym typeface="Montserrat Medium"/>
+              </a:rPr>
+              <a:t>utilizando</a:t>
+            </a:r>
+            <a:r>
+              <a:rPr lang="en-US" sz="2700" b="1" spc="53" dirty="0">
+                <a:solidFill>
+                  <a:srgbClr val="113D57"/>
+                </a:solidFill>
+                <a:latin typeface="Montserrat Medium"/>
+                <a:ea typeface="+mn-lt"/>
+                <a:cs typeface="+mn-lt"/>
+                <a:sym typeface="Montserrat Medium"/>
+              </a:rPr>
+              <a:t> o </a:t>
+            </a:r>
+            <a:r>
+              <a:rPr lang="en-US" sz="2700" b="1" spc="53" dirty="0" err="1">
+                <a:solidFill>
+                  <a:srgbClr val="113D57"/>
+                </a:solidFill>
+                <a:latin typeface="Montserrat Medium"/>
+                <a:ea typeface="+mn-lt"/>
+                <a:cs typeface="+mn-lt"/>
+                <a:sym typeface="Montserrat Medium"/>
+              </a:rPr>
+              <a:t>pacote</a:t>
+            </a:r>
+            <a:r>
+              <a:rPr lang="en-US" sz="2700" b="1" spc="53" dirty="0">
+                <a:solidFill>
+                  <a:srgbClr val="113D57"/>
+                </a:solidFill>
+                <a:latin typeface="Montserrat Medium"/>
+                <a:ea typeface="+mn-lt"/>
+                <a:cs typeface="+mn-lt"/>
+                <a:sym typeface="Montserrat Medium"/>
+              </a:rPr>
+              <a:t> </a:t>
+            </a:r>
+            <a:r>
+              <a:rPr lang="en-US" sz="2700" b="1" spc="53" dirty="0" err="1">
+                <a:solidFill>
+                  <a:srgbClr val="113D57"/>
+                </a:solidFill>
+                <a:latin typeface="Montserrat Medium"/>
+                <a:ea typeface="+mn-lt"/>
+                <a:cs typeface="+mn-lt"/>
+                <a:sym typeface="Montserrat Medium"/>
+              </a:rPr>
+              <a:t>Rglpk</a:t>
+            </a:r>
+            <a:r>
+              <a:rPr lang="en-US" sz="2700" b="1" spc="53" dirty="0">
+                <a:solidFill>
+                  <a:srgbClr val="113D57"/>
+                </a:solidFill>
+                <a:latin typeface="Montserrat Medium"/>
+                <a:ea typeface="+mn-lt"/>
+                <a:cs typeface="+mn-lt"/>
+                <a:sym typeface="Montserrat Medium"/>
+              </a:rPr>
+              <a:t>, </a:t>
+            </a:r>
+            <a:r>
+              <a:rPr lang="en-US" sz="2700" b="1" spc="53" dirty="0" err="1">
+                <a:solidFill>
+                  <a:srgbClr val="113D57"/>
+                </a:solidFill>
+                <a:latin typeface="Montserrat Medium"/>
+                <a:ea typeface="+mn-lt"/>
+                <a:cs typeface="+mn-lt"/>
+                <a:sym typeface="Montserrat Medium"/>
+              </a:rPr>
+              <a:t>que</a:t>
+            </a:r>
+            <a:r>
+              <a:rPr lang="en-US" sz="2700" b="1" spc="53" dirty="0">
+                <a:solidFill>
+                  <a:srgbClr val="113D57"/>
+                </a:solidFill>
+                <a:latin typeface="Montserrat Medium"/>
+                <a:ea typeface="+mn-lt"/>
+                <a:cs typeface="+mn-lt"/>
+                <a:sym typeface="Montserrat Medium"/>
+              </a:rPr>
+              <a:t> resolve </a:t>
+            </a:r>
+            <a:r>
+              <a:rPr lang="en-US" sz="2700" b="1" spc="53" dirty="0" err="1">
+                <a:solidFill>
+                  <a:srgbClr val="113D57"/>
+                </a:solidFill>
+                <a:latin typeface="Montserrat Medium"/>
+                <a:ea typeface="+mn-lt"/>
+                <a:cs typeface="+mn-lt"/>
+                <a:sym typeface="Montserrat Medium"/>
+              </a:rPr>
+              <a:t>problemas</a:t>
+            </a:r>
+            <a:r>
+              <a:rPr lang="en-US" sz="2700" b="1" spc="53" dirty="0">
+                <a:solidFill>
+                  <a:srgbClr val="113D57"/>
+                </a:solidFill>
+                <a:latin typeface="Montserrat Medium"/>
+                <a:ea typeface="+mn-lt"/>
+                <a:cs typeface="+mn-lt"/>
+                <a:sym typeface="Montserrat Medium"/>
+              </a:rPr>
+              <a:t> de </a:t>
+            </a:r>
+            <a:r>
+              <a:rPr lang="en-US" sz="2700" b="1" spc="53" dirty="0" err="1">
+                <a:solidFill>
+                  <a:srgbClr val="113D57"/>
+                </a:solidFill>
+                <a:latin typeface="Montserrat Medium"/>
+                <a:ea typeface="+mn-lt"/>
+                <a:cs typeface="+mn-lt"/>
+                <a:sym typeface="Montserrat Medium"/>
+              </a:rPr>
+              <a:t>Programação</a:t>
+            </a:r>
+            <a:r>
+              <a:rPr lang="en-US" sz="2700" b="1" spc="53" dirty="0">
+                <a:solidFill>
+                  <a:srgbClr val="113D57"/>
+                </a:solidFill>
+                <a:latin typeface="Montserrat Medium"/>
+                <a:ea typeface="+mn-lt"/>
+                <a:cs typeface="+mn-lt"/>
+                <a:sym typeface="Montserrat Medium"/>
+              </a:rPr>
+              <a:t> Linear </a:t>
+            </a:r>
+            <a:r>
+              <a:rPr lang="en-US" sz="2700" b="1" spc="53" dirty="0" err="1">
+                <a:solidFill>
+                  <a:srgbClr val="113D57"/>
+                </a:solidFill>
+                <a:latin typeface="Montserrat Medium"/>
+                <a:ea typeface="+mn-lt"/>
+                <a:cs typeface="+mn-lt"/>
+                <a:sym typeface="Montserrat Medium"/>
+              </a:rPr>
+              <a:t>através</a:t>
+            </a:r>
+            <a:r>
+              <a:rPr lang="en-US" sz="2700" b="1" spc="53" dirty="0">
+                <a:solidFill>
+                  <a:srgbClr val="113D57"/>
+                </a:solidFill>
+                <a:latin typeface="Montserrat Medium"/>
+                <a:ea typeface="+mn-lt"/>
+                <a:cs typeface="+mn-lt"/>
+                <a:sym typeface="Montserrat Medium"/>
+              </a:rPr>
+              <a:t> da </a:t>
+            </a:r>
+            <a:r>
+              <a:rPr lang="en-US" sz="2700" b="1" spc="53" dirty="0" err="1">
+                <a:solidFill>
+                  <a:srgbClr val="113D57"/>
+                </a:solidFill>
+                <a:latin typeface="Montserrat Medium"/>
+                <a:ea typeface="+mn-lt"/>
+                <a:cs typeface="+mn-lt"/>
+                <a:sym typeface="Montserrat Medium"/>
+              </a:rPr>
+              <a:t>função</a:t>
+            </a:r>
+            <a:r>
+              <a:rPr lang="en-US" sz="2700" b="1" spc="53" dirty="0">
+                <a:solidFill>
+                  <a:srgbClr val="113D57"/>
+                </a:solidFill>
+                <a:latin typeface="Montserrat Medium"/>
+                <a:ea typeface="+mn-lt"/>
+                <a:cs typeface="+mn-lt"/>
+                <a:sym typeface="Montserrat Medium"/>
+              </a:rPr>
+              <a:t> </a:t>
+            </a:r>
+            <a:r>
+              <a:rPr lang="en-US" sz="2700" b="1" spc="53" dirty="0" err="1">
+                <a:solidFill>
+                  <a:srgbClr val="113D57"/>
+                </a:solidFill>
+                <a:latin typeface="Montserrat Medium"/>
+                <a:ea typeface="+mn-lt"/>
+                <a:cs typeface="+mn-lt"/>
+                <a:sym typeface="Montserrat Medium"/>
+              </a:rPr>
+              <a:t>Rglpk_solve_LP</a:t>
+            </a:r>
+            <a:r>
+              <a:rPr lang="en-US" sz="2700" b="1" spc="53" dirty="0">
+                <a:solidFill>
+                  <a:srgbClr val="113D57"/>
+                </a:solidFill>
+                <a:latin typeface="Montserrat Medium"/>
+                <a:ea typeface="+mn-lt"/>
+                <a:cs typeface="+mn-lt"/>
+                <a:sym typeface="Montserrat Medium"/>
+              </a:rPr>
+              <a:t>().</a:t>
+            </a:r>
+            <a:br>
+              <a:rPr lang="en-US" sz="2700" b="1" spc="53" dirty="0">
+                <a:solidFill>
+                  <a:srgbClr val="113D57"/>
+                </a:solidFill>
+                <a:latin typeface="Montserrat Medium"/>
+                <a:ea typeface="+mn-lt"/>
+                <a:cs typeface="+mn-lt"/>
+                <a:sym typeface="Montserrat Medium"/>
+              </a:rPr>
+            </a:br>
+            <a:r>
+              <a:rPr lang="en-US" sz="2700" b="1" spc="53" dirty="0">
+                <a:solidFill>
+                  <a:srgbClr val="113D57"/>
+                </a:solidFill>
+                <a:latin typeface="Montserrat Medium"/>
+                <a:ea typeface="+mn-lt"/>
+                <a:cs typeface="+mn-lt"/>
+                <a:sym typeface="Montserrat Medium"/>
+              </a:rPr>
+              <a:t> </a:t>
+            </a:r>
+            <a:r>
+              <a:rPr lang="en-US" sz="2700" b="1" spc="53" dirty="0" err="1">
+                <a:solidFill>
+                  <a:srgbClr val="113D57"/>
+                </a:solidFill>
+                <a:latin typeface="Montserrat Medium"/>
+                <a:ea typeface="+mn-lt"/>
+                <a:cs typeface="+mn-lt"/>
+                <a:sym typeface="Montserrat Medium"/>
+              </a:rPr>
+              <a:t>Considerando</a:t>
+            </a:r>
+            <a:r>
+              <a:rPr lang="en-US" sz="2700" b="1" spc="53" dirty="0">
+                <a:solidFill>
+                  <a:srgbClr val="113D57"/>
+                </a:solidFill>
+                <a:latin typeface="Montserrat Medium"/>
+                <a:ea typeface="+mn-lt"/>
+                <a:cs typeface="+mn-lt"/>
+                <a:sym typeface="Montserrat Medium"/>
+              </a:rPr>
+              <a:t> </a:t>
+            </a:r>
+            <a:r>
+              <a:rPr lang="en-US" sz="2700" b="1" spc="53" dirty="0" err="1">
+                <a:solidFill>
+                  <a:srgbClr val="113D57"/>
+                </a:solidFill>
+                <a:latin typeface="Montserrat Medium"/>
+                <a:ea typeface="+mn-lt"/>
+                <a:cs typeface="+mn-lt"/>
+                <a:sym typeface="Montserrat Medium"/>
+              </a:rPr>
+              <a:t>uma</a:t>
+            </a:r>
+            <a:r>
+              <a:rPr lang="en-US" sz="2700" b="1" spc="53" dirty="0">
+                <a:solidFill>
+                  <a:srgbClr val="113D57"/>
+                </a:solidFill>
+                <a:latin typeface="Montserrat Medium"/>
+                <a:ea typeface="+mn-lt"/>
+                <a:cs typeface="+mn-lt"/>
+                <a:sym typeface="Montserrat Medium"/>
+              </a:rPr>
+              <a:t> </a:t>
+            </a:r>
+            <a:r>
+              <a:rPr lang="en-US" sz="2700" b="1" spc="53" dirty="0" err="1">
+                <a:solidFill>
+                  <a:srgbClr val="113D57"/>
+                </a:solidFill>
+                <a:latin typeface="Montserrat Medium"/>
+                <a:ea typeface="+mn-lt"/>
+                <a:cs typeface="+mn-lt"/>
+                <a:sym typeface="Montserrat Medium"/>
+              </a:rPr>
+              <a:t>população-alvo</a:t>
+            </a:r>
+            <a:r>
+              <a:rPr lang="en-US" sz="2700" b="1" spc="53" dirty="0">
+                <a:solidFill>
+                  <a:srgbClr val="113D57"/>
+                </a:solidFill>
+                <a:latin typeface="Montserrat Medium"/>
+                <a:ea typeface="+mn-lt"/>
+                <a:cs typeface="+mn-lt"/>
+                <a:sym typeface="Montserrat Medium"/>
+              </a:rPr>
+              <a:t> com 52% de </a:t>
+            </a:r>
+            <a:r>
+              <a:rPr lang="en-US" sz="2700" b="1" spc="53" dirty="0" err="1">
+                <a:solidFill>
+                  <a:srgbClr val="113D57"/>
+                </a:solidFill>
+                <a:latin typeface="Montserrat Medium"/>
+                <a:ea typeface="+mn-lt"/>
+                <a:cs typeface="+mn-lt"/>
+                <a:sym typeface="Montserrat Medium"/>
+              </a:rPr>
+              <a:t>mulheres</a:t>
+            </a:r>
+            <a:r>
+              <a:rPr lang="en-US" sz="2700" b="1" spc="53" dirty="0">
+                <a:solidFill>
+                  <a:srgbClr val="113D57"/>
+                </a:solidFill>
+                <a:latin typeface="Montserrat Medium"/>
+                <a:ea typeface="+mn-lt"/>
+                <a:cs typeface="+mn-lt"/>
+                <a:sym typeface="Montserrat Medium"/>
+              </a:rPr>
+              <a:t>, 48% de </a:t>
+            </a:r>
+            <a:r>
+              <a:rPr lang="en-US" sz="2700" b="1" spc="53" dirty="0" err="1">
+                <a:solidFill>
+                  <a:srgbClr val="113D57"/>
+                </a:solidFill>
+                <a:latin typeface="Montserrat Medium"/>
+                <a:ea typeface="+mn-lt"/>
+                <a:cs typeface="+mn-lt"/>
+                <a:sym typeface="Montserrat Medium"/>
+              </a:rPr>
+              <a:t>homens</a:t>
+            </a:r>
+            <a:r>
+              <a:rPr lang="en-US" sz="2700" b="1" spc="53" dirty="0">
+                <a:solidFill>
+                  <a:srgbClr val="113D57"/>
+                </a:solidFill>
+                <a:latin typeface="Montserrat Medium"/>
+                <a:ea typeface="+mn-lt"/>
+                <a:cs typeface="+mn-lt"/>
+                <a:sym typeface="Montserrat Medium"/>
+              </a:rPr>
+              <a:t>, 40% de </a:t>
+            </a:r>
+            <a:r>
+              <a:rPr lang="en-US" sz="2700" b="1" spc="53" dirty="0" err="1">
+                <a:solidFill>
+                  <a:srgbClr val="113D57"/>
+                </a:solidFill>
+                <a:latin typeface="Montserrat Medium"/>
+                <a:ea typeface="+mn-lt"/>
+                <a:cs typeface="+mn-lt"/>
+                <a:sym typeface="Montserrat Medium"/>
+              </a:rPr>
+              <a:t>indivíduos</a:t>
+            </a:r>
+            <a:r>
+              <a:rPr lang="en-US" sz="2700" b="1" spc="53" dirty="0">
+                <a:solidFill>
+                  <a:srgbClr val="113D57"/>
+                </a:solidFill>
+                <a:latin typeface="Montserrat Medium"/>
+                <a:ea typeface="+mn-lt"/>
+                <a:cs typeface="+mn-lt"/>
+                <a:sym typeface="Montserrat Medium"/>
+              </a:rPr>
+              <a:t> entre 18 e 34 </a:t>
+            </a:r>
+            <a:r>
+              <a:rPr lang="en-US" sz="2700" b="1" spc="53" dirty="0" err="1">
+                <a:solidFill>
+                  <a:srgbClr val="113D57"/>
+                </a:solidFill>
+                <a:latin typeface="Montserrat Medium"/>
+                <a:ea typeface="+mn-lt"/>
+                <a:cs typeface="+mn-lt"/>
+                <a:sym typeface="Montserrat Medium"/>
+              </a:rPr>
+              <a:t>anos</a:t>
+            </a:r>
+            <a:r>
+              <a:rPr lang="en-US" sz="2700" b="1" spc="53" dirty="0">
+                <a:solidFill>
+                  <a:srgbClr val="113D57"/>
+                </a:solidFill>
+                <a:latin typeface="Montserrat Medium"/>
+                <a:ea typeface="+mn-lt"/>
+                <a:cs typeface="+mn-lt"/>
+                <a:sym typeface="Montserrat Medium"/>
+              </a:rPr>
+              <a:t> e 60% de </a:t>
+            </a:r>
+            <a:r>
+              <a:rPr lang="en-US" sz="2700" b="1" spc="53" dirty="0" err="1">
+                <a:solidFill>
+                  <a:srgbClr val="113D57"/>
+                </a:solidFill>
+                <a:latin typeface="Montserrat Medium"/>
+                <a:ea typeface="+mn-lt"/>
+                <a:cs typeface="+mn-lt"/>
+                <a:sym typeface="Montserrat Medium"/>
+              </a:rPr>
+              <a:t>indivíduos</a:t>
+            </a:r>
+            <a:r>
+              <a:rPr lang="en-US" sz="2700" b="1" spc="53" dirty="0">
+                <a:solidFill>
+                  <a:srgbClr val="113D57"/>
+                </a:solidFill>
+                <a:latin typeface="Montserrat Medium"/>
+                <a:ea typeface="+mn-lt"/>
+                <a:cs typeface="+mn-lt"/>
+                <a:sym typeface="Montserrat Medium"/>
+              </a:rPr>
+              <a:t> com 35 </a:t>
+            </a:r>
+            <a:r>
+              <a:rPr lang="en-US" sz="2700" b="1" spc="53" dirty="0" err="1">
+                <a:solidFill>
+                  <a:srgbClr val="113D57"/>
+                </a:solidFill>
+                <a:latin typeface="Montserrat Medium"/>
+                <a:ea typeface="+mn-lt"/>
+                <a:cs typeface="+mn-lt"/>
+                <a:sym typeface="Montserrat Medium"/>
+              </a:rPr>
+              <a:t>anos</a:t>
+            </a:r>
+            <a:r>
+              <a:rPr lang="en-US" sz="2700" b="1" spc="53" dirty="0">
+                <a:solidFill>
+                  <a:srgbClr val="113D57"/>
+                </a:solidFill>
+                <a:latin typeface="Montserrat Medium"/>
+                <a:ea typeface="+mn-lt"/>
+                <a:cs typeface="+mn-lt"/>
+                <a:sym typeface="Montserrat Medium"/>
+              </a:rPr>
+              <a:t> </a:t>
+            </a:r>
+            <a:r>
+              <a:rPr lang="en-US" sz="2700" b="1" spc="53" dirty="0" err="1">
+                <a:solidFill>
+                  <a:srgbClr val="113D57"/>
+                </a:solidFill>
+                <a:latin typeface="Montserrat Medium"/>
+                <a:ea typeface="+mn-lt"/>
+                <a:cs typeface="+mn-lt"/>
+                <a:sym typeface="Montserrat Medium"/>
+              </a:rPr>
+              <a:t>ou</a:t>
+            </a:r>
+            <a:r>
+              <a:rPr lang="en-US" sz="2700" b="1" spc="53" dirty="0">
+                <a:solidFill>
+                  <a:srgbClr val="113D57"/>
+                </a:solidFill>
+                <a:latin typeface="Montserrat Medium"/>
+                <a:ea typeface="+mn-lt"/>
+                <a:cs typeface="+mn-lt"/>
+                <a:sym typeface="Montserrat Medium"/>
+              </a:rPr>
+              <a:t> </a:t>
+            </a:r>
+            <a:r>
+              <a:rPr lang="en-US" sz="2700" b="1" spc="53" dirty="0" err="1">
+                <a:solidFill>
+                  <a:srgbClr val="113D57"/>
+                </a:solidFill>
+                <a:latin typeface="Montserrat Medium"/>
+                <a:ea typeface="+mn-lt"/>
+                <a:cs typeface="+mn-lt"/>
+                <a:sym typeface="Montserrat Medium"/>
+              </a:rPr>
+              <a:t>mais</a:t>
+            </a:r>
+            <a:r>
+              <a:rPr lang="en-US" sz="2700" b="1" spc="53" dirty="0">
+                <a:solidFill>
+                  <a:srgbClr val="113D57"/>
+                </a:solidFill>
+                <a:latin typeface="Montserrat Medium"/>
+                <a:ea typeface="+mn-lt"/>
+                <a:cs typeface="+mn-lt"/>
+                <a:sym typeface="Montserrat Medium"/>
+              </a:rPr>
+              <a:t> e o </a:t>
+            </a:r>
+            <a:r>
+              <a:rPr lang="en-US" sz="2700" b="1" spc="53" dirty="0" err="1">
+                <a:solidFill>
+                  <a:srgbClr val="113D57"/>
+                </a:solidFill>
+                <a:latin typeface="Montserrat Medium"/>
+                <a:ea typeface="+mn-lt"/>
+                <a:cs typeface="+mn-lt"/>
+                <a:sym typeface="Montserrat Medium"/>
+              </a:rPr>
+              <a:t>tamanho</a:t>
+            </a:r>
+            <a:r>
+              <a:rPr lang="en-US" sz="2700" b="1" spc="53" dirty="0">
+                <a:solidFill>
+                  <a:srgbClr val="113D57"/>
+                </a:solidFill>
+                <a:latin typeface="Montserrat Medium"/>
+                <a:ea typeface="+mn-lt"/>
+                <a:cs typeface="+mn-lt"/>
+                <a:sym typeface="Montserrat Medium"/>
+              </a:rPr>
+              <a:t> da </a:t>
+            </a:r>
+            <a:r>
+              <a:rPr lang="en-US" sz="2700" b="1" spc="53" dirty="0" err="1">
+                <a:solidFill>
+                  <a:srgbClr val="113D57"/>
+                </a:solidFill>
+                <a:latin typeface="Montserrat Medium"/>
+                <a:ea typeface="+mn-lt"/>
+                <a:cs typeface="+mn-lt"/>
+                <a:sym typeface="Montserrat Medium"/>
+              </a:rPr>
+              <a:t>amostra</a:t>
+            </a:r>
+            <a:r>
+              <a:rPr lang="en-US" sz="2700" b="1" spc="53" dirty="0">
+                <a:solidFill>
+                  <a:srgbClr val="113D57"/>
+                </a:solidFill>
+                <a:latin typeface="Montserrat Medium"/>
+                <a:ea typeface="+mn-lt"/>
+                <a:cs typeface="+mn-lt"/>
+                <a:sym typeface="Montserrat Medium"/>
+              </a:rPr>
+              <a:t> com 50 </a:t>
+            </a:r>
+            <a:r>
+              <a:rPr lang="en-US" sz="2700" b="1" spc="53" dirty="0" err="1">
+                <a:solidFill>
+                  <a:srgbClr val="113D57"/>
+                </a:solidFill>
+                <a:latin typeface="Montserrat Medium"/>
+                <a:ea typeface="+mn-lt"/>
+                <a:cs typeface="+mn-lt"/>
+                <a:sym typeface="Montserrat Medium"/>
+              </a:rPr>
+              <a:t>entrevistados</a:t>
+            </a:r>
+            <a:r>
+              <a:rPr lang="en-US" sz="2700" b="1" spc="53" dirty="0">
+                <a:solidFill>
+                  <a:srgbClr val="113D57"/>
+                </a:solidFill>
+                <a:latin typeface="Montserrat Medium"/>
+                <a:ea typeface="+mn-lt"/>
+                <a:cs typeface="+mn-lt"/>
+                <a:sym typeface="Montserrat Medium"/>
+              </a:rPr>
+              <a:t>.</a:t>
+            </a:r>
+            <a:endParaRPr lang="pt-BR" sz="2700" b="1" spc="53" dirty="0" err="1">
+              <a:solidFill>
+                <a:srgbClr val="113D57"/>
+              </a:solidFill>
+              <a:latin typeface="Montserrat Medium"/>
+              <a:ea typeface="+mn-lt"/>
+              <a:cs typeface="+mn-lt"/>
+            </a:endParaRPr>
           </a:p>
         </p:txBody>
       </p:sp>
@@ -14092,8 +15423,8 @@
         </p:nvGrpSpPr>
         <p:grpSpPr>
           <a:xfrm>
-            <a:off x="1182792" y="-1101486"/>
-            <a:ext cx="5223255" cy="7811729"/>
+            <a:off x="-262133" y="-5306864"/>
+            <a:ext cx="19327443" cy="7358843"/>
             <a:chOff x="0" y="0"/>
             <a:chExt cx="1375672" cy="2057410"/>
           </a:xfrm>
@@ -14198,8 +15529,8 @@
         </p:nvGrpSpPr>
         <p:grpSpPr>
           <a:xfrm>
-            <a:off x="9663636" y="1028700"/>
-            <a:ext cx="10625780" cy="8229600"/>
+            <a:off x="4401524" y="2042305"/>
+            <a:ext cx="13882252" cy="8272732"/>
             <a:chOff x="0" y="0"/>
             <a:chExt cx="2798559" cy="2167467"/>
           </a:xfrm>
@@ -14313,107 +15644,13 @@
       </p:grpSp>
       <p:grpSp>
         <p:nvGrpSpPr>
-          <p:cNvPr id="8" name="Group 8"/>
-          <p:cNvGrpSpPr/>
-          <p:nvPr/>
-        </p:nvGrpSpPr>
-        <p:grpSpPr>
-          <a:xfrm>
-            <a:off x="8814629" y="1565007"/>
-            <a:ext cx="1704685" cy="1704685"/>
-            <a:chOff x="0" y="0"/>
-            <a:chExt cx="812800" cy="812800"/>
-          </a:xfrm>
-        </p:grpSpPr>
-        <p:sp>
-          <p:nvSpPr>
-            <p:cNvPr id="9" name="Freeform 9"/>
-            <p:cNvSpPr/>
-            <p:nvPr/>
-          </p:nvSpPr>
-          <p:spPr>
-            <a:xfrm>
-              <a:off x="0" y="0"/>
-              <a:ext cx="812800" cy="812800"/>
-            </a:xfrm>
-            <a:custGeom>
-              <a:avLst/>
-              <a:gdLst/>
-              <a:ahLst/>
-              <a:cxnLst/>
-              <a:rect l="l" t="t" r="r" b="b"/>
-              <a:pathLst>
-                <a:path w="812800" h="812800">
-                  <a:moveTo>
-                    <a:pt x="406400" y="0"/>
-                  </a:moveTo>
-                  <a:cubicBezTo>
-                    <a:pt x="181951" y="0"/>
-                    <a:pt x="0" y="181951"/>
-                    <a:pt x="0" y="406400"/>
-                  </a:cubicBezTo>
-                  <a:cubicBezTo>
-                    <a:pt x="0" y="630849"/>
-                    <a:pt x="181951" y="812800"/>
-                    <a:pt x="406400" y="812800"/>
-                  </a:cubicBezTo>
-                  <a:cubicBezTo>
-                    <a:pt x="630849" y="812800"/>
-                    <a:pt x="812800" y="630849"/>
-                    <a:pt x="812800" y="406400"/>
-                  </a:cubicBezTo>
-                  <a:cubicBezTo>
-                    <a:pt x="812800" y="181951"/>
-                    <a:pt x="630849" y="0"/>
-                    <a:pt x="406400" y="0"/>
-                  </a:cubicBezTo>
-                  <a:close/>
-                </a:path>
-              </a:pathLst>
-            </a:custGeom>
-            <a:solidFill>
-              <a:srgbClr val="3383B2"/>
-            </a:solidFill>
-          </p:spPr>
-        </p:sp>
-        <p:sp>
-          <p:nvSpPr>
-            <p:cNvPr id="10" name="TextBox 10"/>
-            <p:cNvSpPr txBox="1"/>
-            <p:nvPr/>
-          </p:nvSpPr>
-          <p:spPr>
-            <a:xfrm>
-              <a:off x="76200" y="19050"/>
-              <a:ext cx="660400" cy="717550"/>
-            </a:xfrm>
-            <a:prstGeom prst="rect">
-              <a:avLst/>
-            </a:prstGeom>
-          </p:spPr>
-          <p:txBody>
-            <a:bodyPr lIns="50800" tIns="50800" rIns="50800" bIns="50800" rtlCol="0" anchor="ctr"/>
-            <a:lstStyle/>
-            <a:p>
-              <a:pPr algn="ctr">
-                <a:lnSpc>
-                  <a:spcPts val="3600"/>
-                </a:lnSpc>
-              </a:pPr>
-              <a:endParaRPr/>
-            </a:p>
-          </p:txBody>
-        </p:sp>
-      </p:grpSp>
-      <p:grpSp>
-        <p:nvGrpSpPr>
           <p:cNvPr id="11" name="Group 11"/>
           <p:cNvGrpSpPr/>
           <p:nvPr/>
         </p:nvGrpSpPr>
         <p:grpSpPr>
           <a:xfrm>
-            <a:off x="8811293" y="4138784"/>
+            <a:off x="13685218" y="105936"/>
             <a:ext cx="1704685" cy="1704685"/>
             <a:chOff x="0" y="0"/>
             <a:chExt cx="812800" cy="812800"/>
@@ -14499,152 +15736,6 @@
           </p:txBody>
         </p:sp>
       </p:grpSp>
-      <p:grpSp>
-        <p:nvGrpSpPr>
-          <p:cNvPr id="14" name="Group 14"/>
-          <p:cNvGrpSpPr/>
-          <p:nvPr/>
-        </p:nvGrpSpPr>
-        <p:grpSpPr>
-          <a:xfrm>
-            <a:off x="8811293" y="6710243"/>
-            <a:ext cx="1704685" cy="1704685"/>
-            <a:chOff x="0" y="0"/>
-            <a:chExt cx="812800" cy="812800"/>
-          </a:xfrm>
-        </p:grpSpPr>
-        <p:sp>
-          <p:nvSpPr>
-            <p:cNvPr id="15" name="Freeform 15"/>
-            <p:cNvSpPr/>
-            <p:nvPr/>
-          </p:nvSpPr>
-          <p:spPr>
-            <a:xfrm>
-              <a:off x="0" y="0"/>
-              <a:ext cx="812800" cy="812800"/>
-            </a:xfrm>
-            <a:custGeom>
-              <a:avLst/>
-              <a:gdLst/>
-              <a:ahLst/>
-              <a:cxnLst/>
-              <a:rect l="l" t="t" r="r" b="b"/>
-              <a:pathLst>
-                <a:path w="812800" h="812800">
-                  <a:moveTo>
-                    <a:pt x="406400" y="0"/>
-                  </a:moveTo>
-                  <a:cubicBezTo>
-                    <a:pt x="181951" y="0"/>
-                    <a:pt x="0" y="181951"/>
-                    <a:pt x="0" y="406400"/>
-                  </a:cubicBezTo>
-                  <a:cubicBezTo>
-                    <a:pt x="0" y="630849"/>
-                    <a:pt x="181951" y="812800"/>
-                    <a:pt x="406400" y="812800"/>
-                  </a:cubicBezTo>
-                  <a:cubicBezTo>
-                    <a:pt x="630849" y="812800"/>
-                    <a:pt x="812800" y="630849"/>
-                    <a:pt x="812800" y="406400"/>
-                  </a:cubicBezTo>
-                  <a:cubicBezTo>
-                    <a:pt x="812800" y="181951"/>
-                    <a:pt x="630849" y="0"/>
-                    <a:pt x="406400" y="0"/>
-                  </a:cubicBezTo>
-                  <a:close/>
-                </a:path>
-              </a:pathLst>
-            </a:custGeom>
-            <a:solidFill>
-              <a:srgbClr val="3383B2"/>
-            </a:solidFill>
-          </p:spPr>
-        </p:sp>
-        <p:sp>
-          <p:nvSpPr>
-            <p:cNvPr id="16" name="TextBox 16"/>
-            <p:cNvSpPr txBox="1"/>
-            <p:nvPr/>
-          </p:nvSpPr>
-          <p:spPr>
-            <a:xfrm>
-              <a:off x="76200" y="19050"/>
-              <a:ext cx="660400" cy="717550"/>
-            </a:xfrm>
-            <a:prstGeom prst="rect">
-              <a:avLst/>
-            </a:prstGeom>
-          </p:spPr>
-          <p:txBody>
-            <a:bodyPr lIns="50800" tIns="50800" rIns="50800" bIns="50800" rtlCol="0" anchor="ctr"/>
-            <a:lstStyle/>
-            <a:p>
-              <a:pPr algn="ctr">
-                <a:lnSpc>
-                  <a:spcPts val="3600"/>
-                </a:lnSpc>
-              </a:pPr>
-              <a:endParaRPr/>
-            </a:p>
-          </p:txBody>
-        </p:sp>
-      </p:grpSp>
-      <p:sp>
-        <p:nvSpPr>
-          <p:cNvPr id="17" name="Freeform 17"/>
-          <p:cNvSpPr/>
-          <p:nvPr/>
-        </p:nvSpPr>
-        <p:spPr>
-          <a:xfrm>
-            <a:off x="9075371" y="1827968"/>
-            <a:ext cx="1183201" cy="1178764"/>
-          </a:xfrm>
-          <a:custGeom>
-            <a:avLst/>
-            <a:gdLst/>
-            <a:ahLst/>
-            <a:cxnLst/>
-            <a:rect l="l" t="t" r="r" b="b"/>
-            <a:pathLst>
-              <a:path w="1183201" h="1178764">
-                <a:moveTo>
-                  <a:pt x="0" y="0"/>
-                </a:moveTo>
-                <a:lnTo>
-                  <a:pt x="1183201" y="0"/>
-                </a:lnTo>
-                <a:lnTo>
-                  <a:pt x="1183201" y="1178764"/>
-                </a:lnTo>
-                <a:lnTo>
-                  <a:pt x="0" y="1178764"/>
-                </a:lnTo>
-                <a:lnTo>
-                  <a:pt x="0" y="0"/>
-                </a:lnTo>
-                <a:close/>
-              </a:path>
-            </a:pathLst>
-          </a:custGeom>
-          <a:blipFill>
-            <a:blip>
-              <a:extLst>
-                <a:ext uri="{96DAC541-7B7A-43D3-8B79-37D633B846F1}">
-                  <asvg:svgBlip xmlns:asvg="http://schemas.microsoft.com/office/drawing/2016/SVG/main" r:embed="rId2"/>
-                </a:ext>
-              </a:extLst>
-            </a:blip>
-            <a:stretch>
-              <a:fillRect/>
-            </a:stretch>
-          </a:blipFill>
-        </p:spPr>
-      </p:sp>
       <p:sp>
         <p:nvSpPr>
           <p:cNvPr id="18" name="Freeform 18"/>
@@ -14653,7 +15744,7 @@
         </p:nvSpPr>
         <p:spPr>
           <a:xfrm>
-            <a:off x="9065558" y="4575462"/>
+            <a:off x="13939484" y="542614"/>
             <a:ext cx="1196155" cy="831328"/>
           </a:xfrm>
           <a:custGeom>
@@ -14687,59 +15778,7 @@
             <a:blip>
               <a:extLst>
                 <a:ext uri="{96DAC541-7B7A-43D3-8B79-37D633B846F1}">
-                  <asvg:svgBlip xmlns:asvg="http://schemas.microsoft.com/office/drawing/2016/SVG/main" r:embed="rId3"/>
-                </a:ext>
-              </a:extLst>
-            </a:blip>
-            <a:stretch>
-              <a:fillRect/>
-            </a:stretch>
-          </a:blipFill>
-        </p:spPr>
-      </p:sp>
-      <p:sp>
-        <p:nvSpPr>
-          <p:cNvPr id="19" name="Freeform 19"/>
-          <p:cNvSpPr/>
-          <p:nvPr/>
-        </p:nvSpPr>
-        <p:spPr>
-          <a:xfrm>
-            <a:off x="9212528" y="6973204"/>
-            <a:ext cx="1114749" cy="1098028"/>
-          </a:xfrm>
-          <a:custGeom>
-            <a:avLst/>
-            <a:gdLst/>
-            <a:ahLst/>
-            <a:cxnLst/>
-            <a:rect l="l" t="t" r="r" b="b"/>
-            <a:pathLst>
-              <a:path w="1114749" h="1098028">
-                <a:moveTo>
-                  <a:pt x="0" y="0"/>
-                </a:moveTo>
-                <a:lnTo>
-                  <a:pt x="1114749" y="0"/>
-                </a:lnTo>
-                <a:lnTo>
-                  <a:pt x="1114749" y="1098027"/>
-                </a:lnTo>
-                <a:lnTo>
-                  <a:pt x="0" y="1098027"/>
-                </a:lnTo>
-                <a:lnTo>
-                  <a:pt x="0" y="0"/>
-                </a:lnTo>
-                <a:close/>
-              </a:path>
-            </a:pathLst>
-          </a:custGeom>
-          <a:blipFill>
-            <a:blip>
-              <a:extLst>
-                <a:ext uri="{96DAC541-7B7A-43D3-8B79-37D633B846F1}">
-                  <asvg:svgBlip xmlns:asvg="http://schemas.microsoft.com/office/drawing/2016/SVG/main" r:embed="rId4"/>
+                  <asvg:svgBlip xmlns:asvg="http://schemas.microsoft.com/office/drawing/2016/SVG/main" r:embed="rId2"/>
                 </a:ext>
               </a:extLst>
             </a:blip>
@@ -14757,15 +15796,15 @@
         </p:nvSpPr>
         <p:spPr>
           <a:xfrm>
-            <a:off x="1387392" y="580467"/>
-            <a:ext cx="4814054" cy="5283200"/>
+            <a:off x="546316" y="106014"/>
+            <a:ext cx="10981940" cy="1729384"/>
           </a:xfrm>
           <a:prstGeom prst="rect">
             <a:avLst/>
           </a:prstGeom>
         </p:spPr>
         <p:txBody>
-          <a:bodyPr lIns="0" tIns="0" rIns="0" bIns="0" rtlCol="0" anchor="t">
+          <a:bodyPr wrap="square" lIns="0" tIns="0" rIns="0" bIns="0" rtlCol="0" anchor="t">
             <a:spAutoFit/>
           </a:bodyPr>
           <a:lstStyle/>
@@ -14790,167 +15829,1559 @@
           </a:p>
         </p:txBody>
       </p:sp>
+      <p:pic>
+        <p:nvPicPr>
+          <p:cNvPr id="25" name="Imagem 24" descr="Texto&#10;&#10;O conteúdo gerado por IA pode estar incorreto.">
+            <a:extLst>
+              <a:ext uri="{FF2B5EF4-FFF2-40B4-BE49-F238E27FC236}">
+                <a16:creationId xmlns:a16="http://schemas.microsoft.com/office/drawing/2014/main" id="{ED52008A-5B45-6608-4818-6028EF9BE75B}"/>
+              </a:ext>
+            </a:extLst>
+          </p:cNvPr>
+          <p:cNvPicPr>
+            <a:picLocks noChangeAspect="1"/>
+          </p:cNvPicPr>
+          <p:nvPr/>
+        </p:nvPicPr>
+        <p:blipFill>
+          <a:blip r:embed="rId3"/>
+          <a:srcRect t="2564" r="14541" b="-427"/>
+          <a:stretch>
+            <a:fillRect/>
+          </a:stretch>
+        </p:blipFill>
+        <p:spPr>
+          <a:xfrm>
+            <a:off x="-10424" y="2049132"/>
+            <a:ext cx="8841469" cy="4117952"/>
+          </a:xfrm>
+          <a:prstGeom prst="rect">
+            <a:avLst/>
+          </a:prstGeom>
+        </p:spPr>
+      </p:pic>
+      <p:pic>
+        <p:nvPicPr>
+          <p:cNvPr id="26" name="Imagem 25" descr="Tela de computador com texto preto sobre fundo branco&#10;&#10;O conteúdo gerado por IA pode estar incorreto.">
+            <a:extLst>
+              <a:ext uri="{FF2B5EF4-FFF2-40B4-BE49-F238E27FC236}">
+                <a16:creationId xmlns:a16="http://schemas.microsoft.com/office/drawing/2014/main" id="{FF79C4CF-0E71-1D10-509D-99E11BBD445D}"/>
+              </a:ext>
+            </a:extLst>
+          </p:cNvPr>
+          <p:cNvPicPr>
+            <a:picLocks noChangeAspect="1"/>
+          </p:cNvPicPr>
+          <p:nvPr/>
+        </p:nvPicPr>
+        <p:blipFill>
+          <a:blip r:embed="rId4"/>
+          <a:srcRect l="3648" t="5968" r="35700" b="6228"/>
+          <a:stretch>
+            <a:fillRect/>
+          </a:stretch>
+        </p:blipFill>
+        <p:spPr>
+          <a:xfrm>
+            <a:off x="7368" y="5805394"/>
+            <a:ext cx="8797191" cy="4482059"/>
+          </a:xfrm>
+          <a:prstGeom prst="rect">
+            <a:avLst/>
+          </a:prstGeom>
+        </p:spPr>
+      </p:pic>
       <p:sp>
         <p:nvSpPr>
-          <p:cNvPr id="21" name="TextBox 21"/>
+          <p:cNvPr id="28" name="TextBox 34">
+            <a:extLst>
+              <a:ext uri="{FF2B5EF4-FFF2-40B4-BE49-F238E27FC236}">
+                <a16:creationId xmlns:a16="http://schemas.microsoft.com/office/drawing/2014/main" id="{268EDCBC-A399-997B-646F-C9A9539BB0D4}"/>
+              </a:ext>
+            </a:extLst>
+          </p:cNvPr>
           <p:cNvSpPr txBox="1"/>
           <p:nvPr/>
         </p:nvSpPr>
         <p:spPr>
           <a:xfrm>
-            <a:off x="1387392" y="7566555"/>
-            <a:ext cx="4814054" cy="1591971"/>
+            <a:off x="9177150" y="2039178"/>
+            <a:ext cx="8682389" cy="2808398"/>
           </a:xfrm>
           <a:prstGeom prst="rect">
             <a:avLst/>
           </a:prstGeom>
         </p:spPr>
         <p:txBody>
-          <a:bodyPr lIns="0" tIns="0" rIns="0" bIns="0" rtlCol="0" anchor="t">
+          <a:bodyPr wrap="square" lIns="0" tIns="0" rIns="0" bIns="0" rtlCol="0" anchor="t">
             <a:spAutoFit/>
           </a:bodyPr>
           <a:lstStyle/>
           <a:p>
-            <a:pPr algn="l">
+            <a:pPr algn="just">
               <a:lnSpc>
-                <a:spcPts val="4299"/>
+                <a:spcPts val="3715"/>
               </a:lnSpc>
             </a:pPr>
             <a:r>
-              <a:rPr lang="en-US" sz="2654" b="1" spc="53">
-                <a:solidFill>
-                  <a:srgbClr val="113D57"/>
-                </a:solidFill>
-                <a:latin typeface="Montserrat Medium"/>
-                <a:ea typeface="Montserrat Medium"/>
-                <a:cs typeface="Montserrat Medium"/>
-                <a:sym typeface="Montserrat Medium"/>
-              </a:rPr>
-              <a:t>Descreva os métodos e técnicas utilizados para conduzir a pesquisa.</a:t>
-            </a:r>
+              <a:rPr lang="en-US" sz="2400" b="1" spc="53" dirty="0">
+                <a:solidFill>
+                  <a:srgbClr val="113D57"/>
+                </a:solidFill>
+                <a:latin typeface="Montserrat Medium"/>
+                <a:ea typeface="+mn-lt"/>
+                <a:cs typeface="+mn-lt"/>
+                <a:sym typeface="Montserrat Medium"/>
+              </a:rPr>
+              <a:t>O </a:t>
+            </a:r>
+            <a:r>
+              <a:rPr lang="en-US" sz="2400" b="1" spc="53" dirty="0" err="1">
+                <a:solidFill>
+                  <a:srgbClr val="113D57"/>
+                </a:solidFill>
+                <a:latin typeface="Montserrat Medium"/>
+                <a:ea typeface="+mn-lt"/>
+                <a:cs typeface="+mn-lt"/>
+                <a:sym typeface="Montserrat Medium"/>
+              </a:rPr>
+              <a:t>modelo</a:t>
+            </a:r>
+            <a:r>
+              <a:rPr lang="en-US" sz="2400" b="1" spc="53" dirty="0">
+                <a:solidFill>
+                  <a:srgbClr val="113D57"/>
+                </a:solidFill>
+                <a:latin typeface="Montserrat Medium"/>
+                <a:ea typeface="+mn-lt"/>
+                <a:cs typeface="+mn-lt"/>
+                <a:sym typeface="Montserrat Medium"/>
+              </a:rPr>
+              <a:t> de </a:t>
+            </a:r>
+            <a:r>
+              <a:rPr lang="en-US" sz="2400" b="1" spc="53" dirty="0" err="1">
+                <a:solidFill>
+                  <a:srgbClr val="113D57"/>
+                </a:solidFill>
+                <a:latin typeface="Montserrat Medium"/>
+                <a:ea typeface="+mn-lt"/>
+                <a:cs typeface="+mn-lt"/>
+                <a:sym typeface="Montserrat Medium"/>
+              </a:rPr>
+              <a:t>Programação</a:t>
+            </a:r>
+            <a:r>
+              <a:rPr lang="en-US" sz="2400" b="1" spc="53" dirty="0">
+                <a:solidFill>
+                  <a:srgbClr val="113D57"/>
+                </a:solidFill>
+                <a:latin typeface="Montserrat Medium"/>
+                <a:ea typeface="+mn-lt"/>
+                <a:cs typeface="+mn-lt"/>
+                <a:sym typeface="Montserrat Medium"/>
+              </a:rPr>
+              <a:t> Linear </a:t>
+            </a:r>
+            <a:r>
+              <a:rPr lang="en-US" sz="2400" b="1" spc="53" dirty="0" err="1">
+                <a:solidFill>
+                  <a:srgbClr val="113D57"/>
+                </a:solidFill>
+                <a:latin typeface="Montserrat Medium"/>
+                <a:ea typeface="+mn-lt"/>
+                <a:cs typeface="+mn-lt"/>
+                <a:sym typeface="Montserrat Medium"/>
+              </a:rPr>
+              <a:t>encontrou</a:t>
+            </a:r>
+            <a:r>
+              <a:rPr lang="en-US" sz="2400" b="1" spc="53" dirty="0">
+                <a:solidFill>
+                  <a:srgbClr val="113D57"/>
+                </a:solidFill>
+                <a:latin typeface="Montserrat Medium"/>
+                <a:ea typeface="+mn-lt"/>
+                <a:cs typeface="+mn-lt"/>
+                <a:sym typeface="Montserrat Medium"/>
+              </a:rPr>
+              <a:t> pesos </a:t>
+            </a:r>
+            <a:r>
+              <a:rPr lang="en-US" sz="2400" b="1" spc="53" dirty="0" err="1">
+                <a:solidFill>
+                  <a:srgbClr val="113D57"/>
+                </a:solidFill>
+                <a:latin typeface="Montserrat Medium"/>
+                <a:ea typeface="+mn-lt"/>
+                <a:cs typeface="+mn-lt"/>
+                <a:sym typeface="Montserrat Medium"/>
+              </a:rPr>
+              <a:t>calibrados</a:t>
+            </a:r>
+            <a:r>
+              <a:rPr lang="en-US" sz="2400" b="1" spc="53" dirty="0">
+                <a:solidFill>
+                  <a:srgbClr val="113D57"/>
+                </a:solidFill>
+                <a:latin typeface="Montserrat Medium"/>
+                <a:ea typeface="+mn-lt"/>
+                <a:cs typeface="+mn-lt"/>
+                <a:sym typeface="Montserrat Medium"/>
+              </a:rPr>
+              <a:t> </a:t>
+            </a:r>
+            <a:r>
+              <a:rPr lang="en-US" sz="2400" b="1" spc="53" dirty="0" err="1">
+                <a:solidFill>
+                  <a:srgbClr val="113D57"/>
+                </a:solidFill>
+                <a:latin typeface="Montserrat Medium"/>
+                <a:ea typeface="+mn-lt"/>
+                <a:cs typeface="+mn-lt"/>
+                <a:sym typeface="Montserrat Medium"/>
+              </a:rPr>
+              <a:t>capazes</a:t>
+            </a:r>
+            <a:r>
+              <a:rPr lang="en-US" sz="2400" b="1" spc="53" dirty="0">
+                <a:solidFill>
+                  <a:srgbClr val="113D57"/>
+                </a:solidFill>
+                <a:latin typeface="Montserrat Medium"/>
+                <a:ea typeface="+mn-lt"/>
+                <a:cs typeface="+mn-lt"/>
+                <a:sym typeface="Montserrat Medium"/>
+              </a:rPr>
+              <a:t> de </a:t>
+            </a:r>
+            <a:r>
+              <a:rPr lang="en-US" sz="2400" b="1" spc="53" dirty="0" err="1">
+                <a:solidFill>
+                  <a:srgbClr val="113D57"/>
+                </a:solidFill>
+                <a:latin typeface="Montserrat Medium"/>
+                <a:ea typeface="+mn-lt"/>
+                <a:cs typeface="+mn-lt"/>
+                <a:sym typeface="Montserrat Medium"/>
+              </a:rPr>
+              <a:t>reproduzir</a:t>
+            </a:r>
+            <a:r>
+              <a:rPr lang="en-US" sz="2400" b="1" spc="53" dirty="0">
+                <a:solidFill>
+                  <a:srgbClr val="113D57"/>
+                </a:solidFill>
+                <a:latin typeface="Montserrat Medium"/>
+                <a:ea typeface="+mn-lt"/>
+                <a:cs typeface="+mn-lt"/>
+                <a:sym typeface="Montserrat Medium"/>
+              </a:rPr>
+              <a:t> as </a:t>
+            </a:r>
+            <a:r>
+              <a:rPr lang="en-US" sz="2400" b="1" spc="53" dirty="0" err="1">
+                <a:solidFill>
+                  <a:srgbClr val="113D57"/>
+                </a:solidFill>
+                <a:latin typeface="Montserrat Medium"/>
+                <a:ea typeface="+mn-lt"/>
+                <a:cs typeface="+mn-lt"/>
+                <a:sym typeface="Montserrat Medium"/>
+              </a:rPr>
+              <a:t>distribuições</a:t>
+            </a:r>
+            <a:r>
+              <a:rPr lang="en-US" sz="2400" b="1" spc="53" dirty="0">
+                <a:solidFill>
+                  <a:srgbClr val="113D57"/>
+                </a:solidFill>
+                <a:latin typeface="Montserrat Medium"/>
+                <a:ea typeface="+mn-lt"/>
+                <a:cs typeface="+mn-lt"/>
+                <a:sym typeface="Montserrat Medium"/>
+              </a:rPr>
+              <a:t> </a:t>
+            </a:r>
+            <a:r>
+              <a:rPr lang="en-US" sz="2400" b="1" spc="53" dirty="0" err="1">
+                <a:solidFill>
+                  <a:srgbClr val="113D57"/>
+                </a:solidFill>
+                <a:latin typeface="Montserrat Medium"/>
+                <a:ea typeface="+mn-lt"/>
+                <a:cs typeface="+mn-lt"/>
+                <a:sym typeface="Montserrat Medium"/>
+              </a:rPr>
+              <a:t>populacionais</a:t>
+            </a:r>
+            <a:r>
+              <a:rPr lang="en-US" sz="2400" b="1" spc="53" dirty="0">
+                <a:solidFill>
+                  <a:srgbClr val="113D57"/>
+                </a:solidFill>
+                <a:latin typeface="Montserrat Medium"/>
+                <a:ea typeface="+mn-lt"/>
+                <a:cs typeface="+mn-lt"/>
+                <a:sym typeface="Montserrat Medium"/>
+              </a:rPr>
+              <a:t> de </a:t>
+            </a:r>
+            <a:r>
+              <a:rPr lang="en-US" sz="2400" b="1" spc="53" dirty="0" err="1">
+                <a:solidFill>
+                  <a:srgbClr val="113D57"/>
+                </a:solidFill>
+                <a:latin typeface="Montserrat Medium"/>
+                <a:ea typeface="+mn-lt"/>
+                <a:cs typeface="+mn-lt"/>
+                <a:sym typeface="Montserrat Medium"/>
+              </a:rPr>
+              <a:t>sexo</a:t>
+            </a:r>
+            <a:r>
+              <a:rPr lang="en-US" sz="2400" b="1" spc="53" dirty="0">
+                <a:solidFill>
+                  <a:srgbClr val="113D57"/>
+                </a:solidFill>
+                <a:latin typeface="Montserrat Medium"/>
+                <a:ea typeface="+mn-lt"/>
+                <a:cs typeface="+mn-lt"/>
+                <a:sym typeface="Montserrat Medium"/>
+              </a:rPr>
+              <a:t> e </a:t>
+            </a:r>
+            <a:r>
+              <a:rPr lang="en-US" sz="2400" b="1" spc="53" dirty="0" err="1">
+                <a:solidFill>
+                  <a:srgbClr val="113D57"/>
+                </a:solidFill>
+                <a:latin typeface="Montserrat Medium"/>
+                <a:ea typeface="+mn-lt"/>
+                <a:cs typeface="+mn-lt"/>
+                <a:sym typeface="Montserrat Medium"/>
+              </a:rPr>
+              <a:t>faixa</a:t>
+            </a:r>
+            <a:r>
+              <a:rPr lang="en-US" sz="2400" b="1" spc="53" dirty="0">
+                <a:solidFill>
+                  <a:srgbClr val="113D57"/>
+                </a:solidFill>
+                <a:latin typeface="Montserrat Medium"/>
+                <a:ea typeface="+mn-lt"/>
+                <a:cs typeface="+mn-lt"/>
+                <a:sym typeface="Montserrat Medium"/>
+              </a:rPr>
+              <a:t> </a:t>
+            </a:r>
+            <a:r>
+              <a:rPr lang="en-US" sz="2400" b="1" spc="53" dirty="0" err="1">
+                <a:solidFill>
+                  <a:srgbClr val="113D57"/>
+                </a:solidFill>
+                <a:latin typeface="Montserrat Medium"/>
+                <a:ea typeface="+mn-lt"/>
+                <a:cs typeface="+mn-lt"/>
+                <a:sym typeface="Montserrat Medium"/>
+              </a:rPr>
+              <a:t>etária</a:t>
+            </a:r>
+            <a:r>
+              <a:rPr lang="en-US" sz="2400" b="1" spc="53" dirty="0">
+                <a:solidFill>
+                  <a:srgbClr val="113D57"/>
+                </a:solidFill>
+                <a:latin typeface="Montserrat Medium"/>
+                <a:ea typeface="+mn-lt"/>
+                <a:cs typeface="+mn-lt"/>
+                <a:sym typeface="Montserrat Medium"/>
+              </a:rPr>
+              <a:t> </a:t>
+            </a:r>
+            <a:r>
+              <a:rPr lang="en-US" sz="2400" b="1" spc="53" dirty="0" err="1">
+                <a:solidFill>
+                  <a:srgbClr val="113D57"/>
+                </a:solidFill>
+                <a:latin typeface="Montserrat Medium"/>
+                <a:ea typeface="+mn-lt"/>
+                <a:cs typeface="+mn-lt"/>
+                <a:sym typeface="Montserrat Medium"/>
+              </a:rPr>
+              <a:t>previamente</a:t>
+            </a:r>
+            <a:r>
+              <a:rPr lang="en-US" sz="2400" b="1" spc="53" dirty="0">
+                <a:solidFill>
+                  <a:srgbClr val="113D57"/>
+                </a:solidFill>
+                <a:latin typeface="Montserrat Medium"/>
+                <a:ea typeface="+mn-lt"/>
+                <a:cs typeface="+mn-lt"/>
+                <a:sym typeface="Montserrat Medium"/>
+              </a:rPr>
+              <a:t> </a:t>
+            </a:r>
+            <a:r>
+              <a:rPr lang="en-US" sz="2400" b="1" spc="53" dirty="0" err="1">
+                <a:solidFill>
+                  <a:srgbClr val="113D57"/>
+                </a:solidFill>
+                <a:latin typeface="Montserrat Medium"/>
+                <a:ea typeface="+mn-lt"/>
+                <a:cs typeface="+mn-lt"/>
+                <a:sym typeface="Montserrat Medium"/>
+              </a:rPr>
+              <a:t>definidas</a:t>
+            </a:r>
+            <a:r>
+              <a:rPr lang="en-US" sz="2400" b="1" spc="53" dirty="0">
+                <a:solidFill>
+                  <a:srgbClr val="113D57"/>
+                </a:solidFill>
+                <a:latin typeface="Montserrat Medium"/>
+                <a:ea typeface="+mn-lt"/>
+                <a:cs typeface="+mn-lt"/>
+                <a:sym typeface="Montserrat Medium"/>
+              </a:rPr>
+              <a:t>. </a:t>
+            </a:r>
+            <a:r>
+              <a:rPr lang="en-US" sz="2400" b="1" spc="53" dirty="0" err="1">
+                <a:solidFill>
+                  <a:srgbClr val="113D57"/>
+                </a:solidFill>
+                <a:latin typeface="Montserrat Medium"/>
+                <a:ea typeface="+mn-lt"/>
+                <a:cs typeface="+mn-lt"/>
+                <a:sym typeface="Montserrat Medium"/>
+              </a:rPr>
+              <a:t>Após</a:t>
+            </a:r>
+            <a:r>
+              <a:rPr lang="en-US" sz="2400" b="1" spc="53" dirty="0">
+                <a:solidFill>
+                  <a:srgbClr val="113D57"/>
+                </a:solidFill>
+                <a:latin typeface="Montserrat Medium"/>
+                <a:ea typeface="+mn-lt"/>
+                <a:cs typeface="+mn-lt"/>
+                <a:sym typeface="Montserrat Medium"/>
+              </a:rPr>
+              <a:t> a </a:t>
+            </a:r>
+            <a:r>
+              <a:rPr lang="en-US" sz="2400" b="1" spc="53" dirty="0" err="1">
+                <a:solidFill>
+                  <a:srgbClr val="113D57"/>
+                </a:solidFill>
+                <a:latin typeface="Montserrat Medium"/>
+                <a:ea typeface="+mn-lt"/>
+                <a:cs typeface="+mn-lt"/>
+                <a:sym typeface="Montserrat Medium"/>
+              </a:rPr>
+              <a:t>calibração</a:t>
+            </a:r>
+            <a:r>
+              <a:rPr lang="en-US" sz="2400" b="1" spc="53" dirty="0">
+                <a:solidFill>
+                  <a:srgbClr val="113D57"/>
+                </a:solidFill>
+                <a:latin typeface="Montserrat Medium"/>
+                <a:ea typeface="+mn-lt"/>
+                <a:cs typeface="+mn-lt"/>
+                <a:sym typeface="Montserrat Medium"/>
+              </a:rPr>
+              <a:t>, as </a:t>
+            </a:r>
+            <a:r>
+              <a:rPr lang="en-US" sz="2400" b="1" spc="53" dirty="0" err="1">
+                <a:solidFill>
+                  <a:srgbClr val="113D57"/>
+                </a:solidFill>
+                <a:latin typeface="Montserrat Medium"/>
+                <a:ea typeface="+mn-lt"/>
+                <a:cs typeface="+mn-lt"/>
+                <a:sym typeface="Montserrat Medium"/>
+              </a:rPr>
+              <a:t>distribuições</a:t>
+            </a:r>
+            <a:r>
+              <a:rPr lang="en-US" sz="2400" b="1" spc="53" dirty="0">
+                <a:solidFill>
+                  <a:srgbClr val="113D57"/>
+                </a:solidFill>
+                <a:latin typeface="Montserrat Medium"/>
+                <a:ea typeface="+mn-lt"/>
+                <a:cs typeface="+mn-lt"/>
+                <a:sym typeface="Montserrat Medium"/>
+              </a:rPr>
+              <a:t> </a:t>
+            </a:r>
+            <a:r>
+              <a:rPr lang="en-US" sz="2400" b="1" spc="53" dirty="0" err="1">
+                <a:solidFill>
+                  <a:srgbClr val="113D57"/>
+                </a:solidFill>
+                <a:latin typeface="Montserrat Medium"/>
+                <a:ea typeface="+mn-lt"/>
+                <a:cs typeface="+mn-lt"/>
+                <a:sym typeface="Montserrat Medium"/>
+              </a:rPr>
+              <a:t>observadas</a:t>
+            </a:r>
+            <a:r>
+              <a:rPr lang="en-US" sz="2400" b="1" spc="53" dirty="0">
+                <a:solidFill>
+                  <a:srgbClr val="113D57"/>
+                </a:solidFill>
+                <a:latin typeface="Montserrat Medium"/>
+                <a:ea typeface="+mn-lt"/>
+                <a:cs typeface="+mn-lt"/>
+                <a:sym typeface="Montserrat Medium"/>
+              </a:rPr>
+              <a:t> </a:t>
+            </a:r>
+            <a:r>
+              <a:rPr lang="en-US" sz="2400" b="1" spc="53" dirty="0" err="1">
+                <a:solidFill>
+                  <a:srgbClr val="113D57"/>
+                </a:solidFill>
+                <a:latin typeface="Montserrat Medium"/>
+                <a:ea typeface="+mn-lt"/>
+                <a:cs typeface="+mn-lt"/>
+                <a:sym typeface="Montserrat Medium"/>
+              </a:rPr>
+              <a:t>passaram</a:t>
+            </a:r>
+            <a:r>
+              <a:rPr lang="en-US" sz="2400" b="1" spc="53" dirty="0">
+                <a:solidFill>
+                  <a:srgbClr val="113D57"/>
+                </a:solidFill>
+                <a:latin typeface="Montserrat Medium"/>
+                <a:ea typeface="+mn-lt"/>
+                <a:cs typeface="+mn-lt"/>
+                <a:sym typeface="Montserrat Medium"/>
+              </a:rPr>
+              <a:t> a </a:t>
+            </a:r>
+            <a:r>
+              <a:rPr lang="en-US" sz="2400" b="1" spc="53" dirty="0" err="1">
+                <a:solidFill>
+                  <a:srgbClr val="113D57"/>
+                </a:solidFill>
+                <a:latin typeface="Montserrat Medium"/>
+                <a:ea typeface="+mn-lt"/>
+                <a:cs typeface="+mn-lt"/>
+                <a:sym typeface="Montserrat Medium"/>
+              </a:rPr>
+              <a:t>coincidir</a:t>
+            </a:r>
+            <a:r>
+              <a:rPr lang="en-US" sz="2400" b="1" spc="53" dirty="0">
+                <a:solidFill>
+                  <a:srgbClr val="113D57"/>
+                </a:solidFill>
+                <a:latin typeface="Montserrat Medium"/>
+                <a:ea typeface="+mn-lt"/>
+                <a:cs typeface="+mn-lt"/>
+                <a:sym typeface="Montserrat Medium"/>
+              </a:rPr>
+              <a:t> com as </a:t>
+            </a:r>
+            <a:r>
+              <a:rPr lang="en-US" sz="2400" b="1" spc="53" dirty="0" err="1">
+                <a:solidFill>
+                  <a:srgbClr val="113D57"/>
+                </a:solidFill>
+                <a:latin typeface="Montserrat Medium"/>
+                <a:ea typeface="+mn-lt"/>
+                <a:cs typeface="+mn-lt"/>
+                <a:sym typeface="Montserrat Medium"/>
+              </a:rPr>
+              <a:t>proporções</a:t>
+            </a:r>
+            <a:r>
+              <a:rPr lang="en-US" sz="2400" b="1" spc="53" dirty="0">
+                <a:solidFill>
+                  <a:srgbClr val="113D57"/>
+                </a:solidFill>
+                <a:latin typeface="Montserrat Medium"/>
+                <a:ea typeface="+mn-lt"/>
+                <a:cs typeface="+mn-lt"/>
+                <a:sym typeface="Montserrat Medium"/>
+              </a:rPr>
+              <a:t> da </a:t>
+            </a:r>
+            <a:r>
+              <a:rPr lang="en-US" sz="2400" b="1" spc="53" dirty="0" err="1">
+                <a:solidFill>
+                  <a:srgbClr val="113D57"/>
+                </a:solidFill>
+                <a:latin typeface="Montserrat Medium"/>
+                <a:ea typeface="+mn-lt"/>
+                <a:cs typeface="+mn-lt"/>
+                <a:sym typeface="Montserrat Medium"/>
+              </a:rPr>
+              <a:t>população-alvo</a:t>
+            </a:r>
+            <a:r>
+              <a:rPr lang="en-US" sz="2400" b="1" spc="53" dirty="0">
+                <a:solidFill>
+                  <a:srgbClr val="113D57"/>
+                </a:solidFill>
+                <a:latin typeface="Montserrat Medium"/>
+                <a:ea typeface="+mn-lt"/>
+                <a:cs typeface="+mn-lt"/>
+                <a:sym typeface="Montserrat Medium"/>
+              </a:rPr>
+              <a:t>.</a:t>
+            </a:r>
+            <a:endParaRPr lang="pt-BR" sz="2400">
+              <a:ea typeface="Calibri"/>
+              <a:cs typeface="Calibri"/>
+            </a:endParaRPr>
           </a:p>
         </p:txBody>
       </p:sp>
       <p:sp>
         <p:nvSpPr>
-          <p:cNvPr id="22" name="TextBox 22"/>
+          <p:cNvPr id="30" name="TextBox 34">
+            <a:extLst>
+              <a:ext uri="{FF2B5EF4-FFF2-40B4-BE49-F238E27FC236}">
+                <a16:creationId xmlns:a16="http://schemas.microsoft.com/office/drawing/2014/main" id="{D73CA480-7290-AC9B-C223-C128FF9A627F}"/>
+              </a:ext>
+            </a:extLst>
+          </p:cNvPr>
           <p:cNvSpPr txBox="1"/>
           <p:nvPr/>
         </p:nvSpPr>
         <p:spPr>
           <a:xfrm>
-            <a:off x="10999908" y="1927184"/>
-            <a:ext cx="2672545" cy="923181"/>
+            <a:off x="9177150" y="5144687"/>
+            <a:ext cx="8682389" cy="4835749"/>
           </a:xfrm>
           <a:prstGeom prst="rect">
             <a:avLst/>
           </a:prstGeom>
         </p:spPr>
         <p:txBody>
-          <a:bodyPr lIns="0" tIns="0" rIns="0" bIns="0" rtlCol="0" anchor="t">
+          <a:bodyPr wrap="square" lIns="0" tIns="0" rIns="0" bIns="0" rtlCol="0" anchor="t">
             <a:spAutoFit/>
           </a:bodyPr>
           <a:lstStyle/>
           <a:p>
-            <a:pPr algn="l">
+            <a:pPr algn="just">
               <a:lnSpc>
                 <a:spcPts val="3715"/>
               </a:lnSpc>
             </a:pPr>
             <a:r>
-              <a:rPr lang="en-US" sz="2654" b="1" spc="53">
-                <a:solidFill>
-                  <a:srgbClr val="113D57"/>
-                </a:solidFill>
-                <a:latin typeface="Montserrat Bold"/>
-                <a:ea typeface="Montserrat Bold"/>
-                <a:cs typeface="Montserrat Bold"/>
-                <a:sym typeface="Montserrat Bold"/>
-              </a:rPr>
-              <a:t>Desenho da pesquisa</a:t>
-            </a:r>
-          </a:p>
-        </p:txBody>
-      </p:sp>
-      <p:sp>
-        <p:nvSpPr>
-          <p:cNvPr id="23" name="TextBox 23"/>
-          <p:cNvSpPr txBox="1"/>
-          <p:nvPr/>
-        </p:nvSpPr>
-        <p:spPr>
-          <a:xfrm>
-            <a:off x="10999908" y="4634764"/>
-            <a:ext cx="2672545" cy="923181"/>
-          </a:xfrm>
-          <a:prstGeom prst="rect">
-            <a:avLst/>
-          </a:prstGeom>
-        </p:spPr>
-        <p:txBody>
-          <a:bodyPr lIns="0" tIns="0" rIns="0" bIns="0" rtlCol="0" anchor="t">
-            <a:spAutoFit/>
-          </a:bodyPr>
-          <a:lstStyle/>
-          <a:p>
-            <a:pPr algn="l">
-              <a:lnSpc>
-                <a:spcPts val="3715"/>
-              </a:lnSpc>
-            </a:pPr>
-            <a:r>
-              <a:rPr lang="en-US" sz="2654" b="1" spc="53">
-                <a:solidFill>
-                  <a:srgbClr val="113D57"/>
-                </a:solidFill>
-                <a:latin typeface="Montserrat Bold"/>
-                <a:ea typeface="Montserrat Bold"/>
-                <a:cs typeface="Montserrat Bold"/>
-                <a:sym typeface="Montserrat Bold"/>
-              </a:rPr>
-              <a:t>Coleta de dados</a:t>
-            </a:r>
-          </a:p>
-        </p:txBody>
-      </p:sp>
-      <p:sp>
-        <p:nvSpPr>
-          <p:cNvPr id="24" name="TextBox 24"/>
-          <p:cNvSpPr txBox="1"/>
-          <p:nvPr/>
-        </p:nvSpPr>
-        <p:spPr>
-          <a:xfrm>
-            <a:off x="10999908" y="7072420"/>
-            <a:ext cx="2672545" cy="923181"/>
-          </a:xfrm>
-          <a:prstGeom prst="rect">
-            <a:avLst/>
-          </a:prstGeom>
-        </p:spPr>
-        <p:txBody>
-          <a:bodyPr lIns="0" tIns="0" rIns="0" bIns="0" rtlCol="0" anchor="t">
-            <a:spAutoFit/>
-          </a:bodyPr>
-          <a:lstStyle/>
-          <a:p>
-            <a:pPr algn="l">
-              <a:lnSpc>
-                <a:spcPts val="3715"/>
-              </a:lnSpc>
-            </a:pPr>
-            <a:r>
-              <a:rPr lang="en-US" sz="2654" b="1" spc="53">
-                <a:solidFill>
-                  <a:srgbClr val="113D57"/>
-                </a:solidFill>
-                <a:latin typeface="Montserrat Bold"/>
-                <a:ea typeface="Montserrat Bold"/>
-                <a:cs typeface="Montserrat Bold"/>
-                <a:sym typeface="Montserrat Bold"/>
-              </a:rPr>
-              <a:t>Técnicas utilizadas</a:t>
-            </a:r>
+              <a:rPr lang="en-US" sz="2400" b="1" spc="53" dirty="0">
+                <a:solidFill>
+                  <a:srgbClr val="113D57"/>
+                </a:solidFill>
+                <a:latin typeface="Montserrat Medium"/>
+                <a:ea typeface="+mn-lt"/>
+                <a:cs typeface="+mn-lt"/>
+                <a:sym typeface="Montserrat Medium"/>
+              </a:rPr>
+              <a:t>O </a:t>
+            </a:r>
+            <a:r>
+              <a:rPr lang="en-US" sz="2400" b="1" spc="53" dirty="0" err="1">
+                <a:solidFill>
+                  <a:srgbClr val="113D57"/>
+                </a:solidFill>
+                <a:latin typeface="Montserrat Medium"/>
+                <a:ea typeface="+mn-lt"/>
+                <a:cs typeface="+mn-lt"/>
+                <a:sym typeface="Montserrat Medium"/>
+              </a:rPr>
+              <a:t>modelo</a:t>
+            </a:r>
+            <a:r>
+              <a:rPr lang="en-US" sz="2400" b="1" spc="53" dirty="0">
+                <a:solidFill>
+                  <a:srgbClr val="113D57"/>
+                </a:solidFill>
+                <a:latin typeface="Montserrat Medium"/>
+                <a:ea typeface="+mn-lt"/>
+                <a:cs typeface="+mn-lt"/>
+                <a:sym typeface="Montserrat Medium"/>
+              </a:rPr>
+              <a:t> de </a:t>
+            </a:r>
+            <a:r>
+              <a:rPr lang="en-US" sz="2400" b="1" spc="53" dirty="0" err="1">
+                <a:solidFill>
+                  <a:srgbClr val="113D57"/>
+                </a:solidFill>
+                <a:latin typeface="Montserrat Medium"/>
+                <a:ea typeface="+mn-lt"/>
+                <a:cs typeface="+mn-lt"/>
+                <a:sym typeface="Montserrat Medium"/>
+              </a:rPr>
+              <a:t>Programação</a:t>
+            </a:r>
+            <a:r>
+              <a:rPr lang="en-US" sz="2400" b="1" spc="53" dirty="0">
+                <a:solidFill>
+                  <a:srgbClr val="113D57"/>
+                </a:solidFill>
+                <a:latin typeface="Montserrat Medium"/>
+                <a:ea typeface="+mn-lt"/>
+                <a:cs typeface="+mn-lt"/>
+                <a:sym typeface="Montserrat Medium"/>
+              </a:rPr>
+              <a:t> Linear </a:t>
+            </a:r>
+            <a:r>
+              <a:rPr lang="en-US" sz="2400" b="1" spc="53" dirty="0" err="1">
+                <a:solidFill>
+                  <a:srgbClr val="113D57"/>
+                </a:solidFill>
+                <a:latin typeface="Montserrat Medium"/>
+                <a:ea typeface="+mn-lt"/>
+                <a:cs typeface="+mn-lt"/>
+                <a:sym typeface="Montserrat Medium"/>
+              </a:rPr>
+              <a:t>implementado</a:t>
+            </a:r>
+            <a:r>
+              <a:rPr lang="en-US" sz="2400" b="1" spc="53" dirty="0">
+                <a:solidFill>
+                  <a:srgbClr val="113D57"/>
+                </a:solidFill>
+                <a:latin typeface="Montserrat Medium"/>
+                <a:ea typeface="+mn-lt"/>
+                <a:cs typeface="+mn-lt"/>
+                <a:sym typeface="Montserrat Medium"/>
+              </a:rPr>
+              <a:t> com o </a:t>
+            </a:r>
+            <a:r>
+              <a:rPr lang="en-US" sz="2400" b="1" spc="53" dirty="0" err="1">
+                <a:solidFill>
+                  <a:srgbClr val="113D57"/>
+                </a:solidFill>
+                <a:latin typeface="Montserrat Medium"/>
+                <a:ea typeface="+mn-lt"/>
+                <a:cs typeface="+mn-lt"/>
+                <a:sym typeface="Montserrat Medium"/>
+              </a:rPr>
+              <a:t>pacote</a:t>
+            </a:r>
+            <a:r>
+              <a:rPr lang="en-US" sz="2400" b="1" spc="53" dirty="0">
+                <a:solidFill>
+                  <a:srgbClr val="113D57"/>
+                </a:solidFill>
+                <a:latin typeface="Montserrat Medium"/>
+                <a:ea typeface="+mn-lt"/>
+                <a:cs typeface="+mn-lt"/>
+                <a:sym typeface="Montserrat Medium"/>
+              </a:rPr>
+              <a:t> </a:t>
+            </a:r>
+            <a:r>
+              <a:rPr lang="en-US" sz="2400" b="1" spc="53" dirty="0" err="1">
+                <a:solidFill>
+                  <a:srgbClr val="113D57"/>
+                </a:solidFill>
+                <a:latin typeface="Montserrat Medium"/>
+                <a:ea typeface="+mn-lt"/>
+                <a:cs typeface="+mn-lt"/>
+                <a:sym typeface="Montserrat Medium"/>
+              </a:rPr>
+              <a:t>Rglpk</a:t>
+            </a:r>
+            <a:r>
+              <a:rPr lang="en-US" sz="2400" b="1" spc="53" dirty="0">
+                <a:solidFill>
+                  <a:srgbClr val="113D57"/>
+                </a:solidFill>
+                <a:latin typeface="Montserrat Medium"/>
+                <a:ea typeface="+mn-lt"/>
+                <a:cs typeface="+mn-lt"/>
+                <a:sym typeface="Montserrat Medium"/>
+              </a:rPr>
+              <a:t> </a:t>
+            </a:r>
+            <a:r>
+              <a:rPr lang="en-US" sz="2400" b="1" spc="53" dirty="0" err="1">
+                <a:solidFill>
+                  <a:srgbClr val="113D57"/>
+                </a:solidFill>
+                <a:latin typeface="Montserrat Medium"/>
+                <a:ea typeface="+mn-lt"/>
+                <a:cs typeface="+mn-lt"/>
+                <a:sym typeface="Montserrat Medium"/>
+              </a:rPr>
+              <a:t>ajustou</a:t>
+            </a:r>
+            <a:r>
+              <a:rPr lang="en-US" sz="2400" b="1" spc="53" dirty="0">
+                <a:solidFill>
+                  <a:srgbClr val="113D57"/>
+                </a:solidFill>
+                <a:latin typeface="Montserrat Medium"/>
+                <a:ea typeface="+mn-lt"/>
+                <a:cs typeface="+mn-lt"/>
+                <a:sym typeface="Montserrat Medium"/>
+              </a:rPr>
+              <a:t> </a:t>
+            </a:r>
+            <a:r>
+              <a:rPr lang="en-US" sz="2400" b="1" spc="53" dirty="0" err="1">
+                <a:solidFill>
+                  <a:srgbClr val="113D57"/>
+                </a:solidFill>
+                <a:latin typeface="Montserrat Medium"/>
+                <a:ea typeface="+mn-lt"/>
+                <a:cs typeface="+mn-lt"/>
+                <a:sym typeface="Montserrat Medium"/>
+              </a:rPr>
+              <a:t>os</a:t>
+            </a:r>
+            <a:r>
+              <a:rPr lang="en-US" sz="2400" b="1" spc="53" dirty="0">
+                <a:solidFill>
+                  <a:srgbClr val="113D57"/>
+                </a:solidFill>
+                <a:latin typeface="Montserrat Medium"/>
+                <a:ea typeface="+mn-lt"/>
+                <a:cs typeface="+mn-lt"/>
+                <a:sym typeface="Montserrat Medium"/>
+              </a:rPr>
+              <a:t> pesos de </a:t>
+            </a:r>
+            <a:r>
+              <a:rPr lang="en-US" sz="2400" b="1" spc="53" dirty="0" err="1">
+                <a:solidFill>
+                  <a:srgbClr val="113D57"/>
+                </a:solidFill>
+                <a:latin typeface="Montserrat Medium"/>
+                <a:ea typeface="+mn-lt"/>
+                <a:cs typeface="+mn-lt"/>
+                <a:sym typeface="Montserrat Medium"/>
+              </a:rPr>
+              <a:t>uma</a:t>
+            </a:r>
+            <a:r>
+              <a:rPr lang="en-US" sz="2400" b="1" spc="53" dirty="0">
+                <a:solidFill>
+                  <a:srgbClr val="113D57"/>
+                </a:solidFill>
+                <a:latin typeface="Montserrat Medium"/>
+                <a:ea typeface="+mn-lt"/>
+                <a:cs typeface="+mn-lt"/>
+                <a:sym typeface="Montserrat Medium"/>
+              </a:rPr>
+              <a:t> </a:t>
+            </a:r>
+            <a:r>
+              <a:rPr lang="en-US" sz="2400" b="1" spc="53" dirty="0" err="1">
+                <a:solidFill>
+                  <a:srgbClr val="113D57"/>
+                </a:solidFill>
+                <a:latin typeface="Montserrat Medium"/>
+                <a:ea typeface="+mn-lt"/>
+                <a:cs typeface="+mn-lt"/>
+                <a:sym typeface="Montserrat Medium"/>
+              </a:rPr>
+              <a:t>amostra</a:t>
+            </a:r>
+            <a:r>
+              <a:rPr lang="en-US" sz="2400" b="1" spc="53" dirty="0">
+                <a:solidFill>
+                  <a:srgbClr val="113D57"/>
+                </a:solidFill>
+                <a:latin typeface="Montserrat Medium"/>
+                <a:ea typeface="+mn-lt"/>
+                <a:cs typeface="+mn-lt"/>
+                <a:sym typeface="Montserrat Medium"/>
+              </a:rPr>
+              <a:t> </a:t>
+            </a:r>
+            <a:r>
+              <a:rPr lang="en-US" sz="2400" b="1" spc="53" dirty="0" err="1">
+                <a:solidFill>
+                  <a:srgbClr val="113D57"/>
+                </a:solidFill>
+                <a:latin typeface="Montserrat Medium"/>
+                <a:ea typeface="+mn-lt"/>
+                <a:cs typeface="+mn-lt"/>
+                <a:sym typeface="Montserrat Medium"/>
+              </a:rPr>
+              <a:t>fictícia</a:t>
+            </a:r>
+            <a:r>
+              <a:rPr lang="en-US" sz="2400" b="1" spc="53" dirty="0">
+                <a:solidFill>
+                  <a:srgbClr val="113D57"/>
+                </a:solidFill>
+                <a:latin typeface="Montserrat Medium"/>
+                <a:ea typeface="+mn-lt"/>
+                <a:cs typeface="+mn-lt"/>
+                <a:sym typeface="Montserrat Medium"/>
+              </a:rPr>
+              <a:t> </a:t>
+            </a:r>
+            <a:r>
+              <a:rPr lang="en-US" sz="2400" b="1" spc="53" dirty="0" err="1">
+                <a:solidFill>
+                  <a:srgbClr val="113D57"/>
+                </a:solidFill>
+                <a:latin typeface="Montserrat Medium"/>
+                <a:ea typeface="+mn-lt"/>
+                <a:cs typeface="+mn-lt"/>
+                <a:sym typeface="Montserrat Medium"/>
+              </a:rPr>
+              <a:t>inicialmente</a:t>
+            </a:r>
+            <a:r>
+              <a:rPr lang="en-US" sz="2400" b="1" spc="53" dirty="0">
+                <a:solidFill>
+                  <a:srgbClr val="113D57"/>
+                </a:solidFill>
+                <a:latin typeface="Montserrat Medium"/>
+                <a:ea typeface="+mn-lt"/>
+                <a:cs typeface="+mn-lt"/>
+                <a:sym typeface="Montserrat Medium"/>
+              </a:rPr>
+              <a:t> </a:t>
+            </a:r>
+            <a:r>
+              <a:rPr lang="en-US" sz="2400" b="1" spc="53" dirty="0" err="1">
+                <a:solidFill>
+                  <a:srgbClr val="113D57"/>
+                </a:solidFill>
+                <a:latin typeface="Montserrat Medium"/>
+                <a:ea typeface="+mn-lt"/>
+                <a:cs typeface="+mn-lt"/>
+                <a:sym typeface="Montserrat Medium"/>
+              </a:rPr>
+              <a:t>desbalanceada</a:t>
+            </a:r>
+            <a:r>
+              <a:rPr lang="en-US" sz="2400" b="1" spc="53" dirty="0">
+                <a:solidFill>
+                  <a:srgbClr val="113D57"/>
+                </a:solidFill>
+                <a:latin typeface="Montserrat Medium"/>
+                <a:ea typeface="+mn-lt"/>
+                <a:cs typeface="+mn-lt"/>
+                <a:sym typeface="Montserrat Medium"/>
+              </a:rPr>
+              <a:t> (62% </a:t>
+            </a:r>
+            <a:r>
+              <a:rPr lang="en-US" sz="2400" b="1" spc="53" dirty="0" err="1">
+                <a:solidFill>
+                  <a:srgbClr val="113D57"/>
+                </a:solidFill>
+                <a:latin typeface="Montserrat Medium"/>
+                <a:ea typeface="+mn-lt"/>
+                <a:cs typeface="+mn-lt"/>
+                <a:sym typeface="Montserrat Medium"/>
+              </a:rPr>
+              <a:t>mulheres</a:t>
+            </a:r>
+            <a:r>
+              <a:rPr lang="en-US" sz="2400" b="1" spc="53" dirty="0">
+                <a:solidFill>
+                  <a:srgbClr val="113D57"/>
+                </a:solidFill>
+                <a:latin typeface="Montserrat Medium"/>
+                <a:ea typeface="+mn-lt"/>
+                <a:cs typeface="+mn-lt"/>
+                <a:sym typeface="Montserrat Medium"/>
+              </a:rPr>
+              <a:t>, 38% </a:t>
+            </a:r>
+            <a:r>
+              <a:rPr lang="en-US" sz="2400" b="1" spc="53" dirty="0" err="1">
+                <a:solidFill>
+                  <a:srgbClr val="113D57"/>
+                </a:solidFill>
+                <a:latin typeface="Montserrat Medium"/>
+                <a:ea typeface="+mn-lt"/>
+                <a:cs typeface="+mn-lt"/>
+                <a:sym typeface="Montserrat Medium"/>
+              </a:rPr>
+              <a:t>homens</a:t>
+            </a:r>
+            <a:r>
+              <a:rPr lang="en-US" sz="2400" b="1" spc="53" dirty="0">
+                <a:solidFill>
+                  <a:srgbClr val="113D57"/>
+                </a:solidFill>
+                <a:latin typeface="Montserrat Medium"/>
+                <a:ea typeface="+mn-lt"/>
+                <a:cs typeface="+mn-lt"/>
+                <a:sym typeface="Montserrat Medium"/>
+              </a:rPr>
+              <a:t>, 58% de 18–34 </a:t>
+            </a:r>
+            <a:r>
+              <a:rPr lang="en-US" sz="2400" b="1" spc="53" dirty="0" err="1">
+                <a:solidFill>
+                  <a:srgbClr val="113D57"/>
+                </a:solidFill>
+                <a:latin typeface="Montserrat Medium"/>
+                <a:ea typeface="+mn-lt"/>
+                <a:cs typeface="+mn-lt"/>
+                <a:sym typeface="Montserrat Medium"/>
+              </a:rPr>
+              <a:t>anos</a:t>
+            </a:r>
+            <a:r>
+              <a:rPr lang="en-US" sz="2400" b="1" spc="53" dirty="0">
+                <a:solidFill>
+                  <a:srgbClr val="113D57"/>
+                </a:solidFill>
+                <a:latin typeface="Montserrat Medium"/>
+                <a:ea typeface="+mn-lt"/>
+                <a:cs typeface="+mn-lt"/>
+                <a:sym typeface="Montserrat Medium"/>
+              </a:rPr>
+              <a:t> e 42% de 35+ </a:t>
+            </a:r>
+            <a:r>
+              <a:rPr lang="en-US" sz="2400" b="1" spc="53" dirty="0" err="1">
+                <a:solidFill>
+                  <a:srgbClr val="113D57"/>
+                </a:solidFill>
+                <a:latin typeface="Montserrat Medium"/>
+                <a:ea typeface="+mn-lt"/>
+                <a:cs typeface="+mn-lt"/>
+                <a:sym typeface="Montserrat Medium"/>
+              </a:rPr>
+              <a:t>anos</a:t>
+            </a:r>
+            <a:r>
+              <a:rPr lang="en-US" sz="2400" b="1" spc="53" dirty="0">
+                <a:solidFill>
+                  <a:srgbClr val="113D57"/>
+                </a:solidFill>
+                <a:latin typeface="Montserrat Medium"/>
+                <a:ea typeface="+mn-lt"/>
+                <a:cs typeface="+mn-lt"/>
+                <a:sym typeface="Montserrat Medium"/>
+              </a:rPr>
+              <a:t>) para </a:t>
+            </a:r>
+            <a:r>
+              <a:rPr lang="en-US" sz="2400" b="1" spc="53" dirty="0" err="1">
+                <a:solidFill>
+                  <a:srgbClr val="113D57"/>
+                </a:solidFill>
+                <a:latin typeface="Montserrat Medium"/>
+                <a:ea typeface="+mn-lt"/>
+                <a:cs typeface="+mn-lt"/>
+                <a:sym typeface="Montserrat Medium"/>
+              </a:rPr>
+              <a:t>que</a:t>
+            </a:r>
+            <a:r>
+              <a:rPr lang="en-US" sz="2400" b="1" spc="53" dirty="0">
+                <a:solidFill>
+                  <a:srgbClr val="113D57"/>
+                </a:solidFill>
+                <a:latin typeface="Montserrat Medium"/>
+                <a:ea typeface="+mn-lt"/>
+                <a:cs typeface="+mn-lt"/>
+                <a:sym typeface="Montserrat Medium"/>
+              </a:rPr>
+              <a:t> </a:t>
+            </a:r>
+            <a:r>
+              <a:rPr lang="en-US" sz="2400" b="1" spc="53" dirty="0" err="1">
+                <a:solidFill>
+                  <a:srgbClr val="113D57"/>
+                </a:solidFill>
+                <a:latin typeface="Montserrat Medium"/>
+                <a:ea typeface="+mn-lt"/>
+                <a:cs typeface="+mn-lt"/>
+                <a:sym typeface="Montserrat Medium"/>
+              </a:rPr>
+              <a:t>ela</a:t>
+            </a:r>
+            <a:r>
+              <a:rPr lang="en-US" sz="2400" b="1" spc="53" dirty="0">
+                <a:solidFill>
+                  <a:srgbClr val="113D57"/>
+                </a:solidFill>
+                <a:latin typeface="Montserrat Medium"/>
+                <a:ea typeface="+mn-lt"/>
+                <a:cs typeface="+mn-lt"/>
+                <a:sym typeface="Montserrat Medium"/>
+              </a:rPr>
+              <a:t> </a:t>
+            </a:r>
+            <a:r>
+              <a:rPr lang="en-US" sz="2400" b="1" spc="53" dirty="0" err="1">
+                <a:solidFill>
+                  <a:srgbClr val="113D57"/>
+                </a:solidFill>
+                <a:latin typeface="Montserrat Medium"/>
+                <a:ea typeface="+mn-lt"/>
+                <a:cs typeface="+mn-lt"/>
+                <a:sym typeface="Montserrat Medium"/>
+              </a:rPr>
+              <a:t>reproduzisse</a:t>
+            </a:r>
+            <a:r>
+              <a:rPr lang="en-US" sz="2400" b="1" spc="53" dirty="0">
+                <a:solidFill>
+                  <a:srgbClr val="113D57"/>
+                </a:solidFill>
+                <a:latin typeface="Montserrat Medium"/>
+                <a:ea typeface="+mn-lt"/>
+                <a:cs typeface="+mn-lt"/>
+                <a:sym typeface="Montserrat Medium"/>
+              </a:rPr>
+              <a:t> as </a:t>
+            </a:r>
+            <a:r>
+              <a:rPr lang="en-US" sz="2400" b="1" spc="53" dirty="0" err="1">
+                <a:solidFill>
+                  <a:srgbClr val="113D57"/>
+                </a:solidFill>
+                <a:latin typeface="Montserrat Medium"/>
+                <a:ea typeface="+mn-lt"/>
+                <a:cs typeface="+mn-lt"/>
+                <a:sym typeface="Montserrat Medium"/>
+              </a:rPr>
+              <a:t>proporções</a:t>
+            </a:r>
+            <a:r>
+              <a:rPr lang="en-US" sz="2400" b="1" spc="53" dirty="0">
+                <a:solidFill>
+                  <a:srgbClr val="113D57"/>
+                </a:solidFill>
+                <a:latin typeface="Montserrat Medium"/>
+                <a:ea typeface="+mn-lt"/>
+                <a:cs typeface="+mn-lt"/>
+                <a:sym typeface="Montserrat Medium"/>
+              </a:rPr>
+              <a:t> da </a:t>
+            </a:r>
+            <a:r>
+              <a:rPr lang="en-US" sz="2400" b="1" spc="53" dirty="0" err="1">
+                <a:solidFill>
+                  <a:srgbClr val="113D57"/>
+                </a:solidFill>
+                <a:latin typeface="Montserrat Medium"/>
+                <a:ea typeface="+mn-lt"/>
+                <a:cs typeface="+mn-lt"/>
+                <a:sym typeface="Montserrat Medium"/>
+              </a:rPr>
+              <a:t>população</a:t>
+            </a:r>
+            <a:r>
+              <a:rPr lang="en-US" sz="2400" b="1" spc="53" dirty="0">
+                <a:solidFill>
+                  <a:srgbClr val="113D57"/>
+                </a:solidFill>
+                <a:latin typeface="Montserrat Medium"/>
+                <a:ea typeface="+mn-lt"/>
+                <a:cs typeface="+mn-lt"/>
+                <a:sym typeface="Montserrat Medium"/>
+              </a:rPr>
+              <a:t> de </a:t>
+            </a:r>
+            <a:r>
+              <a:rPr lang="en-US" sz="2400" b="1" spc="53" dirty="0" err="1">
+                <a:solidFill>
+                  <a:srgbClr val="113D57"/>
+                </a:solidFill>
+                <a:latin typeface="Montserrat Medium"/>
+                <a:ea typeface="+mn-lt"/>
+                <a:cs typeface="+mn-lt"/>
+                <a:sym typeface="Montserrat Medium"/>
+              </a:rPr>
+              <a:t>referência</a:t>
+            </a:r>
+            <a:r>
+              <a:rPr lang="en-US" sz="2400" b="1" spc="53" dirty="0">
+                <a:solidFill>
+                  <a:srgbClr val="113D57"/>
+                </a:solidFill>
+                <a:latin typeface="Montserrat Medium"/>
+                <a:ea typeface="+mn-lt"/>
+                <a:cs typeface="+mn-lt"/>
+                <a:sym typeface="Montserrat Medium"/>
+              </a:rPr>
+              <a:t> (52% </a:t>
+            </a:r>
+            <a:r>
+              <a:rPr lang="en-US" sz="2400" b="1" spc="53" dirty="0" err="1">
+                <a:solidFill>
+                  <a:srgbClr val="113D57"/>
+                </a:solidFill>
+                <a:latin typeface="Montserrat Medium"/>
+                <a:ea typeface="+mn-lt"/>
+                <a:cs typeface="+mn-lt"/>
+                <a:sym typeface="Montserrat Medium"/>
+              </a:rPr>
+              <a:t>mulheres</a:t>
+            </a:r>
+            <a:r>
+              <a:rPr lang="en-US" sz="2400" b="1" spc="53" dirty="0">
+                <a:solidFill>
+                  <a:srgbClr val="113D57"/>
+                </a:solidFill>
+                <a:latin typeface="Montserrat Medium"/>
+                <a:ea typeface="+mn-lt"/>
+                <a:cs typeface="+mn-lt"/>
+                <a:sym typeface="Montserrat Medium"/>
+              </a:rPr>
+              <a:t>, 48% </a:t>
+            </a:r>
+            <a:r>
+              <a:rPr lang="en-US" sz="2400" b="1" spc="53" dirty="0" err="1">
+                <a:solidFill>
+                  <a:srgbClr val="113D57"/>
+                </a:solidFill>
+                <a:latin typeface="Montserrat Medium"/>
+                <a:ea typeface="+mn-lt"/>
+                <a:cs typeface="+mn-lt"/>
+                <a:sym typeface="Montserrat Medium"/>
+              </a:rPr>
+              <a:t>homens</a:t>
+            </a:r>
+            <a:r>
+              <a:rPr lang="en-US" sz="2400" b="1" spc="53" dirty="0">
+                <a:solidFill>
+                  <a:srgbClr val="113D57"/>
+                </a:solidFill>
+                <a:latin typeface="Montserrat Medium"/>
+                <a:ea typeface="+mn-lt"/>
+                <a:cs typeface="+mn-lt"/>
+                <a:sym typeface="Montserrat Medium"/>
+              </a:rPr>
+              <a:t>, 40% de 18–34 </a:t>
+            </a:r>
+            <a:r>
+              <a:rPr lang="en-US" sz="2400" b="1" spc="53" dirty="0" err="1">
+                <a:solidFill>
+                  <a:srgbClr val="113D57"/>
+                </a:solidFill>
+                <a:latin typeface="Montserrat Medium"/>
+                <a:ea typeface="+mn-lt"/>
+                <a:cs typeface="+mn-lt"/>
+                <a:sym typeface="Montserrat Medium"/>
+              </a:rPr>
+              <a:t>anos</a:t>
+            </a:r>
+            <a:r>
+              <a:rPr lang="en-US" sz="2400" b="1" spc="53" dirty="0">
+                <a:solidFill>
+                  <a:srgbClr val="113D57"/>
+                </a:solidFill>
+                <a:latin typeface="Montserrat Medium"/>
+                <a:ea typeface="+mn-lt"/>
+                <a:cs typeface="+mn-lt"/>
+                <a:sym typeface="Montserrat Medium"/>
+              </a:rPr>
+              <a:t> e 60% de 35+ </a:t>
+            </a:r>
+            <a:r>
+              <a:rPr lang="en-US" sz="2400" b="1" spc="53" dirty="0" err="1">
+                <a:solidFill>
+                  <a:srgbClr val="113D57"/>
+                </a:solidFill>
+                <a:latin typeface="Montserrat Medium"/>
+                <a:ea typeface="+mn-lt"/>
+                <a:cs typeface="+mn-lt"/>
+                <a:sym typeface="Montserrat Medium"/>
+              </a:rPr>
+              <a:t>anos</a:t>
+            </a:r>
+            <a:r>
+              <a:rPr lang="en-US" sz="2400" b="1" spc="53" dirty="0">
+                <a:solidFill>
+                  <a:srgbClr val="113D57"/>
+                </a:solidFill>
+                <a:latin typeface="Montserrat Medium"/>
+                <a:ea typeface="+mn-lt"/>
+                <a:cs typeface="+mn-lt"/>
+                <a:sym typeface="Montserrat Medium"/>
+              </a:rPr>
+              <a:t>). Assim, o </a:t>
+            </a:r>
+            <a:r>
+              <a:rPr lang="en-US" sz="2400" b="1" spc="53" dirty="0" err="1">
+                <a:solidFill>
+                  <a:srgbClr val="113D57"/>
+                </a:solidFill>
+                <a:latin typeface="Montserrat Medium"/>
+                <a:ea typeface="+mn-lt"/>
+                <a:cs typeface="+mn-lt"/>
+                <a:sym typeface="Montserrat Medium"/>
+              </a:rPr>
+              <a:t>objetivo</a:t>
+            </a:r>
+            <a:r>
+              <a:rPr lang="en-US" sz="2400" b="1" spc="53" dirty="0">
+                <a:solidFill>
+                  <a:srgbClr val="113D57"/>
+                </a:solidFill>
+                <a:latin typeface="Montserrat Medium"/>
+                <a:ea typeface="+mn-lt"/>
+                <a:cs typeface="+mn-lt"/>
+                <a:sym typeface="Montserrat Medium"/>
+              </a:rPr>
+              <a:t> da </a:t>
+            </a:r>
+            <a:r>
+              <a:rPr lang="en-US" sz="2400" b="1" spc="53" dirty="0" err="1">
+                <a:solidFill>
+                  <a:srgbClr val="113D57"/>
+                </a:solidFill>
+                <a:latin typeface="Montserrat Medium"/>
+                <a:ea typeface="+mn-lt"/>
+                <a:cs typeface="+mn-lt"/>
+                <a:sym typeface="Montserrat Medium"/>
+              </a:rPr>
+              <a:t>calibração</a:t>
+            </a:r>
+            <a:r>
+              <a:rPr lang="en-US" sz="2400" b="1" spc="53" dirty="0">
+                <a:solidFill>
+                  <a:srgbClr val="113D57"/>
+                </a:solidFill>
+                <a:latin typeface="Montserrat Medium"/>
+                <a:ea typeface="+mn-lt"/>
+                <a:cs typeface="+mn-lt"/>
+                <a:sym typeface="Montserrat Medium"/>
+              </a:rPr>
+              <a:t> </a:t>
+            </a:r>
+            <a:r>
+              <a:rPr lang="en-US" sz="2400" b="1" spc="53" dirty="0" err="1">
+                <a:solidFill>
+                  <a:srgbClr val="113D57"/>
+                </a:solidFill>
+                <a:latin typeface="Montserrat Medium"/>
+                <a:ea typeface="+mn-lt"/>
+                <a:cs typeface="+mn-lt"/>
+                <a:sym typeface="Montserrat Medium"/>
+              </a:rPr>
+              <a:t>foi</a:t>
+            </a:r>
+            <a:r>
+              <a:rPr lang="en-US" sz="2400" b="1" spc="53" dirty="0">
+                <a:solidFill>
+                  <a:srgbClr val="113D57"/>
+                </a:solidFill>
+                <a:latin typeface="Montserrat Medium"/>
+                <a:ea typeface="+mn-lt"/>
+                <a:cs typeface="+mn-lt"/>
+                <a:sym typeface="Montserrat Medium"/>
+              </a:rPr>
+              <a:t> </a:t>
+            </a:r>
+            <a:r>
+              <a:rPr lang="en-US" sz="2400" b="1" spc="53" dirty="0" err="1">
+                <a:solidFill>
+                  <a:srgbClr val="113D57"/>
+                </a:solidFill>
+                <a:latin typeface="Montserrat Medium"/>
+                <a:ea typeface="+mn-lt"/>
+                <a:cs typeface="+mn-lt"/>
+                <a:sym typeface="Montserrat Medium"/>
+              </a:rPr>
+              <a:t>alcançado</a:t>
+            </a:r>
+            <a:r>
+              <a:rPr lang="en-US" sz="2400" b="1" spc="53" dirty="0">
+                <a:solidFill>
+                  <a:srgbClr val="113D57"/>
+                </a:solidFill>
+                <a:latin typeface="Montserrat Medium"/>
+                <a:ea typeface="+mn-lt"/>
+                <a:cs typeface="+mn-lt"/>
+                <a:sym typeface="Montserrat Medium"/>
+              </a:rPr>
+              <a:t>, </a:t>
+            </a:r>
+            <a:r>
+              <a:rPr lang="en-US" sz="2400" b="1" spc="53" dirty="0" err="1">
+                <a:solidFill>
+                  <a:srgbClr val="113D57"/>
+                </a:solidFill>
+                <a:latin typeface="Montserrat Medium"/>
+                <a:ea typeface="+mn-lt"/>
+                <a:cs typeface="+mn-lt"/>
+                <a:sym typeface="Montserrat Medium"/>
+              </a:rPr>
+              <a:t>demonstrando</a:t>
+            </a:r>
+            <a:r>
+              <a:rPr lang="en-US" sz="2400" b="1" spc="53" dirty="0">
+                <a:solidFill>
+                  <a:srgbClr val="113D57"/>
+                </a:solidFill>
+                <a:latin typeface="Montserrat Medium"/>
+                <a:ea typeface="+mn-lt"/>
+                <a:cs typeface="+mn-lt"/>
+                <a:sym typeface="Montserrat Medium"/>
+              </a:rPr>
+              <a:t> a </a:t>
+            </a:r>
+            <a:r>
+              <a:rPr lang="en-US" sz="2400" b="1" spc="53" dirty="0" err="1">
+                <a:solidFill>
+                  <a:srgbClr val="113D57"/>
+                </a:solidFill>
+                <a:latin typeface="Montserrat Medium"/>
+                <a:ea typeface="+mn-lt"/>
+                <a:cs typeface="+mn-lt"/>
+                <a:sym typeface="Montserrat Medium"/>
+              </a:rPr>
+              <a:t>aplicação</a:t>
+            </a:r>
+            <a:r>
+              <a:rPr lang="en-US" sz="2400" b="1" spc="53" dirty="0">
+                <a:solidFill>
+                  <a:srgbClr val="113D57"/>
+                </a:solidFill>
+                <a:latin typeface="Montserrat Medium"/>
+                <a:ea typeface="+mn-lt"/>
+                <a:cs typeface="+mn-lt"/>
+                <a:sym typeface="Montserrat Medium"/>
+              </a:rPr>
+              <a:t> </a:t>
+            </a:r>
+            <a:r>
+              <a:rPr lang="en-US" sz="2400" b="1" spc="53" dirty="0" err="1">
+                <a:solidFill>
+                  <a:srgbClr val="113D57"/>
+                </a:solidFill>
+                <a:latin typeface="Montserrat Medium"/>
+                <a:ea typeface="+mn-lt"/>
+                <a:cs typeface="+mn-lt"/>
+                <a:sym typeface="Montserrat Medium"/>
+              </a:rPr>
+              <a:t>prática</a:t>
+            </a:r>
+            <a:r>
+              <a:rPr lang="en-US" sz="2400" b="1" spc="53" dirty="0">
+                <a:solidFill>
+                  <a:srgbClr val="113D57"/>
+                </a:solidFill>
+                <a:latin typeface="Montserrat Medium"/>
+                <a:ea typeface="+mn-lt"/>
+                <a:cs typeface="+mn-lt"/>
+                <a:sym typeface="Montserrat Medium"/>
+              </a:rPr>
+              <a:t> da </a:t>
+            </a:r>
+            <a:r>
+              <a:rPr lang="en-US" sz="2400" b="1" spc="53" dirty="0" err="1">
+                <a:solidFill>
+                  <a:srgbClr val="113D57"/>
+                </a:solidFill>
+                <a:latin typeface="Montserrat Medium"/>
+                <a:ea typeface="+mn-lt"/>
+                <a:cs typeface="+mn-lt"/>
+                <a:sym typeface="Montserrat Medium"/>
+              </a:rPr>
+              <a:t>Programação</a:t>
+            </a:r>
+            <a:r>
+              <a:rPr lang="en-US" sz="2400" b="1" spc="53" dirty="0">
+                <a:solidFill>
+                  <a:srgbClr val="113D57"/>
+                </a:solidFill>
+                <a:latin typeface="Montserrat Medium"/>
+                <a:ea typeface="+mn-lt"/>
+                <a:cs typeface="+mn-lt"/>
+                <a:sym typeface="Montserrat Medium"/>
+              </a:rPr>
+              <a:t> Linear </a:t>
+            </a:r>
+            <a:r>
+              <a:rPr lang="en-US" sz="2400" b="1" spc="53" dirty="0" err="1">
+                <a:solidFill>
+                  <a:srgbClr val="113D57"/>
+                </a:solidFill>
+                <a:latin typeface="Montserrat Medium"/>
+                <a:ea typeface="+mn-lt"/>
+                <a:cs typeface="+mn-lt"/>
+                <a:sym typeface="Montserrat Medium"/>
+              </a:rPr>
+              <a:t>em</a:t>
+            </a:r>
+            <a:r>
+              <a:rPr lang="en-US" sz="2400" b="1" spc="53" dirty="0">
+                <a:solidFill>
+                  <a:srgbClr val="113D57"/>
+                </a:solidFill>
+                <a:latin typeface="Montserrat Medium"/>
+                <a:ea typeface="+mn-lt"/>
+                <a:cs typeface="+mn-lt"/>
+                <a:sym typeface="Montserrat Medium"/>
+              </a:rPr>
+              <a:t> </a:t>
+            </a:r>
+            <a:r>
+              <a:rPr lang="en-US" sz="2400" b="1" spc="53" dirty="0" err="1">
+                <a:solidFill>
+                  <a:srgbClr val="113D57"/>
+                </a:solidFill>
+                <a:latin typeface="Montserrat Medium"/>
+                <a:ea typeface="+mn-lt"/>
+                <a:cs typeface="+mn-lt"/>
+                <a:sym typeface="Montserrat Medium"/>
+              </a:rPr>
+              <a:t>pesquisas</a:t>
+            </a:r>
+            <a:r>
+              <a:rPr lang="en-US" sz="2400" b="1" spc="53" dirty="0">
+                <a:solidFill>
+                  <a:srgbClr val="113D57"/>
+                </a:solidFill>
+                <a:latin typeface="Montserrat Medium"/>
+                <a:ea typeface="+mn-lt"/>
+                <a:cs typeface="+mn-lt"/>
+                <a:sym typeface="Montserrat Medium"/>
+              </a:rPr>
+              <a:t> </a:t>
+            </a:r>
+            <a:r>
+              <a:rPr lang="en-US" sz="2400" b="1" spc="53" dirty="0" err="1">
+                <a:solidFill>
+                  <a:srgbClr val="113D57"/>
+                </a:solidFill>
+                <a:latin typeface="Montserrat Medium"/>
+                <a:ea typeface="+mn-lt"/>
+                <a:cs typeface="+mn-lt"/>
+                <a:sym typeface="Montserrat Medium"/>
+              </a:rPr>
+              <a:t>amostrais</a:t>
+            </a:r>
+            <a:r>
+              <a:rPr lang="en-US" sz="2400" b="1" spc="53" dirty="0">
+                <a:solidFill>
+                  <a:srgbClr val="113D57"/>
+                </a:solidFill>
+                <a:latin typeface="Montserrat Medium"/>
+                <a:ea typeface="+mn-lt"/>
+                <a:cs typeface="+mn-lt"/>
+                <a:sym typeface="Montserrat Medium"/>
+              </a:rPr>
+              <a:t>.</a:t>
+            </a:r>
+            <a:endParaRPr lang="pt-BR" sz="2400">
+              <a:ea typeface="Calibri"/>
+              <a:cs typeface="Calibri"/>
+            </a:endParaRPr>
           </a:p>
         </p:txBody>
       </p:sp>

--- a/Calibração de Pesos em Surveys Amostrais.pptx
+++ b/Calibração de Pesos em Surveys Amostrais.pptx
@@ -19,12 +19,12 @@
   <p:notesSz cx="6858000" cy="9144000"/>
   <p:embeddedFontLst>
     <p:embeddedFont>
-      <p:font typeface="Montserrat Bold" panose="00000800000000000000" pitchFamily="2" charset="0"/>
+      <p:font typeface="Montserrat Bold" panose="020B0604020202020204" charset="0"/>
       <p:regular r:id="rId11"/>
       <p:bold r:id="rId12"/>
     </p:embeddedFont>
     <p:embeddedFont>
-      <p:font typeface="Montserrat Medium" panose="00000600000000000000" pitchFamily="2" charset="0"/>
+      <p:font typeface="Montserrat Medium" panose="020F0502020204030204" pitchFamily="2" charset="0"/>
       <p:regular r:id="rId13"/>
       <p:italic r:id="rId14"/>
     </p:embeddedFont>
@@ -335,7 +335,7 @@
             <a:fld id="{1D8BD707-D9CF-40AE-B4C6-C98DA3205C09}" type="datetimeFigureOut">
               <a:rPr lang="en-US" smtClean="0"/>
               <a:pPr/>
-              <a:t>5/31/2026</a:t>
+              <a:t>6/1/2026</a:t>
             </a:fld>
             <a:endParaRPr lang="en-US"/>
           </a:p>
@@ -500,7 +500,7 @@
             <a:fld id="{1D8BD707-D9CF-40AE-B4C6-C98DA3205C09}" type="datetimeFigureOut">
               <a:rPr lang="en-US" smtClean="0"/>
               <a:pPr/>
-              <a:t>5/31/2026</a:t>
+              <a:t>6/1/2026</a:t>
             </a:fld>
             <a:endParaRPr lang="en-US"/>
           </a:p>
@@ -675,7 +675,7 @@
             <a:fld id="{1D8BD707-D9CF-40AE-B4C6-C98DA3205C09}" type="datetimeFigureOut">
               <a:rPr lang="en-US" smtClean="0"/>
               <a:pPr/>
-              <a:t>5/31/2026</a:t>
+              <a:t>6/1/2026</a:t>
             </a:fld>
             <a:endParaRPr lang="en-US"/>
           </a:p>
@@ -840,7 +840,7 @@
             <a:fld id="{1D8BD707-D9CF-40AE-B4C6-C98DA3205C09}" type="datetimeFigureOut">
               <a:rPr lang="en-US" smtClean="0"/>
               <a:pPr/>
-              <a:t>5/31/2026</a:t>
+              <a:t>6/1/2026</a:t>
             </a:fld>
             <a:endParaRPr lang="en-US"/>
           </a:p>
@@ -1082,7 +1082,7 @@
             <a:fld id="{1D8BD707-D9CF-40AE-B4C6-C98DA3205C09}" type="datetimeFigureOut">
               <a:rPr lang="en-US" smtClean="0"/>
               <a:pPr/>
-              <a:t>5/31/2026</a:t>
+              <a:t>6/1/2026</a:t>
             </a:fld>
             <a:endParaRPr lang="en-US"/>
           </a:p>
@@ -1364,7 +1364,7 @@
             <a:fld id="{1D8BD707-D9CF-40AE-B4C6-C98DA3205C09}" type="datetimeFigureOut">
               <a:rPr lang="en-US" smtClean="0"/>
               <a:pPr/>
-              <a:t>5/31/2026</a:t>
+              <a:t>6/1/2026</a:t>
             </a:fld>
             <a:endParaRPr lang="en-US"/>
           </a:p>
@@ -1780,7 +1780,7 @@
             <a:fld id="{1D8BD707-D9CF-40AE-B4C6-C98DA3205C09}" type="datetimeFigureOut">
               <a:rPr lang="en-US" smtClean="0"/>
               <a:pPr/>
-              <a:t>5/31/2026</a:t>
+              <a:t>6/1/2026</a:t>
             </a:fld>
             <a:endParaRPr lang="en-US"/>
           </a:p>
@@ -1894,7 +1894,7 @@
             <a:fld id="{1D8BD707-D9CF-40AE-B4C6-C98DA3205C09}" type="datetimeFigureOut">
               <a:rPr lang="en-US" smtClean="0"/>
               <a:pPr/>
-              <a:t>5/31/2026</a:t>
+              <a:t>6/1/2026</a:t>
             </a:fld>
             <a:endParaRPr lang="en-US"/>
           </a:p>
@@ -1986,7 +1986,7 @@
             <a:fld id="{1D8BD707-D9CF-40AE-B4C6-C98DA3205C09}" type="datetimeFigureOut">
               <a:rPr lang="en-US" smtClean="0"/>
               <a:pPr/>
-              <a:t>5/31/2026</a:t>
+              <a:t>6/1/2026</a:t>
             </a:fld>
             <a:endParaRPr lang="en-US"/>
           </a:p>
@@ -2258,7 +2258,7 @@
             <a:fld id="{1D8BD707-D9CF-40AE-B4C6-C98DA3205C09}" type="datetimeFigureOut">
               <a:rPr lang="en-US" smtClean="0"/>
               <a:pPr/>
-              <a:t>5/31/2026</a:t>
+              <a:t>6/1/2026</a:t>
             </a:fld>
             <a:endParaRPr lang="en-US"/>
           </a:p>
@@ -2507,7 +2507,7 @@
             <a:fld id="{1D8BD707-D9CF-40AE-B4C6-C98DA3205C09}" type="datetimeFigureOut">
               <a:rPr lang="en-US" smtClean="0"/>
               <a:pPr/>
-              <a:t>5/31/2026</a:t>
+              <a:t>6/1/2026</a:t>
             </a:fld>
             <a:endParaRPr lang="en-US"/>
           </a:p>
@@ -2715,7 +2715,7 @@
             <a:fld id="{1D8BD707-D9CF-40AE-B4C6-C98DA3205C09}" type="datetimeFigureOut">
               <a:rPr lang="en-US" smtClean="0"/>
               <a:pPr/>
-              <a:t>5/31/2026</a:t>
+              <a:t>6/1/2026</a:t>
             </a:fld>
             <a:endParaRPr lang="en-US"/>
           </a:p>
@@ -3162,6 +3162,13 @@
               <a:srgbClr val="114487"/>
             </a:solidFill>
           </p:spPr>
+          <p:txBody>
+            <a:bodyPr/>
+            <a:lstStyle/>
+            <a:p>
+              <a:endParaRPr lang="pt-BR"/>
+            </a:p>
+          </p:txBody>
         </p:sp>
       </p:grpSp>
       <p:grpSp>
@@ -3240,6 +3247,13 @@
               <a:srgbClr val="81C4EB"/>
             </a:solidFill>
           </p:spPr>
+          <p:txBody>
+            <a:bodyPr/>
+            <a:lstStyle/>
+            <a:p>
+              <a:endParaRPr lang="pt-BR"/>
+            </a:p>
+          </p:txBody>
         </p:sp>
         <p:sp>
           <p:nvSpPr>
@@ -3321,6 +3335,13 @@
             </a:stretch>
           </a:blipFill>
         </p:spPr>
+        <p:txBody>
+          <a:bodyPr/>
+          <a:lstStyle/>
+          <a:p>
+            <a:endParaRPr lang="pt-BR"/>
+          </a:p>
+        </p:txBody>
       </p:sp>
       <p:grpSp>
         <p:nvGrpSpPr>
@@ -3418,6 +3439,13 @@
               <a:srgbClr val="132F3C"/>
             </a:solidFill>
           </p:spPr>
+          <p:txBody>
+            <a:bodyPr/>
+            <a:lstStyle/>
+            <a:p>
+              <a:endParaRPr lang="pt-BR"/>
+            </a:p>
+          </p:txBody>
         </p:sp>
         <p:sp>
           <p:nvSpPr>
@@ -3763,6 +3791,13 @@
               <a:srgbClr val="132F3C"/>
             </a:solidFill>
           </p:spPr>
+          <p:txBody>
+            <a:bodyPr/>
+            <a:lstStyle/>
+            <a:p>
+              <a:endParaRPr lang="pt-BR"/>
+            </a:p>
+          </p:txBody>
         </p:sp>
         <p:sp>
           <p:nvSpPr>
@@ -3869,6 +3904,13 @@
               <a:srgbClr val="81C4EB"/>
             </a:solidFill>
           </p:spPr>
+          <p:txBody>
+            <a:bodyPr/>
+            <a:lstStyle/>
+            <a:p>
+              <a:endParaRPr lang="pt-BR"/>
+            </a:p>
+          </p:txBody>
         </p:sp>
         <p:sp>
           <p:nvSpPr>
@@ -4005,6 +4047,13 @@
               <a:srgbClr val="113D57"/>
             </a:solidFill>
           </p:spPr>
+          <p:txBody>
+            <a:bodyPr/>
+            <a:lstStyle/>
+            <a:p>
+              <a:endParaRPr lang="pt-BR"/>
+            </a:p>
+          </p:txBody>
         </p:sp>
         <p:sp>
           <p:nvSpPr>
@@ -4111,6 +4160,13 @@
               <a:srgbClr val="4396C6"/>
             </a:solidFill>
           </p:spPr>
+          <p:txBody>
+            <a:bodyPr/>
+            <a:lstStyle/>
+            <a:p>
+              <a:endParaRPr lang="pt-BR"/>
+            </a:p>
+          </p:txBody>
         </p:sp>
         <p:sp>
           <p:nvSpPr>
@@ -4232,6 +4288,13 @@
               <a:srgbClr val="6A8AB4"/>
             </a:solidFill>
           </p:spPr>
+          <p:txBody>
+            <a:bodyPr/>
+            <a:lstStyle/>
+            <a:p>
+              <a:endParaRPr lang="pt-BR"/>
+            </a:p>
+          </p:txBody>
         </p:sp>
         <p:sp>
           <p:nvSpPr>
@@ -4338,6 +4401,13 @@
               <a:srgbClr val="6A8AB4"/>
             </a:solidFill>
           </p:spPr>
+          <p:txBody>
+            <a:bodyPr/>
+            <a:lstStyle/>
+            <a:p>
+              <a:endParaRPr lang="pt-BR"/>
+            </a:p>
+          </p:txBody>
         </p:sp>
         <p:sp>
           <p:nvSpPr>
@@ -4444,6 +4514,13 @@
               <a:srgbClr val="81C4EB"/>
             </a:solidFill>
           </p:spPr>
+          <p:txBody>
+            <a:bodyPr/>
+            <a:lstStyle/>
+            <a:p>
+              <a:endParaRPr lang="pt-BR"/>
+            </a:p>
+          </p:txBody>
         </p:sp>
         <p:sp>
           <p:nvSpPr>
@@ -5089,6 +5166,13 @@
               <a:srgbClr val="3383B2"/>
             </a:solidFill>
           </p:spPr>
+          <p:txBody>
+            <a:bodyPr/>
+            <a:lstStyle/>
+            <a:p>
+              <a:endParaRPr lang="pt-BR"/>
+            </a:p>
+          </p:txBody>
         </p:sp>
         <p:sp>
           <p:nvSpPr>
@@ -5210,6 +5294,13 @@
               <a:srgbClr val="C7E0EF"/>
             </a:solidFill>
           </p:spPr>
+          <p:txBody>
+            <a:bodyPr/>
+            <a:lstStyle/>
+            <a:p>
+              <a:endParaRPr lang="pt-BR"/>
+            </a:p>
+          </p:txBody>
         </p:sp>
         <p:sp>
           <p:nvSpPr>
@@ -5341,6 +5432,13 @@
               <a:srgbClr val="4396C6"/>
             </a:solidFill>
           </p:spPr>
+          <p:txBody>
+            <a:bodyPr/>
+            <a:lstStyle/>
+            <a:p>
+              <a:endParaRPr lang="pt-BR"/>
+            </a:p>
+          </p:txBody>
         </p:sp>
         <p:sp>
           <p:nvSpPr>
@@ -5422,6 +5520,13 @@
             </a:stretch>
           </a:blipFill>
         </p:spPr>
+        <p:txBody>
+          <a:bodyPr/>
+          <a:lstStyle/>
+          <a:p>
+            <a:endParaRPr lang="pt-BR"/>
+          </a:p>
+        </p:txBody>
       </p:sp>
       <p:sp>
         <p:nvSpPr>
@@ -5474,6 +5579,13 @@
             </a:stretch>
           </a:blipFill>
         </p:spPr>
+        <p:txBody>
+          <a:bodyPr/>
+          <a:lstStyle/>
+          <a:p>
+            <a:endParaRPr lang="pt-BR"/>
+          </a:p>
+        </p:txBody>
       </p:sp>
       <p:sp>
         <p:nvSpPr>
@@ -7453,6 +7565,13 @@
               <a:srgbClr val="113D57"/>
             </a:solidFill>
           </p:spPr>
+          <p:txBody>
+            <a:bodyPr/>
+            <a:lstStyle/>
+            <a:p>
+              <a:endParaRPr lang="pt-BR"/>
+            </a:p>
+          </p:txBody>
         </p:sp>
         <p:sp>
           <p:nvSpPr>
@@ -7546,6 +7665,13 @@
             </a:stretch>
           </a:blipFill>
         </p:spPr>
+        <p:txBody>
+          <a:bodyPr/>
+          <a:lstStyle/>
+          <a:p>
+            <a:endParaRPr lang="pt-BR"/>
+          </a:p>
+        </p:txBody>
       </p:sp>
     </p:spTree>
   </p:cSld>
@@ -9744,6 +9870,13 @@
               <a:srgbClr val="6A8AB4"/>
             </a:solidFill>
           </p:spPr>
+          <p:txBody>
+            <a:bodyPr/>
+            <a:lstStyle/>
+            <a:p>
+              <a:endParaRPr lang="pt-BR"/>
+            </a:p>
+          </p:txBody>
         </p:sp>
         <p:sp>
           <p:nvSpPr>
@@ -9850,6 +9983,13 @@
               <a:srgbClr val="113D57"/>
             </a:solidFill>
           </p:spPr>
+          <p:txBody>
+            <a:bodyPr/>
+            <a:lstStyle/>
+            <a:p>
+              <a:endParaRPr lang="pt-BR"/>
+            </a:p>
+          </p:txBody>
         </p:sp>
         <p:sp>
           <p:nvSpPr>
@@ -11077,6 +11217,13 @@
               <a:srgbClr val="113D57"/>
             </a:solidFill>
           </p:spPr>
+          <p:txBody>
+            <a:bodyPr/>
+            <a:lstStyle/>
+            <a:p>
+              <a:endParaRPr lang="pt-BR"/>
+            </a:p>
+          </p:txBody>
         </p:sp>
         <p:sp>
           <p:nvSpPr>
@@ -11188,6 +11335,13 @@
               <a:srgbClr val="4396C6"/>
             </a:solidFill>
           </p:spPr>
+          <p:txBody>
+            <a:bodyPr/>
+            <a:lstStyle/>
+            <a:p>
+              <a:endParaRPr lang="pt-BR"/>
+            </a:p>
+          </p:txBody>
         </p:sp>
         <p:sp>
           <p:nvSpPr>
@@ -11299,6 +11453,13 @@
               <a:srgbClr val="4396C6"/>
             </a:solidFill>
           </p:spPr>
+          <p:txBody>
+            <a:bodyPr/>
+            <a:lstStyle/>
+            <a:p>
+              <a:endParaRPr lang="pt-BR"/>
+            </a:p>
+          </p:txBody>
         </p:sp>
         <p:sp>
           <p:nvSpPr>
@@ -11410,6 +11571,13 @@
               <a:srgbClr val="4396C6"/>
             </a:solidFill>
           </p:spPr>
+          <p:txBody>
+            <a:bodyPr/>
+            <a:lstStyle/>
+            <a:p>
+              <a:endParaRPr lang="pt-BR"/>
+            </a:p>
+          </p:txBody>
         </p:sp>
         <p:sp>
           <p:nvSpPr>
@@ -11521,6 +11689,13 @@
               <a:srgbClr val="6A8AB4"/>
             </a:solidFill>
           </p:spPr>
+          <p:txBody>
+            <a:bodyPr/>
+            <a:lstStyle/>
+            <a:p>
+              <a:endParaRPr lang="pt-BR"/>
+            </a:p>
+          </p:txBody>
         </p:sp>
         <p:sp>
           <p:nvSpPr>
@@ -11642,6 +11817,13 @@
               <a:srgbClr val="C7E0EF"/>
             </a:solidFill>
           </p:spPr>
+          <p:txBody>
+            <a:bodyPr/>
+            <a:lstStyle/>
+            <a:p>
+              <a:endParaRPr lang="pt-BR"/>
+            </a:p>
+          </p:txBody>
         </p:sp>
         <p:sp>
           <p:nvSpPr>
@@ -12017,6 +12199,13 @@
               <a:srgbClr val="3383B2"/>
             </a:solidFill>
           </p:spPr>
+          <p:txBody>
+            <a:bodyPr/>
+            <a:lstStyle/>
+            <a:p>
+              <a:endParaRPr lang="pt-BR"/>
+            </a:p>
+          </p:txBody>
         </p:sp>
       </p:grpSp>
       <p:sp>
@@ -13157,6 +13346,13 @@
               <a:srgbClr val="C7E0EF"/>
             </a:solidFill>
           </p:spPr>
+          <p:txBody>
+            <a:bodyPr/>
+            <a:lstStyle/>
+            <a:p>
+              <a:endParaRPr lang="pt-BR"/>
+            </a:p>
+          </p:txBody>
         </p:sp>
         <p:sp>
           <p:nvSpPr>
@@ -13273,6 +13469,13 @@
               <a:srgbClr val="113D57"/>
             </a:solidFill>
           </p:spPr>
+          <p:txBody>
+            <a:bodyPr/>
+            <a:lstStyle/>
+            <a:p>
+              <a:endParaRPr lang="pt-BR"/>
+            </a:p>
+          </p:txBody>
         </p:sp>
         <p:sp>
           <p:nvSpPr>
@@ -13394,6 +13597,13 @@
               <a:srgbClr val="6A8AB4"/>
             </a:solidFill>
           </p:spPr>
+          <p:txBody>
+            <a:bodyPr/>
+            <a:lstStyle/>
+            <a:p>
+              <a:endParaRPr lang="pt-BR"/>
+            </a:p>
+          </p:txBody>
         </p:sp>
         <p:sp>
           <p:nvSpPr>
@@ -13874,6 +14084,13 @@
               <a:srgbClr val="113D57"/>
             </a:solidFill>
           </p:spPr>
+          <p:txBody>
+            <a:bodyPr/>
+            <a:lstStyle/>
+            <a:p>
+              <a:endParaRPr lang="pt-BR"/>
+            </a:p>
+          </p:txBody>
         </p:sp>
         <p:sp>
           <p:nvSpPr>
@@ -14155,6 +14372,13 @@
               <a:srgbClr val="113D57"/>
             </a:solidFill>
           </p:spPr>
+          <p:txBody>
+            <a:bodyPr/>
+            <a:lstStyle/>
+            <a:p>
+              <a:endParaRPr lang="pt-BR"/>
+            </a:p>
+          </p:txBody>
         </p:sp>
         <p:sp>
           <p:nvSpPr>
@@ -14437,6 +14661,13 @@
               <a:srgbClr val="113D57"/>
             </a:solidFill>
           </p:spPr>
+          <p:txBody>
+            <a:bodyPr/>
+            <a:lstStyle/>
+            <a:p>
+              <a:endParaRPr lang="pt-BR"/>
+            </a:p>
+          </p:txBody>
         </p:sp>
         <p:sp>
           <p:nvSpPr>
@@ -15491,6 +15722,13 @@
               <a:srgbClr val="113D57"/>
             </a:solidFill>
           </p:spPr>
+          <p:txBody>
+            <a:bodyPr/>
+            <a:lstStyle/>
+            <a:p>
+              <a:endParaRPr lang="pt-BR"/>
+            </a:p>
+          </p:txBody>
         </p:sp>
         <p:sp>
           <p:nvSpPr>
@@ -15612,6 +15850,13 @@
               <a:srgbClr val="C7E0EF"/>
             </a:solidFill>
           </p:spPr>
+          <p:txBody>
+            <a:bodyPr/>
+            <a:lstStyle/>
+            <a:p>
+              <a:endParaRPr lang="pt-BR"/>
+            </a:p>
+          </p:txBody>
         </p:sp>
         <p:sp>
           <p:nvSpPr>
@@ -15706,6 +15951,13 @@
               <a:srgbClr val="3383B2"/>
             </a:solidFill>
           </p:spPr>
+          <p:txBody>
+            <a:bodyPr/>
+            <a:lstStyle/>
+            <a:p>
+              <a:endParaRPr lang="pt-BR"/>
+            </a:p>
+          </p:txBody>
         </p:sp>
         <p:sp>
           <p:nvSpPr>
@@ -15787,6 +16039,13 @@
             </a:stretch>
           </a:blipFill>
         </p:spPr>
+        <p:txBody>
+          <a:bodyPr/>
+          <a:lstStyle/>
+          <a:p>
+            <a:endParaRPr lang="pt-BR"/>
+          </a:p>
+        </p:txBody>
       </p:sp>
       <p:sp>
         <p:nvSpPr>
@@ -15824,7 +16083,139 @@
                 <a:cs typeface="Montserrat Bold"/>
                 <a:sym typeface="Montserrat Bold"/>
               </a:rPr>
-              <a:t>5.  A apresentação do modelo em R e dos resultados obtidos.</a:t>
+              <a:t>6.  </a:t>
+            </a:r>
+            <a:r>
+              <a:rPr lang="en-US" sz="5000" b="1" dirty="0">
+                <a:solidFill>
+                  <a:srgbClr val="FFFFFF"/>
+                </a:solidFill>
+                <a:latin typeface="Montserrat Bold"/>
+                <a:ea typeface="Montserrat Bold"/>
+                <a:cs typeface="Montserrat Bold"/>
+                <a:sym typeface="Montserrat Bold"/>
+              </a:rPr>
+              <a:t>A </a:t>
+            </a:r>
+            <a:r>
+              <a:rPr lang="en-US" sz="5000" b="1" dirty="0" err="1">
+                <a:solidFill>
+                  <a:srgbClr val="FFFFFF"/>
+                </a:solidFill>
+                <a:latin typeface="Montserrat Bold"/>
+                <a:ea typeface="Montserrat Bold"/>
+                <a:cs typeface="Montserrat Bold"/>
+                <a:sym typeface="Montserrat Bold"/>
+              </a:rPr>
+              <a:t>apresentação</a:t>
+            </a:r>
+            <a:r>
+              <a:rPr lang="en-US" sz="5000" b="1" dirty="0">
+                <a:solidFill>
+                  <a:srgbClr val="FFFFFF"/>
+                </a:solidFill>
+                <a:latin typeface="Montserrat Bold"/>
+                <a:ea typeface="Montserrat Bold"/>
+                <a:cs typeface="Montserrat Bold"/>
+                <a:sym typeface="Montserrat Bold"/>
+              </a:rPr>
+              <a:t> do </a:t>
+            </a:r>
+            <a:r>
+              <a:rPr lang="en-US" sz="5000" b="1" dirty="0" err="1">
+                <a:solidFill>
+                  <a:srgbClr val="FFFFFF"/>
+                </a:solidFill>
+                <a:latin typeface="Montserrat Bold"/>
+                <a:ea typeface="Montserrat Bold"/>
+                <a:cs typeface="Montserrat Bold"/>
+                <a:sym typeface="Montserrat Bold"/>
+              </a:rPr>
+              <a:t>modelo</a:t>
+            </a:r>
+            <a:r>
+              <a:rPr lang="en-US" sz="5000" b="1" dirty="0">
+                <a:solidFill>
+                  <a:srgbClr val="FFFFFF"/>
+                </a:solidFill>
+                <a:latin typeface="Montserrat Bold"/>
+                <a:ea typeface="Montserrat Bold"/>
+                <a:cs typeface="Montserrat Bold"/>
+                <a:sym typeface="Montserrat Bold"/>
+              </a:rPr>
+              <a:t> </a:t>
+            </a:r>
+            <a:r>
+              <a:rPr lang="en-US" sz="5000" b="1" dirty="0" err="1">
+                <a:solidFill>
+                  <a:srgbClr val="FFFFFF"/>
+                </a:solidFill>
+                <a:latin typeface="Montserrat Bold"/>
+                <a:ea typeface="Montserrat Bold"/>
+                <a:cs typeface="Montserrat Bold"/>
+                <a:sym typeface="Montserrat Bold"/>
+              </a:rPr>
+              <a:t>em</a:t>
+            </a:r>
+            <a:r>
+              <a:rPr lang="en-US" sz="5000" b="1" dirty="0">
+                <a:solidFill>
+                  <a:srgbClr val="FFFFFF"/>
+                </a:solidFill>
+                <a:latin typeface="Montserrat Bold"/>
+                <a:ea typeface="Montserrat Bold"/>
+                <a:cs typeface="Montserrat Bold"/>
+                <a:sym typeface="Montserrat Bold"/>
+              </a:rPr>
+              <a:t> R e dos </a:t>
+            </a:r>
+            <a:r>
+              <a:rPr lang="en-US" sz="5000" b="1" dirty="0" err="1">
+                <a:solidFill>
+                  <a:srgbClr val="FFFFFF"/>
+                </a:solidFill>
+                <a:latin typeface="Montserrat Bold"/>
+                <a:ea typeface="Montserrat Bold"/>
+                <a:cs typeface="Montserrat Bold"/>
+                <a:sym typeface="Montserrat Bold"/>
+              </a:rPr>
+              <a:t>resultados</a:t>
+            </a:r>
+            <a:r>
+              <a:rPr lang="en-US" sz="5000" b="1" dirty="0">
+                <a:solidFill>
+                  <a:srgbClr val="FFFFFF"/>
+                </a:solidFill>
+                <a:latin typeface="Montserrat Bold"/>
+                <a:ea typeface="Montserrat Bold"/>
+                <a:cs typeface="Montserrat Bold"/>
+                <a:sym typeface="Montserrat Bold"/>
+              </a:rPr>
+              <a:t> </a:t>
+            </a:r>
+            <a:r>
+              <a:rPr lang="en-US" sz="5000" b="1" dirty="0" err="1">
+                <a:solidFill>
+                  <a:srgbClr val="FFFFFF"/>
+                </a:solidFill>
+                <a:latin typeface="Montserrat Bold"/>
+                <a:ea typeface="Montserrat Bold"/>
+                <a:cs typeface="Montserrat Bold"/>
+                <a:sym typeface="Montserrat Bold"/>
+              </a:rPr>
+              <a:t>obtidos</a:t>
+            </a:r>
+            <a:r>
+              <a:rPr lang="en-US" sz="5000" b="1" dirty="0">
+                <a:solidFill>
+                  <a:srgbClr val="FFFFFF"/>
+                </a:solidFill>
+                <a:latin typeface="Montserrat Bold"/>
+                <a:ea typeface="Montserrat Bold"/>
+                <a:cs typeface="Montserrat Bold"/>
+                <a:sym typeface="Montserrat Bold"/>
+              </a:rPr>
+              <a:t>.</a:t>
             </a:r>
           </a:p>
         </p:txBody>
@@ -17455,6 +17846,13 @@
             </a:stretch>
           </a:blipFill>
         </p:spPr>
+        <p:txBody>
+          <a:bodyPr/>
+          <a:lstStyle/>
+          <a:p>
+            <a:endParaRPr lang="pt-BR"/>
+          </a:p>
+        </p:txBody>
       </p:sp>
     </p:spTree>
   </p:cSld>

--- a/Calibração de Pesos em Surveys Amostrais.pptx
+++ b/Calibração de Pesos em Surveys Amostrais.pptx
@@ -24,7 +24,7 @@
       <p:bold r:id="rId12"/>
     </p:embeddedFont>
     <p:embeddedFont>
-      <p:font typeface="Montserrat Medium" panose="020F0502020204030204" pitchFamily="2" charset="0"/>
+      <p:font typeface="Montserrat Medium" panose="00000600000000000000" pitchFamily="2" charset="0"/>
       <p:regular r:id="rId13"/>
       <p:italic r:id="rId14"/>
     </p:embeddedFont>
